--- a/Santander_Architecture.pptx
+++ b/Santander_Architecture.pptx
@@ -8076,7 +8076,7 @@
                 </a:solidFill>
                 <a:latin typeface="Calibri"/>
               </a:rPr>
-              <a:t>React 18 — App.jsx  (~3,200 lines, single component)</a:t>
+              <a:t>React 18 — App.jsx  (~3,700 lines, single component)</a:t>
             </a:r>
           </a:p>
         </p:txBody>
@@ -9473,7 +9473,7 @@
         <p:spPr>
           <a:xfrm>
             <a:off x="777240" y="4590288"/>
-            <a:ext cx="1691640" cy="438912"/>
+            <a:ext cx="1115568" cy="438912"/>
           </a:xfrm>
           <a:prstGeom prst="rect">
             <a:avLst/>
@@ -9516,22 +9516,22 @@
         <p:spPr>
           <a:xfrm>
             <a:off x="777240" y="4590288"/>
-            <a:ext cx="1691640" cy="438912"/>
-          </a:xfrm>
-          <a:prstGeom prst="rect">
-            <a:avLst/>
-          </a:prstGeom>
-          <a:noFill/>
-        </p:spPr>
-        <p:txBody>
-          <a:bodyPr wrap="square">
-            <a:spAutoFit/>
-          </a:bodyPr>
-          <a:lstStyle/>
-          <a:p>
-            <a:pPr algn="ctr"/>
-            <a:r>
-              <a:rPr sz="900" b="1" i="0">
+            <a:ext cx="1115568" cy="438912"/>
+          </a:xfrm>
+          <a:prstGeom prst="rect">
+            <a:avLst/>
+          </a:prstGeom>
+          <a:noFill/>
+        </p:spPr>
+        <p:txBody>
+          <a:bodyPr wrap="square">
+            <a:spAutoFit/>
+          </a:bodyPr>
+          <a:lstStyle/>
+          <a:p>
+            <a:pPr algn="ctr"/>
+            <a:r>
+              <a:rPr sz="800" b="1" i="0">
                 <a:solidFill>
                   <a:srgbClr val="FFFFFF"/>
                 </a:solidFill>
@@ -9550,8 +9550,8 @@
         </p:nvSpPr>
         <p:spPr>
           <a:xfrm>
-            <a:off x="2564892" y="4590288"/>
-            <a:ext cx="1691640" cy="438912"/>
+            <a:off x="1959559" y="4590288"/>
+            <a:ext cx="1115568" cy="438912"/>
           </a:xfrm>
           <a:prstGeom prst="rect">
             <a:avLst/>
@@ -9593,23 +9593,23 @@
         </p:nvSpPr>
         <p:spPr>
           <a:xfrm>
-            <a:off x="2564892" y="4590288"/>
-            <a:ext cx="1691640" cy="438912"/>
-          </a:xfrm>
-          <a:prstGeom prst="rect">
-            <a:avLst/>
-          </a:prstGeom>
-          <a:noFill/>
-        </p:spPr>
-        <p:txBody>
-          <a:bodyPr wrap="square">
-            <a:spAutoFit/>
-          </a:bodyPr>
-          <a:lstStyle/>
-          <a:p>
-            <a:pPr algn="ctr"/>
-            <a:r>
-              <a:rPr sz="900" b="1" i="0">
+            <a:off x="1959559" y="4590288"/>
+            <a:ext cx="1115568" cy="438912"/>
+          </a:xfrm>
+          <a:prstGeom prst="rect">
+            <a:avLst/>
+          </a:prstGeom>
+          <a:noFill/>
+        </p:spPr>
+        <p:txBody>
+          <a:bodyPr wrap="square">
+            <a:spAutoFit/>
+          </a:bodyPr>
+          <a:lstStyle/>
+          <a:p>
+            <a:pPr algn="ctr"/>
+            <a:r>
+              <a:rPr sz="800" b="1" i="0">
                 <a:solidFill>
                   <a:srgbClr val="FFFFFF"/>
                 </a:solidFill>
@@ -9628,8 +9628,8 @@
         </p:nvSpPr>
         <p:spPr>
           <a:xfrm>
-            <a:off x="4352544" y="4590288"/>
-            <a:ext cx="1691640" cy="438912"/>
+            <a:off x="3141878" y="4590288"/>
+            <a:ext cx="1115568" cy="438912"/>
           </a:xfrm>
           <a:prstGeom prst="rect">
             <a:avLst/>
@@ -9671,23 +9671,23 @@
         </p:nvSpPr>
         <p:spPr>
           <a:xfrm>
-            <a:off x="4352544" y="4590288"/>
-            <a:ext cx="1691640" cy="438912"/>
-          </a:xfrm>
-          <a:prstGeom prst="rect">
-            <a:avLst/>
-          </a:prstGeom>
-          <a:noFill/>
-        </p:spPr>
-        <p:txBody>
-          <a:bodyPr wrap="square">
-            <a:spAutoFit/>
-          </a:bodyPr>
-          <a:lstStyle/>
-          <a:p>
-            <a:pPr algn="ctr"/>
-            <a:r>
-              <a:rPr sz="900" b="1" i="0">
+            <a:off x="3141878" y="4590288"/>
+            <a:ext cx="1115568" cy="438912"/>
+          </a:xfrm>
+          <a:prstGeom prst="rect">
+            <a:avLst/>
+          </a:prstGeom>
+          <a:noFill/>
+        </p:spPr>
+        <p:txBody>
+          <a:bodyPr wrap="square">
+            <a:spAutoFit/>
+          </a:bodyPr>
+          <a:lstStyle/>
+          <a:p>
+            <a:pPr algn="ctr"/>
+            <a:r>
+              <a:rPr sz="800" b="1" i="0">
                 <a:solidFill>
                   <a:srgbClr val="FFFFFF"/>
                 </a:solidFill>
@@ -9706,8 +9706,8 @@
         </p:nvSpPr>
         <p:spPr>
           <a:xfrm>
-            <a:off x="6140196" y="4590288"/>
-            <a:ext cx="1691640" cy="438912"/>
+            <a:off x="4324197" y="4590288"/>
+            <a:ext cx="1115568" cy="438912"/>
           </a:xfrm>
           <a:prstGeom prst="rect">
             <a:avLst/>
@@ -9749,23 +9749,23 @@
         </p:nvSpPr>
         <p:spPr>
           <a:xfrm>
-            <a:off x="6140196" y="4590288"/>
-            <a:ext cx="1691640" cy="438912"/>
-          </a:xfrm>
-          <a:prstGeom prst="rect">
-            <a:avLst/>
-          </a:prstGeom>
-          <a:noFill/>
-        </p:spPr>
-        <p:txBody>
-          <a:bodyPr wrap="square">
-            <a:spAutoFit/>
-          </a:bodyPr>
-          <a:lstStyle/>
-          <a:p>
-            <a:pPr algn="ctr"/>
-            <a:r>
-              <a:rPr sz="900" b="1" i="0">
+            <a:off x="4324197" y="4590288"/>
+            <a:ext cx="1115568" cy="438912"/>
+          </a:xfrm>
+          <a:prstGeom prst="rect">
+            <a:avLst/>
+          </a:prstGeom>
+          <a:noFill/>
+        </p:spPr>
+        <p:txBody>
+          <a:bodyPr wrap="square">
+            <a:spAutoFit/>
+          </a:bodyPr>
+          <a:lstStyle/>
+          <a:p>
+            <a:pPr algn="ctr"/>
+            <a:r>
+              <a:rPr sz="800" b="1" i="0">
                 <a:solidFill>
                   <a:srgbClr val="FFFFFF"/>
                 </a:solidFill>
@@ -9784,8 +9784,8 @@
         </p:nvSpPr>
         <p:spPr>
           <a:xfrm>
-            <a:off x="7927848" y="4590288"/>
-            <a:ext cx="1691640" cy="438912"/>
+            <a:off x="5506516" y="4590288"/>
+            <a:ext cx="1115568" cy="438912"/>
           </a:xfrm>
           <a:prstGeom prst="rect">
             <a:avLst/>
@@ -9827,23 +9827,23 @@
         </p:nvSpPr>
         <p:spPr>
           <a:xfrm>
-            <a:off x="7927848" y="4590288"/>
-            <a:ext cx="1691640" cy="438912"/>
-          </a:xfrm>
-          <a:prstGeom prst="rect">
-            <a:avLst/>
-          </a:prstGeom>
-          <a:noFill/>
-        </p:spPr>
-        <p:txBody>
-          <a:bodyPr wrap="square">
-            <a:spAutoFit/>
-          </a:bodyPr>
-          <a:lstStyle/>
-          <a:p>
-            <a:pPr algn="ctr"/>
-            <a:r>
-              <a:rPr sz="900" b="1" i="0">
+            <a:off x="5506516" y="4590288"/>
+            <a:ext cx="1115568" cy="438912"/>
+          </a:xfrm>
+          <a:prstGeom prst="rect">
+            <a:avLst/>
+          </a:prstGeom>
+          <a:noFill/>
+        </p:spPr>
+        <p:txBody>
+          <a:bodyPr wrap="square">
+            <a:spAutoFit/>
+          </a:bodyPr>
+          <a:lstStyle/>
+          <a:p>
+            <a:pPr algn="ctr"/>
+            <a:r>
+              <a:rPr sz="800" b="1" i="0">
                 <a:solidFill>
                   <a:srgbClr val="FFFFFF"/>
                 </a:solidFill>
@@ -9862,8 +9862,8 @@
         </p:nvSpPr>
         <p:spPr>
           <a:xfrm>
-            <a:off x="9715500" y="4590288"/>
-            <a:ext cx="1691640" cy="438912"/>
+            <a:off x="6688836" y="4590288"/>
+            <a:ext cx="1115568" cy="438912"/>
           </a:xfrm>
           <a:prstGeom prst="rect">
             <a:avLst/>
@@ -9905,23 +9905,23 @@
         </p:nvSpPr>
         <p:spPr>
           <a:xfrm>
-            <a:off x="9715500" y="4590288"/>
-            <a:ext cx="1691640" cy="438912"/>
-          </a:xfrm>
-          <a:prstGeom prst="rect">
-            <a:avLst/>
-          </a:prstGeom>
-          <a:noFill/>
-        </p:spPr>
-        <p:txBody>
-          <a:bodyPr wrap="square">
-            <a:spAutoFit/>
-          </a:bodyPr>
-          <a:lstStyle/>
-          <a:p>
-            <a:pPr algn="ctr"/>
-            <a:r>
-              <a:rPr sz="900" b="1" i="0">
+            <a:off x="6688836" y="4590288"/>
+            <a:ext cx="1115568" cy="438912"/>
+          </a:xfrm>
+          <a:prstGeom prst="rect">
+            <a:avLst/>
+          </a:prstGeom>
+          <a:noFill/>
+        </p:spPr>
+        <p:txBody>
+          <a:bodyPr wrap="square">
+            <a:spAutoFit/>
+          </a:bodyPr>
+          <a:lstStyle/>
+          <a:p>
+            <a:pPr algn="ctr"/>
+            <a:r>
+              <a:rPr sz="800" b="1" i="0">
                 <a:solidFill>
                   <a:srgbClr val="FFFFFF"/>
                 </a:solidFill>
@@ -9935,6 +9935,240 @@
       <p:sp>
         <p:nvSpPr>
           <p:cNvPr id="61" name="Rectangle 60"/>
+          <p:cNvSpPr/>
+          <p:nvPr/>
+        </p:nvSpPr>
+        <p:spPr>
+          <a:xfrm>
+            <a:off x="7871155" y="4590288"/>
+            <a:ext cx="1115568" cy="438912"/>
+          </a:xfrm>
+          <a:prstGeom prst="rect">
+            <a:avLst/>
+          </a:prstGeom>
+          <a:solidFill>
+            <a:srgbClr val="1C1917"/>
+          </a:solidFill>
+          <a:ln>
+            <a:noFill/>
+          </a:ln>
+        </p:spPr>
+        <p:style>
+          <a:lnRef idx="1">
+            <a:schemeClr val="accent1"/>
+          </a:lnRef>
+          <a:fillRef idx="3">
+            <a:schemeClr val="accent1"/>
+          </a:fillRef>
+          <a:effectRef idx="2">
+            <a:schemeClr val="accent1"/>
+          </a:effectRef>
+          <a:fontRef idx="minor">
+            <a:schemeClr val="lt1"/>
+          </a:fontRef>
+        </p:style>
+        <p:txBody>
+          <a:bodyPr rtlCol="0" anchor="ctr"/>
+          <a:lstStyle/>
+          <a:p>
+            <a:pPr algn="ctr"/>
+          </a:p>
+        </p:txBody>
+      </p:sp>
+      <p:sp>
+        <p:nvSpPr>
+          <p:cNvPr id="62" name="TextBox 61"/>
+          <p:cNvSpPr txBox="1"/>
+          <p:nvPr/>
+        </p:nvSpPr>
+        <p:spPr>
+          <a:xfrm>
+            <a:off x="7871155" y="4590288"/>
+            <a:ext cx="1115568" cy="438912"/>
+          </a:xfrm>
+          <a:prstGeom prst="rect">
+            <a:avLst/>
+          </a:prstGeom>
+          <a:noFill/>
+        </p:spPr>
+        <p:txBody>
+          <a:bodyPr wrap="square">
+            <a:spAutoFit/>
+          </a:bodyPr>
+          <a:lstStyle/>
+          <a:p>
+            <a:pPr algn="ctr"/>
+            <a:r>
+              <a:rPr sz="800" b="1" i="0">
+                <a:solidFill>
+                  <a:srgbClr val="FFFFFF"/>
+                </a:solidFill>
+                <a:latin typeface="Calibri"/>
+              </a:rPr>
+              <a:t>Lending</a:t>
+            </a:r>
+          </a:p>
+        </p:txBody>
+      </p:sp>
+      <p:sp>
+        <p:nvSpPr>
+          <p:cNvPr id="63" name="Rectangle 62"/>
+          <p:cNvSpPr/>
+          <p:nvPr/>
+        </p:nvSpPr>
+        <p:spPr>
+          <a:xfrm>
+            <a:off x="9053474" y="4590288"/>
+            <a:ext cx="1115568" cy="438912"/>
+          </a:xfrm>
+          <a:prstGeom prst="rect">
+            <a:avLst/>
+          </a:prstGeom>
+          <a:solidFill>
+            <a:srgbClr val="1C1917"/>
+          </a:solidFill>
+          <a:ln>
+            <a:noFill/>
+          </a:ln>
+        </p:spPr>
+        <p:style>
+          <a:lnRef idx="1">
+            <a:schemeClr val="accent1"/>
+          </a:lnRef>
+          <a:fillRef idx="3">
+            <a:schemeClr val="accent1"/>
+          </a:fillRef>
+          <a:effectRef idx="2">
+            <a:schemeClr val="accent1"/>
+          </a:effectRef>
+          <a:fontRef idx="minor">
+            <a:schemeClr val="lt1"/>
+          </a:fontRef>
+        </p:style>
+        <p:txBody>
+          <a:bodyPr rtlCol="0" anchor="ctr"/>
+          <a:lstStyle/>
+          <a:p>
+            <a:pPr algn="ctr"/>
+          </a:p>
+        </p:txBody>
+      </p:sp>
+      <p:sp>
+        <p:nvSpPr>
+          <p:cNvPr id="64" name="TextBox 63"/>
+          <p:cNvSpPr txBox="1"/>
+          <p:nvPr/>
+        </p:nvSpPr>
+        <p:spPr>
+          <a:xfrm>
+            <a:off x="9053474" y="4590288"/>
+            <a:ext cx="1115568" cy="438912"/>
+          </a:xfrm>
+          <a:prstGeom prst="rect">
+            <a:avLst/>
+          </a:prstGeom>
+          <a:noFill/>
+        </p:spPr>
+        <p:txBody>
+          <a:bodyPr wrap="square">
+            <a:spAutoFit/>
+          </a:bodyPr>
+          <a:lstStyle/>
+          <a:p>
+            <a:pPr algn="ctr"/>
+            <a:r>
+              <a:rPr sz="800" b="1" i="0">
+                <a:solidFill>
+                  <a:srgbClr val="FFFFFF"/>
+                </a:solidFill>
+                <a:latin typeface="Calibri"/>
+              </a:rPr>
+              <a:t>FX</a:t>
+            </a:r>
+          </a:p>
+        </p:txBody>
+      </p:sp>
+      <p:sp>
+        <p:nvSpPr>
+          <p:cNvPr id="65" name="Rectangle 64"/>
+          <p:cNvSpPr/>
+          <p:nvPr/>
+        </p:nvSpPr>
+        <p:spPr>
+          <a:xfrm>
+            <a:off x="10235793" y="4590288"/>
+            <a:ext cx="1115568" cy="438912"/>
+          </a:xfrm>
+          <a:prstGeom prst="rect">
+            <a:avLst/>
+          </a:prstGeom>
+          <a:solidFill>
+            <a:srgbClr val="1C1917"/>
+          </a:solidFill>
+          <a:ln>
+            <a:noFill/>
+          </a:ln>
+        </p:spPr>
+        <p:style>
+          <a:lnRef idx="1">
+            <a:schemeClr val="accent1"/>
+          </a:lnRef>
+          <a:fillRef idx="3">
+            <a:schemeClr val="accent1"/>
+          </a:fillRef>
+          <a:effectRef idx="2">
+            <a:schemeClr val="accent1"/>
+          </a:effectRef>
+          <a:fontRef idx="minor">
+            <a:schemeClr val="lt1"/>
+          </a:fontRef>
+        </p:style>
+        <p:txBody>
+          <a:bodyPr rtlCol="0" anchor="ctr"/>
+          <a:lstStyle/>
+          <a:p>
+            <a:pPr algn="ctr"/>
+          </a:p>
+        </p:txBody>
+      </p:sp>
+      <p:sp>
+        <p:nvSpPr>
+          <p:cNvPr id="66" name="TextBox 65"/>
+          <p:cNvSpPr txBox="1"/>
+          <p:nvPr/>
+        </p:nvSpPr>
+        <p:spPr>
+          <a:xfrm>
+            <a:off x="10235793" y="4590288"/>
+            <a:ext cx="1115568" cy="438912"/>
+          </a:xfrm>
+          <a:prstGeom prst="rect">
+            <a:avLst/>
+          </a:prstGeom>
+          <a:noFill/>
+        </p:spPr>
+        <p:txBody>
+          <a:bodyPr wrap="square">
+            <a:spAutoFit/>
+          </a:bodyPr>
+          <a:lstStyle/>
+          <a:p>
+            <a:pPr algn="ctr"/>
+            <a:r>
+              <a:rPr sz="800" b="1" i="0">
+                <a:solidFill>
+                  <a:srgbClr val="FFFFFF"/>
+                </a:solidFill>
+                <a:latin typeface="Calibri"/>
+              </a:rPr>
+              <a:t>Receipt Scan</a:t>
+            </a:r>
+          </a:p>
+        </p:txBody>
+      </p:sp>
+      <p:sp>
+        <p:nvSpPr>
+          <p:cNvPr id="67" name="Rectangle 66"/>
           <p:cNvSpPr/>
           <p:nvPr/>
         </p:nvSpPr>
@@ -9977,7 +10211,7 @@
       </p:sp>
       <p:sp>
         <p:nvSpPr>
-          <p:cNvPr id="62" name="TextBox 61"/>
+          <p:cNvPr id="68" name="TextBox 67"/>
           <p:cNvSpPr txBox="1"/>
           <p:nvPr/>
         </p:nvSpPr>
@@ -10012,7 +10246,7 @@
       </p:sp>
       <p:sp>
         <p:nvSpPr>
-          <p:cNvPr id="63" name="TextBox 62"/>
+          <p:cNvPr id="69" name="TextBox 68"/>
           <p:cNvSpPr txBox="1"/>
           <p:nvPr/>
         </p:nvSpPr>
@@ -10047,7 +10281,7 @@
       </p:sp>
       <p:sp>
         <p:nvSpPr>
-          <p:cNvPr id="64" name="TextBox 63"/>
+          <p:cNvPr id="70" name="TextBox 69"/>
           <p:cNvSpPr txBox="1"/>
           <p:nvPr/>
         </p:nvSpPr>
@@ -11261,7 +11495,7 @@
                 </a:solidFill>
                 <a:latin typeface="Calibri"/>
               </a:rPr>
-              <a:t>mandateAction, newPerson*</a:t>
+              <a:t>lendingTerm, lendingCompleted</a:t>
             </a:r>
           </a:p>
           <a:p>
@@ -11286,7 +11520,7 @@
                 </a:solidFill>
                 <a:latin typeface="Calibri"/>
               </a:rPr>
-              <a:t>payees[], wagesSource</a:t>
+              <a:t>fxAmount, fxCurrency, fxIBAN</a:t>
             </a:r>
           </a:p>
           <a:p>
@@ -11311,7 +11545,7 @@
                 </a:solidFill>
                 <a:latin typeface="Calibri"/>
               </a:rPr>
-              <a:t>mtdReviewedTransactions</a:t>
+              <a:t>receiptStep, scannedTxns</a:t>
             </a:r>
           </a:p>
         </p:txBody>
@@ -11532,7 +11766,7 @@
                 </a:solidFill>
                 <a:latin typeface="Calibri"/>
               </a:rPr>
-              <a:t>showEntitySwitcher</a:t>
+              <a:t>showOBSheet, showPinSheet</a:t>
             </a:r>
           </a:p>
           <a:p>
@@ -11557,7 +11791,7 @@
                 </a:solidFill>
                 <a:latin typeface="Calibri"/>
               </a:rPr>
-              <a:t>rmReason</a:t>
+              <a:t>showReceiptSheet, frozenCards</a:t>
             </a:r>
           </a:p>
         </p:txBody>

--- a/Santander_Architecture.pptx
+++ b/Santander_Architecture.pptx
@@ -6999,8 +6999,8 @@
         </p:nvSpPr>
         <p:spPr>
           <a:xfrm>
-            <a:off x="4754880" y="4224528"/>
-            <a:ext cx="2743200" cy="256032"/>
+            <a:off x="4754880" y="3950208"/>
+            <a:ext cx="2606040" cy="256032"/>
           </a:xfrm>
           <a:prstGeom prst="rect">
             <a:avLst/>
@@ -7034,8 +7034,8 @@
         </p:nvSpPr>
         <p:spPr>
           <a:xfrm>
-            <a:off x="4754880" y="4526280"/>
-            <a:ext cx="2606040" cy="420624"/>
+            <a:off x="4754880" y="4261104"/>
+            <a:ext cx="2606040" cy="256032"/>
           </a:xfrm>
           <a:prstGeom prst="rect">
             <a:avLst/>
@@ -7077,8 +7077,8 @@
         </p:nvSpPr>
         <p:spPr>
           <a:xfrm>
-            <a:off x="4864608" y="4581144"/>
-            <a:ext cx="2395728" cy="219456"/>
+            <a:off x="4864608" y="4297680"/>
+            <a:ext cx="2395728" cy="201168"/>
           </a:xfrm>
           <a:prstGeom prst="rect">
             <a:avLst/>
@@ -7112,8 +7112,8 @@
         </p:nvSpPr>
         <p:spPr>
           <a:xfrm>
-            <a:off x="7452360" y="4617720"/>
-            <a:ext cx="4572000" cy="329184"/>
+            <a:off x="4773168" y="4535424"/>
+            <a:ext cx="2542032" cy="164592"/>
           </a:xfrm>
           <a:prstGeom prst="rect">
             <a:avLst/>
@@ -7128,7 +7128,7 @@
           <a:p>
             <a:pPr algn="l"/>
             <a:r>
-              <a:rPr sz="850" b="0" i="0">
+              <a:rPr sz="750" b="0" i="0">
                 <a:solidFill>
                   <a:srgbClr val="78716C"/>
                 </a:solidFill>
@@ -7147,8 +7147,8 @@
         </p:nvSpPr>
         <p:spPr>
           <a:xfrm>
-            <a:off x="4754880" y="5029200"/>
-            <a:ext cx="2606040" cy="420624"/>
+            <a:off x="4754880" y="4736592"/>
+            <a:ext cx="2606040" cy="256032"/>
           </a:xfrm>
           <a:prstGeom prst="rect">
             <a:avLst/>
@@ -7190,8 +7190,8 @@
         </p:nvSpPr>
         <p:spPr>
           <a:xfrm>
-            <a:off x="4864608" y="5084064"/>
-            <a:ext cx="2395728" cy="219456"/>
+            <a:off x="4864608" y="4773168"/>
+            <a:ext cx="2395728" cy="201168"/>
           </a:xfrm>
           <a:prstGeom prst="rect">
             <a:avLst/>
@@ -7225,8 +7225,8 @@
         </p:nvSpPr>
         <p:spPr>
           <a:xfrm>
-            <a:off x="7452360" y="5120640"/>
-            <a:ext cx="4572000" cy="329184"/>
+            <a:off x="4773168" y="5010912"/>
+            <a:ext cx="2542032" cy="164592"/>
           </a:xfrm>
           <a:prstGeom prst="rect">
             <a:avLst/>
@@ -7241,7 +7241,7 @@
           <a:p>
             <a:pPr algn="l"/>
             <a:r>
-              <a:rPr sz="850" b="0" i="0">
+              <a:rPr sz="750" b="0" i="0">
                 <a:solidFill>
                   <a:srgbClr val="78716C"/>
                 </a:solidFill>
@@ -7260,8 +7260,8 @@
         </p:nvSpPr>
         <p:spPr>
           <a:xfrm>
-            <a:off x="4754880" y="5532120"/>
-            <a:ext cx="2606040" cy="420624"/>
+            <a:off x="4754880" y="5212080"/>
+            <a:ext cx="2606040" cy="256032"/>
           </a:xfrm>
           <a:prstGeom prst="rect">
             <a:avLst/>
@@ -7303,8 +7303,8 @@
         </p:nvSpPr>
         <p:spPr>
           <a:xfrm>
-            <a:off x="4864608" y="5586984"/>
-            <a:ext cx="2395728" cy="219456"/>
+            <a:off x="4864608" y="5248656"/>
+            <a:ext cx="2395728" cy="201168"/>
           </a:xfrm>
           <a:prstGeom prst="rect">
             <a:avLst/>
@@ -7338,8 +7338,8 @@
         </p:nvSpPr>
         <p:spPr>
           <a:xfrm>
-            <a:off x="7452360" y="5623560"/>
-            <a:ext cx="4572000" cy="329184"/>
+            <a:off x="4773168" y="5486400"/>
+            <a:ext cx="2542032" cy="164592"/>
           </a:xfrm>
           <a:prstGeom prst="rect">
             <a:avLst/>
@@ -7354,7 +7354,7 @@
           <a:p>
             <a:pPr algn="l"/>
             <a:r>
-              <a:rPr sz="850" b="0" i="0">
+              <a:rPr sz="750" b="0" i="0">
                 <a:solidFill>
                   <a:srgbClr val="78716C"/>
                 </a:solidFill>
@@ -7373,8 +7373,8 @@
         </p:nvSpPr>
         <p:spPr>
           <a:xfrm>
-            <a:off x="4754880" y="6035040"/>
-            <a:ext cx="2606040" cy="420624"/>
+            <a:off x="4754880" y="5687568"/>
+            <a:ext cx="2606040" cy="256032"/>
           </a:xfrm>
           <a:prstGeom prst="rect">
             <a:avLst/>
@@ -7416,8 +7416,8 @@
         </p:nvSpPr>
         <p:spPr>
           <a:xfrm>
-            <a:off x="4864608" y="6089904"/>
-            <a:ext cx="2395728" cy="219456"/>
+            <a:off x="4864608" y="5724144"/>
+            <a:ext cx="2395728" cy="201168"/>
           </a:xfrm>
           <a:prstGeom prst="rect">
             <a:avLst/>
@@ -7451,8 +7451,8 @@
         </p:nvSpPr>
         <p:spPr>
           <a:xfrm>
-            <a:off x="7452360" y="6126480"/>
-            <a:ext cx="4572000" cy="329184"/>
+            <a:off x="4773168" y="5961888"/>
+            <a:ext cx="2542032" cy="164592"/>
           </a:xfrm>
           <a:prstGeom prst="rect">
             <a:avLst/>
@@ -7467,7 +7467,7 @@
           <a:p>
             <a:pPr algn="l"/>
             <a:r>
-              <a:rPr sz="850" b="0" i="0">
+              <a:rPr sz="750" b="0" i="0">
                 <a:solidFill>
                   <a:srgbClr val="78716C"/>
                 </a:solidFill>
@@ -7486,8 +7486,8 @@
         </p:nvSpPr>
         <p:spPr>
           <a:xfrm>
-            <a:off x="4754880" y="6537960"/>
-            <a:ext cx="2606040" cy="420624"/>
+            <a:off x="4754880" y="6163056"/>
+            <a:ext cx="2606040" cy="256032"/>
           </a:xfrm>
           <a:prstGeom prst="rect">
             <a:avLst/>
@@ -7529,8 +7529,8 @@
         </p:nvSpPr>
         <p:spPr>
           <a:xfrm>
-            <a:off x="4864608" y="6592824"/>
-            <a:ext cx="2395728" cy="219456"/>
+            <a:off x="4864608" y="6199632"/>
+            <a:ext cx="2395728" cy="201168"/>
           </a:xfrm>
           <a:prstGeom prst="rect">
             <a:avLst/>
@@ -7564,8 +7564,8 @@
         </p:nvSpPr>
         <p:spPr>
           <a:xfrm>
-            <a:off x="7452360" y="6629400"/>
-            <a:ext cx="4572000" cy="329184"/>
+            <a:off x="4773168" y="6437376"/>
+            <a:ext cx="2542032" cy="164592"/>
           </a:xfrm>
           <a:prstGeom prst="rect">
             <a:avLst/>
@@ -7580,7 +7580,7 @@
           <a:p>
             <a:pPr algn="l"/>
             <a:r>
-              <a:rPr sz="850" b="0" i="0">
+              <a:rPr sz="750" b="0" i="0">
                 <a:solidFill>
                   <a:srgbClr val="78716C"/>
                 </a:solidFill>
@@ -11066,7 +11066,7 @@
         </p:nvSpPr>
         <p:spPr>
           <a:xfrm>
-            <a:off x="8293608" y="3108960"/>
+            <a:off x="8293608" y="1719072"/>
             <a:ext cx="3657600" cy="1261872"/>
           </a:xfrm>
           <a:prstGeom prst="rect">
@@ -11111,7 +11111,7 @@
         </p:nvSpPr>
         <p:spPr>
           <a:xfrm>
-            <a:off x="8293608" y="3108960"/>
+            <a:off x="8293608" y="1719072"/>
             <a:ext cx="3657600" cy="64008"/>
           </a:xfrm>
           <a:prstGeom prst="rect">
@@ -11154,7 +11154,7 @@
         </p:nvSpPr>
         <p:spPr>
           <a:xfrm>
-            <a:off x="8403336" y="3200400"/>
+            <a:off x="8403336" y="1810512"/>
             <a:ext cx="3383280" cy="228600"/>
           </a:xfrm>
           <a:prstGeom prst="rect">
@@ -11189,7 +11189,7 @@
         </p:nvSpPr>
         <p:spPr>
           <a:xfrm>
-            <a:off x="8403336" y="3456432"/>
+            <a:off x="8403336" y="2066543"/>
             <a:ext cx="3383280" cy="4572000"/>
           </a:xfrm>
           <a:prstGeom prst="rect">
@@ -11558,7 +11558,7 @@
         </p:nvSpPr>
         <p:spPr>
           <a:xfrm>
-            <a:off x="4398264" y="4498848"/>
+            <a:off x="4398264" y="3108960"/>
             <a:ext cx="3657600" cy="1261872"/>
           </a:xfrm>
           <a:prstGeom prst="rect">
@@ -11603,7 +11603,7 @@
         </p:nvSpPr>
         <p:spPr>
           <a:xfrm>
-            <a:off x="4398264" y="4498848"/>
+            <a:off x="4398264" y="3108960"/>
             <a:ext cx="3657600" cy="64008"/>
           </a:xfrm>
           <a:prstGeom prst="rect">
@@ -11646,7 +11646,7 @@
         </p:nvSpPr>
         <p:spPr>
           <a:xfrm>
-            <a:off x="4507992" y="4590288"/>
+            <a:off x="4507992" y="3200400"/>
             <a:ext cx="3383280" cy="228600"/>
           </a:xfrm>
           <a:prstGeom prst="rect">
@@ -11681,7 +11681,7 @@
         </p:nvSpPr>
         <p:spPr>
           <a:xfrm>
-            <a:off x="4507992" y="4846320"/>
+            <a:off x="4507992" y="3456432"/>
             <a:ext cx="3383280" cy="4572000"/>
           </a:xfrm>
           <a:prstGeom prst="rect">
@@ -11804,7 +11804,7 @@
         </p:nvSpPr>
         <p:spPr>
           <a:xfrm>
-            <a:off x="8293608" y="4498848"/>
+            <a:off x="8293608" y="3108960"/>
             <a:ext cx="3657600" cy="1261872"/>
           </a:xfrm>
           <a:prstGeom prst="rect">
@@ -11849,7 +11849,7 @@
         </p:nvSpPr>
         <p:spPr>
           <a:xfrm>
-            <a:off x="8293608" y="4498848"/>
+            <a:off x="8293608" y="3108960"/>
             <a:ext cx="3657600" cy="64008"/>
           </a:xfrm>
           <a:prstGeom prst="rect">
@@ -11892,7 +11892,7 @@
         </p:nvSpPr>
         <p:spPr>
           <a:xfrm>
-            <a:off x="8403336" y="4590288"/>
+            <a:off x="8403336" y="3200400"/>
             <a:ext cx="3383280" cy="228600"/>
           </a:xfrm>
           <a:prstGeom prst="rect">
@@ -11927,7 +11927,7 @@
         </p:nvSpPr>
         <p:spPr>
           <a:xfrm>
-            <a:off x="8403336" y="4846320"/>
+            <a:off x="8403336" y="3456432"/>
             <a:ext cx="3383280" cy="4572000"/>
           </a:xfrm>
           <a:prstGeom prst="rect">

--- a/Santander_Architecture.pptx
+++ b/Santander_Architecture.pptx
@@ -3459,7 +3459,7 @@
         </p:spPr>
         <p:txBody>
           <a:bodyPr wrap="square">
-            <a:spAutoFit/>
+            <a:normAutofit/>
           </a:bodyPr>
           <a:lstStyle/>
           <a:p>
@@ -3772,7 +3772,7 @@
         </p:spPr>
         <p:txBody>
           <a:bodyPr wrap="square">
-            <a:spAutoFit/>
+            <a:normAutofit/>
           </a:bodyPr>
           <a:lstStyle/>
           <a:p>
@@ -3875,7 +3875,7 @@
         </p:spPr>
         <p:txBody>
           <a:bodyPr wrap="square">
-            <a:spAutoFit/>
+            <a:normAutofit/>
           </a:bodyPr>
           <a:lstStyle/>
           <a:p>
@@ -4167,7 +4167,7 @@
         </p:spPr>
         <p:txBody>
           <a:bodyPr wrap="square">
-            <a:spAutoFit/>
+            <a:normAutofit/>
           </a:bodyPr>
           <a:lstStyle/>
           <a:p>
@@ -4464,7 +4464,7 @@
         </p:spPr>
         <p:txBody>
           <a:bodyPr wrap="square">
-            <a:spAutoFit/>
+            <a:normAutofit/>
           </a:bodyPr>
           <a:lstStyle/>
           <a:p>
@@ -5706,7 +5706,7 @@
         </p:spPr>
         <p:txBody>
           <a:bodyPr wrap="square">
-            <a:spAutoFit/>
+            <a:normAutofit/>
           </a:bodyPr>
           <a:lstStyle/>
           <a:p>
@@ -7048,7 +7048,7 @@
         </p:spPr>
         <p:txBody>
           <a:bodyPr wrap="square">
-            <a:spAutoFit/>
+            <a:normAutofit/>
           </a:bodyPr>
           <a:lstStyle/>
           <a:p>
@@ -7153,7 +7153,7 @@
         </p:spPr>
         <p:txBody>
           <a:bodyPr wrap="square">
-            <a:spAutoFit/>
+            <a:normAutofit/>
           </a:bodyPr>
           <a:lstStyle/>
           <a:p>

--- a/Santander_Architecture.pptx
+++ b/Santander_Architecture.pptx
@@ -3465,11 +3465,11 @@
           <a:p>
             <a:pPr>
               <a:spcBef>
-                <a:spcPts val="600"/>
+                <a:spcPts val="500"/>
               </a:spcBef>
             </a:pPr>
             <a:r>
-              <a:rPr sz="1500">
+              <a:rPr sz="1300">
                 <a:solidFill>
                   <a:srgbClr val="1C1917"/>
                 </a:solidFill>
@@ -3481,11 +3481,11 @@
           <a:p>
             <a:pPr>
               <a:spcBef>
-                <a:spcPts val="600"/>
+                <a:spcPts val="500"/>
               </a:spcBef>
             </a:pPr>
             <a:r>
-              <a:rPr sz="1500">
+              <a:rPr sz="1300">
                 <a:solidFill>
                   <a:srgbClr val="1C1917"/>
                 </a:solidFill>
@@ -3497,11 +3497,11 @@
           <a:p>
             <a:pPr>
               <a:spcBef>
-                <a:spcPts val="600"/>
+                <a:spcPts val="500"/>
               </a:spcBef>
             </a:pPr>
             <a:r>
-              <a:rPr sz="1500">
+              <a:rPr sz="1300">
                 <a:solidFill>
                   <a:srgbClr val="1C1917"/>
                 </a:solidFill>
@@ -3513,11 +3513,11 @@
           <a:p>
             <a:pPr>
               <a:spcBef>
-                <a:spcPts val="600"/>
+                <a:spcPts val="500"/>
               </a:spcBef>
             </a:pPr>
             <a:r>
-              <a:rPr sz="1500">
+              <a:rPr sz="1300">
                 <a:solidFill>
                   <a:srgbClr val="1C1917"/>
                 </a:solidFill>
@@ -3529,11 +3529,11 @@
           <a:p>
             <a:pPr>
               <a:spcBef>
-                <a:spcPts val="600"/>
+                <a:spcPts val="500"/>
               </a:spcBef>
             </a:pPr>
             <a:r>
-              <a:rPr sz="1500">
+              <a:rPr sz="1300">
                 <a:solidFill>
                   <a:srgbClr val="1C1917"/>
                 </a:solidFill>
@@ -3545,11 +3545,11 @@
           <a:p>
             <a:pPr>
               <a:spcBef>
-                <a:spcPts val="600"/>
+                <a:spcPts val="500"/>
               </a:spcBef>
             </a:pPr>
             <a:r>
-              <a:rPr sz="1500">
+              <a:rPr sz="1300">
                 <a:solidFill>
                   <a:srgbClr val="1C1917"/>
                 </a:solidFill>
@@ -3561,11 +3561,11 @@
           <a:p>
             <a:pPr>
               <a:spcBef>
-                <a:spcPts val="600"/>
+                <a:spcPts val="500"/>
               </a:spcBef>
             </a:pPr>
             <a:r>
-              <a:rPr sz="1500">
+              <a:rPr sz="1300">
                 <a:solidFill>
                   <a:srgbClr val="1C1917"/>
                 </a:solidFill>
@@ -3577,11 +3577,11 @@
           <a:p>
             <a:pPr>
               <a:spcBef>
-                <a:spcPts val="600"/>
+                <a:spcPts val="500"/>
               </a:spcBef>
             </a:pPr>
             <a:r>
-              <a:rPr sz="1500">
+              <a:rPr sz="1300">
                 <a:solidFill>
                   <a:srgbClr val="1C1917"/>
                 </a:solidFill>
@@ -3593,11 +3593,11 @@
           <a:p>
             <a:pPr>
               <a:spcBef>
-                <a:spcPts val="600"/>
+                <a:spcPts val="500"/>
               </a:spcBef>
             </a:pPr>
             <a:r>
-              <a:rPr sz="1500">
+              <a:rPr sz="1300">
                 <a:solidFill>
                   <a:srgbClr val="1C1917"/>
                 </a:solidFill>
@@ -3778,11 +3778,11 @@
           <a:p>
             <a:pPr>
               <a:spcBef>
-                <a:spcPts val="600"/>
+                <a:spcPts val="500"/>
               </a:spcBef>
             </a:pPr>
             <a:r>
-              <a:rPr sz="1400">
+              <a:rPr sz="1300">
                 <a:solidFill>
                   <a:srgbClr val="1C1917"/>
                 </a:solidFill>
@@ -3794,11 +3794,11 @@
           <a:p>
             <a:pPr>
               <a:spcBef>
-                <a:spcPts val="600"/>
+                <a:spcPts val="500"/>
               </a:spcBef>
             </a:pPr>
             <a:r>
-              <a:rPr sz="1400">
+              <a:rPr sz="1300">
                 <a:solidFill>
                   <a:srgbClr val="1C1917"/>
                 </a:solidFill>
@@ -3810,11 +3810,11 @@
           <a:p>
             <a:pPr>
               <a:spcBef>
-                <a:spcPts val="600"/>
+                <a:spcPts val="500"/>
               </a:spcBef>
             </a:pPr>
             <a:r>
-              <a:rPr sz="1400">
+              <a:rPr sz="1300">
                 <a:solidFill>
                   <a:srgbClr val="1C1917"/>
                 </a:solidFill>
@@ -3826,11 +3826,11 @@
           <a:p>
             <a:pPr>
               <a:spcBef>
-                <a:spcPts val="600"/>
+                <a:spcPts val="500"/>
               </a:spcBef>
             </a:pPr>
             <a:r>
-              <a:rPr sz="1400">
+              <a:rPr sz="1300">
                 <a:solidFill>
                   <a:srgbClr val="1C1917"/>
                 </a:solidFill>
@@ -3842,11 +3842,11 @@
           <a:p>
             <a:pPr>
               <a:spcBef>
-                <a:spcPts val="600"/>
+                <a:spcPts val="500"/>
               </a:spcBef>
             </a:pPr>
             <a:r>
-              <a:rPr sz="1400">
+              <a:rPr sz="1300">
                 <a:solidFill>
                   <a:srgbClr val="1C1917"/>
                 </a:solidFill>
@@ -3881,11 +3881,11 @@
           <a:p>
             <a:pPr>
               <a:spcBef>
-                <a:spcPts val="600"/>
+                <a:spcPts val="500"/>
               </a:spcBef>
             </a:pPr>
             <a:r>
-              <a:rPr sz="1400">
+              <a:rPr sz="1300">
                 <a:solidFill>
                   <a:srgbClr val="1C1917"/>
                 </a:solidFill>
@@ -3897,11 +3897,11 @@
           <a:p>
             <a:pPr>
               <a:spcBef>
-                <a:spcPts val="600"/>
+                <a:spcPts val="500"/>
               </a:spcBef>
             </a:pPr>
             <a:r>
-              <a:rPr sz="1400">
+              <a:rPr sz="1300">
                 <a:solidFill>
                   <a:srgbClr val="1C1917"/>
                 </a:solidFill>
@@ -3913,11 +3913,11 @@
           <a:p>
             <a:pPr>
               <a:spcBef>
-                <a:spcPts val="600"/>
+                <a:spcPts val="500"/>
               </a:spcBef>
             </a:pPr>
             <a:r>
-              <a:rPr sz="1400">
+              <a:rPr sz="1300">
                 <a:solidFill>
                   <a:srgbClr val="1C1917"/>
                 </a:solidFill>
@@ -3929,11 +3929,11 @@
           <a:p>
             <a:pPr>
               <a:spcBef>
-                <a:spcPts val="600"/>
+                <a:spcPts val="500"/>
               </a:spcBef>
             </a:pPr>
             <a:r>
-              <a:rPr sz="1400">
+              <a:rPr sz="1300">
                 <a:solidFill>
                   <a:srgbClr val="1C1917"/>
                 </a:solidFill>
@@ -3945,11 +3945,11 @@
           <a:p>
             <a:pPr>
               <a:spcBef>
-                <a:spcPts val="600"/>
+                <a:spcPts val="500"/>
               </a:spcBef>
             </a:pPr>
             <a:r>
-              <a:rPr sz="1400">
+              <a:rPr sz="1300">
                 <a:solidFill>
                   <a:srgbClr val="1C1917"/>
                 </a:solidFill>
@@ -4173,11 +4173,11 @@
           <a:p>
             <a:pPr>
               <a:spcBef>
-                <a:spcPts val="600"/>
+                <a:spcPts val="500"/>
               </a:spcBef>
             </a:pPr>
             <a:r>
-              <a:rPr sz="1500">
+              <a:rPr sz="1300">
                 <a:solidFill>
                   <a:srgbClr val="1C1917"/>
                 </a:solidFill>
@@ -4189,11 +4189,11 @@
           <a:p>
             <a:pPr>
               <a:spcBef>
-                <a:spcPts val="600"/>
+                <a:spcPts val="500"/>
               </a:spcBef>
             </a:pPr>
             <a:r>
-              <a:rPr sz="1500">
+              <a:rPr sz="1300">
                 <a:solidFill>
                   <a:srgbClr val="1C1917"/>
                 </a:solidFill>
@@ -4205,11 +4205,11 @@
           <a:p>
             <a:pPr>
               <a:spcBef>
-                <a:spcPts val="600"/>
+                <a:spcPts val="500"/>
               </a:spcBef>
             </a:pPr>
             <a:r>
-              <a:rPr sz="1500">
+              <a:rPr sz="1300">
                 <a:solidFill>
                   <a:srgbClr val="1C1917"/>
                 </a:solidFill>
@@ -4221,11 +4221,11 @@
           <a:p>
             <a:pPr>
               <a:spcBef>
-                <a:spcPts val="600"/>
+                <a:spcPts val="500"/>
               </a:spcBef>
             </a:pPr>
             <a:r>
-              <a:rPr sz="1500">
+              <a:rPr sz="1300">
                 <a:solidFill>
                   <a:srgbClr val="1C1917"/>
                 </a:solidFill>
@@ -4237,11 +4237,11 @@
           <a:p>
             <a:pPr>
               <a:spcBef>
-                <a:spcPts val="600"/>
+                <a:spcPts val="500"/>
               </a:spcBef>
             </a:pPr>
             <a:r>
-              <a:rPr sz="1500">
+              <a:rPr sz="1300">
                 <a:solidFill>
                   <a:srgbClr val="1C1917"/>
                 </a:solidFill>
@@ -4253,11 +4253,11 @@
           <a:p>
             <a:pPr>
               <a:spcBef>
-                <a:spcPts val="600"/>
+                <a:spcPts val="500"/>
               </a:spcBef>
             </a:pPr>
             <a:r>
-              <a:rPr sz="1500">
+              <a:rPr sz="1300">
                 <a:solidFill>
                   <a:srgbClr val="1C1917"/>
                 </a:solidFill>
@@ -4269,11 +4269,11 @@
           <a:p>
             <a:pPr>
               <a:spcBef>
-                <a:spcPts val="600"/>
+                <a:spcPts val="500"/>
               </a:spcBef>
             </a:pPr>
             <a:r>
-              <a:rPr sz="1500">
+              <a:rPr sz="1300">
                 <a:solidFill>
                   <a:srgbClr val="1C1917"/>
                 </a:solidFill>
@@ -4285,11 +4285,11 @@
           <a:p>
             <a:pPr>
               <a:spcBef>
-                <a:spcPts val="600"/>
+                <a:spcPts val="500"/>
               </a:spcBef>
             </a:pPr>
             <a:r>
-              <a:rPr sz="1500">
+              <a:rPr sz="1300">
                 <a:solidFill>
                   <a:srgbClr val="1C1917"/>
                 </a:solidFill>
@@ -4470,11 +4470,11 @@
           <a:p>
             <a:pPr>
               <a:spcBef>
-                <a:spcPts val="600"/>
+                <a:spcPts val="500"/>
               </a:spcBef>
             </a:pPr>
             <a:r>
-              <a:rPr sz="1500">
+              <a:rPr sz="1300">
                 <a:solidFill>
                   <a:srgbClr val="1C1917"/>
                 </a:solidFill>
@@ -4486,11 +4486,11 @@
           <a:p>
             <a:pPr>
               <a:spcBef>
-                <a:spcPts val="600"/>
+                <a:spcPts val="500"/>
               </a:spcBef>
             </a:pPr>
             <a:r>
-              <a:rPr sz="1500">
+              <a:rPr sz="1300">
                 <a:solidFill>
                   <a:srgbClr val="1C1917"/>
                 </a:solidFill>
@@ -4502,11 +4502,11 @@
           <a:p>
             <a:pPr>
               <a:spcBef>
-                <a:spcPts val="600"/>
+                <a:spcPts val="500"/>
               </a:spcBef>
             </a:pPr>
             <a:r>
-              <a:rPr sz="1500">
+              <a:rPr sz="1300">
                 <a:solidFill>
                   <a:srgbClr val="1C1917"/>
                 </a:solidFill>
@@ -4518,11 +4518,11 @@
           <a:p>
             <a:pPr>
               <a:spcBef>
-                <a:spcPts val="600"/>
+                <a:spcPts val="500"/>
               </a:spcBef>
             </a:pPr>
             <a:r>
-              <a:rPr sz="1500">
+              <a:rPr sz="1300">
                 <a:solidFill>
                   <a:srgbClr val="1C1917"/>
                 </a:solidFill>
@@ -4534,11 +4534,11 @@
           <a:p>
             <a:pPr>
               <a:spcBef>
-                <a:spcPts val="600"/>
+                <a:spcPts val="500"/>
               </a:spcBef>
             </a:pPr>
             <a:r>
-              <a:rPr sz="1500">
+              <a:rPr sz="1300">
                 <a:solidFill>
                   <a:srgbClr val="1C1917"/>
                 </a:solidFill>
@@ -4550,11 +4550,11 @@
           <a:p>
             <a:pPr>
               <a:spcBef>
-                <a:spcPts val="600"/>
+                <a:spcPts val="500"/>
               </a:spcBef>
             </a:pPr>
             <a:r>
-              <a:rPr sz="1500">
+              <a:rPr sz="1300">
                 <a:solidFill>
                   <a:srgbClr val="1C1917"/>
                 </a:solidFill>
@@ -4566,11 +4566,11 @@
           <a:p>
             <a:pPr>
               <a:spcBef>
-                <a:spcPts val="600"/>
+                <a:spcPts val="500"/>
               </a:spcBef>
             </a:pPr>
             <a:r>
-              <a:rPr sz="1500">
+              <a:rPr sz="1300">
                 <a:solidFill>
                   <a:srgbClr val="1C1917"/>
                 </a:solidFill>
@@ -5712,11 +5712,11 @@
           <a:p>
             <a:pPr>
               <a:spcBef>
-                <a:spcPts val="600"/>
+                <a:spcPts val="500"/>
               </a:spcBef>
             </a:pPr>
             <a:r>
-              <a:rPr sz="1500">
+              <a:rPr sz="1300">
                 <a:solidFill>
                   <a:srgbClr val="1C1917"/>
                 </a:solidFill>
@@ -5728,11 +5728,11 @@
           <a:p>
             <a:pPr>
               <a:spcBef>
-                <a:spcPts val="600"/>
+                <a:spcPts val="500"/>
               </a:spcBef>
             </a:pPr>
             <a:r>
-              <a:rPr sz="1500">
+              <a:rPr sz="1300">
                 <a:solidFill>
                   <a:srgbClr val="1C1917"/>
                 </a:solidFill>
@@ -5744,11 +5744,11 @@
           <a:p>
             <a:pPr>
               <a:spcBef>
-                <a:spcPts val="600"/>
+                <a:spcPts val="500"/>
               </a:spcBef>
             </a:pPr>
             <a:r>
-              <a:rPr sz="1500">
+              <a:rPr sz="1300">
                 <a:solidFill>
                   <a:srgbClr val="1C1917"/>
                 </a:solidFill>
@@ -5760,11 +5760,11 @@
           <a:p>
             <a:pPr>
               <a:spcBef>
-                <a:spcPts val="600"/>
+                <a:spcPts val="500"/>
               </a:spcBef>
             </a:pPr>
             <a:r>
-              <a:rPr sz="1500">
+              <a:rPr sz="1300">
                 <a:solidFill>
                   <a:srgbClr val="1C1917"/>
                 </a:solidFill>
@@ -5776,11 +5776,11 @@
           <a:p>
             <a:pPr>
               <a:spcBef>
-                <a:spcPts val="600"/>
+                <a:spcPts val="500"/>
               </a:spcBef>
             </a:pPr>
             <a:r>
-              <a:rPr sz="1500">
+              <a:rPr sz="1300">
                 <a:solidFill>
                   <a:srgbClr val="1C1917"/>
                 </a:solidFill>
@@ -5792,11 +5792,11 @@
           <a:p>
             <a:pPr>
               <a:spcBef>
-                <a:spcPts val="600"/>
+                <a:spcPts val="500"/>
               </a:spcBef>
             </a:pPr>
             <a:r>
-              <a:rPr sz="1500">
+              <a:rPr sz="1300">
                 <a:solidFill>
                   <a:srgbClr val="1C1917"/>
                 </a:solidFill>
@@ -6213,7 +6213,7 @@
               </a:spcBef>
             </a:pPr>
             <a:r>
-              <a:rPr sz="1400">
+              <a:rPr sz="1200">
                 <a:solidFill>
                   <a:srgbClr val="1C1917"/>
                 </a:solidFill>
@@ -6229,7 +6229,7 @@
               </a:spcBef>
             </a:pPr>
             <a:r>
-              <a:rPr sz="1400">
+              <a:rPr sz="1200">
                 <a:solidFill>
                   <a:srgbClr val="1C1917"/>
                 </a:solidFill>
@@ -6245,7 +6245,7 @@
               </a:spcBef>
             </a:pPr>
             <a:r>
-              <a:rPr sz="1400">
+              <a:rPr sz="1200">
                 <a:solidFill>
                   <a:srgbClr val="1C1917"/>
                 </a:solidFill>
@@ -6261,7 +6261,7 @@
               </a:spcBef>
             </a:pPr>
             <a:r>
-              <a:rPr sz="1400">
+              <a:rPr sz="1200">
                 <a:solidFill>
                   <a:srgbClr val="1C1917"/>
                 </a:solidFill>
@@ -6277,7 +6277,7 @@
               </a:spcBef>
             </a:pPr>
             <a:r>
-              <a:rPr sz="1400">
+              <a:rPr sz="1200">
                 <a:solidFill>
                   <a:srgbClr val="1C1917"/>
                 </a:solidFill>
@@ -6462,7 +6462,7 @@
               </a:spcBef>
             </a:pPr>
             <a:r>
-              <a:rPr sz="1500">
+              <a:rPr sz="1300">
                 <a:solidFill>
                   <a:srgbClr val="1C1917"/>
                 </a:solidFill>
@@ -6478,7 +6478,7 @@
               </a:spcBef>
             </a:pPr>
             <a:r>
-              <a:rPr sz="1500">
+              <a:rPr sz="1300">
                 <a:solidFill>
                   <a:srgbClr val="1C1917"/>
                 </a:solidFill>
@@ -6494,7 +6494,7 @@
               </a:spcBef>
             </a:pPr>
             <a:r>
-              <a:rPr sz="1300">
+              <a:rPr sz="1100">
                 <a:solidFill>
                   <a:srgbClr val="78716C"/>
                 </a:solidFill>
@@ -6510,7 +6510,7 @@
               </a:spcBef>
             </a:pPr>
             <a:r>
-              <a:rPr sz="1300">
+              <a:rPr sz="1100">
                 <a:solidFill>
                   <a:srgbClr val="78716C"/>
                 </a:solidFill>
@@ -6526,7 +6526,7 @@
               </a:spcBef>
             </a:pPr>
             <a:r>
-              <a:rPr sz="1300">
+              <a:rPr sz="1100">
                 <a:solidFill>
                   <a:srgbClr val="78716C"/>
                 </a:solidFill>
@@ -6542,7 +6542,7 @@
               </a:spcBef>
             </a:pPr>
             <a:r>
-              <a:rPr sz="1300">
+              <a:rPr sz="1100">
                 <a:solidFill>
                   <a:srgbClr val="78716C"/>
                 </a:solidFill>
@@ -6558,7 +6558,7 @@
               </a:spcBef>
             </a:pPr>
             <a:r>
-              <a:rPr sz="1500">
+              <a:rPr sz="1300">
                 <a:solidFill>
                   <a:srgbClr val="1C1917"/>
                 </a:solidFill>
@@ -7054,7 +7054,7 @@
           <a:p>
             <a:pPr>
               <a:spcBef>
-                <a:spcPts val="600"/>
+                <a:spcPts val="500"/>
               </a:spcBef>
             </a:pPr>
             <a:r>
@@ -7070,7 +7070,7 @@
           <a:p>
             <a:pPr>
               <a:spcBef>
-                <a:spcPts val="600"/>
+                <a:spcPts val="500"/>
               </a:spcBef>
             </a:pPr>
             <a:r>
@@ -7086,7 +7086,7 @@
           <a:p>
             <a:pPr>
               <a:spcBef>
-                <a:spcPts val="600"/>
+                <a:spcPts val="500"/>
               </a:spcBef>
             </a:pPr>
             <a:r>
@@ -7159,7 +7159,7 @@
           <a:p>
             <a:pPr>
               <a:spcBef>
-                <a:spcPts val="600"/>
+                <a:spcPts val="500"/>
               </a:spcBef>
             </a:pPr>
             <a:r>
@@ -7175,7 +7175,7 @@
           <a:p>
             <a:pPr>
               <a:spcBef>
-                <a:spcPts val="600"/>
+                <a:spcPts val="500"/>
               </a:spcBef>
             </a:pPr>
             <a:r>
@@ -7191,7 +7191,7 @@
           <a:p>
             <a:pPr>
               <a:spcBef>
-                <a:spcPts val="600"/>
+                <a:spcPts val="500"/>
               </a:spcBef>
             </a:pPr>
             <a:r>
@@ -7207,7 +7207,7 @@
           <a:p>
             <a:pPr>
               <a:spcBef>
-                <a:spcPts val="600"/>
+                <a:spcPts val="500"/>
               </a:spcBef>
             </a:pPr>
             <a:r>

--- a/Santander_Architecture.pptx
+++ b/Santander_Architecture.pptx
@@ -3459,7 +3459,7 @@
         </p:spPr>
         <p:txBody>
           <a:bodyPr wrap="square">
-            <a:normAutofit/>
+            <a:noAutofit/>
           </a:bodyPr>
           <a:lstStyle/>
           <a:p>
@@ -3772,7 +3772,7 @@
         </p:spPr>
         <p:txBody>
           <a:bodyPr wrap="square">
-            <a:normAutofit/>
+            <a:noAutofit/>
           </a:bodyPr>
           <a:lstStyle/>
           <a:p>
@@ -3875,7 +3875,7 @@
         </p:spPr>
         <p:txBody>
           <a:bodyPr wrap="square">
-            <a:normAutofit/>
+            <a:noAutofit/>
           </a:bodyPr>
           <a:lstStyle/>
           <a:p>
@@ -4167,7 +4167,7 @@
         </p:spPr>
         <p:txBody>
           <a:bodyPr wrap="square">
-            <a:normAutofit/>
+            <a:noAutofit/>
           </a:bodyPr>
           <a:lstStyle/>
           <a:p>
@@ -4464,7 +4464,7 @@
         </p:spPr>
         <p:txBody>
           <a:bodyPr wrap="square">
-            <a:normAutofit/>
+            <a:noAutofit/>
           </a:bodyPr>
           <a:lstStyle/>
           <a:p>
@@ -5706,7 +5706,7 @@
         </p:spPr>
         <p:txBody>
           <a:bodyPr wrap="square">
-            <a:normAutofit/>
+            <a:noAutofit/>
           </a:bodyPr>
           <a:lstStyle/>
           <a:p>
@@ -7048,7 +7048,7 @@
         </p:spPr>
         <p:txBody>
           <a:bodyPr wrap="square">
-            <a:normAutofit/>
+            <a:noAutofit/>
           </a:bodyPr>
           <a:lstStyle/>
           <a:p>
@@ -7153,7 +7153,7 @@
         </p:spPr>
         <p:txBody>
           <a:bodyPr wrap="square">
-            <a:normAutofit/>
+            <a:noAutofit/>
           </a:bodyPr>
           <a:lstStyle/>
           <a:p>

--- a/Santander_Architecture.pptx
+++ b/Santander_Architecture.pptx
@@ -3295,6 +3295,84 @@
           </a:p>
         </p:txBody>
       </p:sp>
+      <p:sp>
+        <p:nvSpPr>
+          <p:cNvPr id="7" name="Rectangle 6"/>
+          <p:cNvSpPr/>
+          <p:nvPr/>
+        </p:nvSpPr>
+        <p:spPr>
+          <a:xfrm>
+            <a:off x="10012680" y="274320"/>
+            <a:ext cx="1783080" cy="310896"/>
+          </a:xfrm>
+          <a:prstGeom prst="rect">
+            <a:avLst/>
+          </a:prstGeom>
+          <a:solidFill>
+            <a:srgbClr val="C8102E"/>
+          </a:solidFill>
+          <a:ln>
+            <a:noFill/>
+          </a:ln>
+        </p:spPr>
+        <p:style>
+          <a:lnRef idx="1">
+            <a:schemeClr val="accent1"/>
+          </a:lnRef>
+          <a:fillRef idx="3">
+            <a:schemeClr val="accent1"/>
+          </a:fillRef>
+          <a:effectRef idx="2">
+            <a:schemeClr val="accent1"/>
+          </a:effectRef>
+          <a:fontRef idx="minor">
+            <a:schemeClr val="lt1"/>
+          </a:fontRef>
+        </p:style>
+        <p:txBody>
+          <a:bodyPr rtlCol="0" anchor="ctr"/>
+          <a:lstStyle/>
+          <a:p>
+            <a:pPr algn="ctr"/>
+          </a:p>
+        </p:txBody>
+      </p:sp>
+      <p:sp>
+        <p:nvSpPr>
+          <p:cNvPr id="8" name="TextBox 7"/>
+          <p:cNvSpPr txBox="1"/>
+          <p:nvPr/>
+        </p:nvSpPr>
+        <p:spPr>
+          <a:xfrm>
+            <a:off x="10012680" y="310896"/>
+            <a:ext cx="1783080" cy="237744"/>
+          </a:xfrm>
+          <a:prstGeom prst="rect">
+            <a:avLst/>
+          </a:prstGeom>
+          <a:noFill/>
+        </p:spPr>
+        <p:txBody>
+          <a:bodyPr wrap="square">
+            <a:spAutoFit/>
+          </a:bodyPr>
+          <a:lstStyle/>
+          <a:p>
+            <a:pPr algn="ctr"/>
+            <a:r>
+              <a:rPr sz="750" b="1" i="0">
+                <a:solidFill>
+                  <a:srgbClr val="FFFFFF"/>
+                </a:solidFill>
+                <a:latin typeface="Calibri"/>
+              </a:rPr>
+              <a:t>INTERNAL · CONFIDENTIAL</a:t>
+            </a:r>
+          </a:p>
+        </p:txBody>
+      </p:sp>
     </p:spTree>
   </p:cSld>
   <p:clrMapOvr>
@@ -3608,6 +3686,154 @@
           </a:p>
         </p:txBody>
       </p:sp>
+      <p:sp>
+        <p:nvSpPr>
+          <p:cNvPr id="6" name="Rectangle 5"/>
+          <p:cNvSpPr/>
+          <p:nvPr/>
+        </p:nvSpPr>
+        <p:spPr>
+          <a:xfrm>
+            <a:off x="0" y="6601968"/>
+            <a:ext cx="12188952" cy="256032"/>
+          </a:xfrm>
+          <a:prstGeom prst="rect">
+            <a:avLst/>
+          </a:prstGeom>
+          <a:solidFill>
+            <a:srgbClr val="1C1917"/>
+          </a:solidFill>
+          <a:ln>
+            <a:noFill/>
+          </a:ln>
+        </p:spPr>
+        <p:style>
+          <a:lnRef idx="1">
+            <a:schemeClr val="accent1"/>
+          </a:lnRef>
+          <a:fillRef idx="3">
+            <a:schemeClr val="accent1"/>
+          </a:fillRef>
+          <a:effectRef idx="2">
+            <a:schemeClr val="accent1"/>
+          </a:effectRef>
+          <a:fontRef idx="minor">
+            <a:schemeClr val="lt1"/>
+          </a:fontRef>
+        </p:style>
+        <p:txBody>
+          <a:bodyPr rtlCol="0" anchor="ctr"/>
+          <a:lstStyle/>
+          <a:p>
+            <a:pPr algn="ctr"/>
+          </a:p>
+        </p:txBody>
+      </p:sp>
+      <p:sp>
+        <p:nvSpPr>
+          <p:cNvPr id="7" name="TextBox 6"/>
+          <p:cNvSpPr txBox="1"/>
+          <p:nvPr/>
+        </p:nvSpPr>
+        <p:spPr>
+          <a:xfrm>
+            <a:off x="457200" y="6620256"/>
+            <a:ext cx="2743200" cy="201168"/>
+          </a:xfrm>
+          <a:prstGeom prst="rect">
+            <a:avLst/>
+          </a:prstGeom>
+          <a:noFill/>
+        </p:spPr>
+        <p:txBody>
+          <a:bodyPr wrap="square">
+            <a:spAutoFit/>
+          </a:bodyPr>
+          <a:lstStyle/>
+          <a:p>
+            <a:pPr algn="l"/>
+            <a:r>
+              <a:rPr sz="800" b="1" i="0">
+                <a:solidFill>
+                  <a:srgbClr val="FECACA"/>
+                </a:solidFill>
+                <a:latin typeface="Calibri"/>
+              </a:rPr>
+              <a:t>INTERNAL · CONFIDENTIAL</a:t>
+            </a:r>
+          </a:p>
+        </p:txBody>
+      </p:sp>
+      <p:sp>
+        <p:nvSpPr>
+          <p:cNvPr id="8" name="TextBox 7"/>
+          <p:cNvSpPr txBox="1"/>
+          <p:nvPr/>
+        </p:nvSpPr>
+        <p:spPr>
+          <a:xfrm>
+            <a:off x="3200400" y="6620256"/>
+            <a:ext cx="7863840" cy="201168"/>
+          </a:xfrm>
+          <a:prstGeom prst="rect">
+            <a:avLst/>
+          </a:prstGeom>
+          <a:noFill/>
+        </p:spPr>
+        <p:txBody>
+          <a:bodyPr wrap="square">
+            <a:spAutoFit/>
+          </a:bodyPr>
+          <a:lstStyle/>
+          <a:p>
+            <a:pPr algn="r"/>
+            <a:r>
+              <a:rPr sz="800" b="0" i="1">
+                <a:solidFill>
+                  <a:srgbClr val="D6D3D1"/>
+                </a:solidFill>
+                <a:latin typeface="Calibri"/>
+              </a:rPr>
+              <a:t>Alan Davidson · Business Banking Advisor · Self-initiated · Own time · June 2026</a:t>
+            </a:r>
+          </a:p>
+        </p:txBody>
+      </p:sp>
+      <p:sp>
+        <p:nvSpPr>
+          <p:cNvPr id="9" name="TextBox 8"/>
+          <p:cNvSpPr txBox="1"/>
+          <p:nvPr/>
+        </p:nvSpPr>
+        <p:spPr>
+          <a:xfrm>
+            <a:off x="11750040" y="6620256"/>
+            <a:ext cx="365760" cy="201168"/>
+          </a:xfrm>
+          <a:prstGeom prst="rect">
+            <a:avLst/>
+          </a:prstGeom>
+          <a:noFill/>
+        </p:spPr>
+        <p:txBody>
+          <a:bodyPr wrap="square">
+            <a:spAutoFit/>
+          </a:bodyPr>
+          <a:lstStyle/>
+          <a:p>
+            <a:pPr algn="r"/>
+            <a:r>
+              <a:rPr sz="800" b="0" i="0">
+                <a:solidFill>
+                  <a:srgbClr val="D6D3D1"/>
+                </a:solidFill>
+                <a:latin typeface="Calibri"/>
+              </a:rPr>
+              <a:t>10</a:t>
+            </a:r>
+          </a:p>
+        </p:txBody>
+      </p:sp>
     </p:spTree>
   </p:cSld>
   <p:clrMapOvr>
@@ -4003,6 +4229,154 @@
           </a:p>
         </p:txBody>
       </p:sp>
+      <p:sp>
+        <p:nvSpPr>
+          <p:cNvPr id="8" name="Rectangle 7"/>
+          <p:cNvSpPr/>
+          <p:nvPr/>
+        </p:nvSpPr>
+        <p:spPr>
+          <a:xfrm>
+            <a:off x="0" y="6601968"/>
+            <a:ext cx="12188952" cy="256032"/>
+          </a:xfrm>
+          <a:prstGeom prst="rect">
+            <a:avLst/>
+          </a:prstGeom>
+          <a:solidFill>
+            <a:srgbClr val="1C1917"/>
+          </a:solidFill>
+          <a:ln>
+            <a:noFill/>
+          </a:ln>
+        </p:spPr>
+        <p:style>
+          <a:lnRef idx="1">
+            <a:schemeClr val="accent1"/>
+          </a:lnRef>
+          <a:fillRef idx="3">
+            <a:schemeClr val="accent1"/>
+          </a:fillRef>
+          <a:effectRef idx="2">
+            <a:schemeClr val="accent1"/>
+          </a:effectRef>
+          <a:fontRef idx="minor">
+            <a:schemeClr val="lt1"/>
+          </a:fontRef>
+        </p:style>
+        <p:txBody>
+          <a:bodyPr rtlCol="0" anchor="ctr"/>
+          <a:lstStyle/>
+          <a:p>
+            <a:pPr algn="ctr"/>
+          </a:p>
+        </p:txBody>
+      </p:sp>
+      <p:sp>
+        <p:nvSpPr>
+          <p:cNvPr id="9" name="TextBox 8"/>
+          <p:cNvSpPr txBox="1"/>
+          <p:nvPr/>
+        </p:nvSpPr>
+        <p:spPr>
+          <a:xfrm>
+            <a:off x="457200" y="6620256"/>
+            <a:ext cx="2743200" cy="201168"/>
+          </a:xfrm>
+          <a:prstGeom prst="rect">
+            <a:avLst/>
+          </a:prstGeom>
+          <a:noFill/>
+        </p:spPr>
+        <p:txBody>
+          <a:bodyPr wrap="square">
+            <a:spAutoFit/>
+          </a:bodyPr>
+          <a:lstStyle/>
+          <a:p>
+            <a:pPr algn="l"/>
+            <a:r>
+              <a:rPr sz="800" b="1" i="0">
+                <a:solidFill>
+                  <a:srgbClr val="FECACA"/>
+                </a:solidFill>
+                <a:latin typeface="Calibri"/>
+              </a:rPr>
+              <a:t>INTERNAL · CONFIDENTIAL</a:t>
+            </a:r>
+          </a:p>
+        </p:txBody>
+      </p:sp>
+      <p:sp>
+        <p:nvSpPr>
+          <p:cNvPr id="10" name="TextBox 9"/>
+          <p:cNvSpPr txBox="1"/>
+          <p:nvPr/>
+        </p:nvSpPr>
+        <p:spPr>
+          <a:xfrm>
+            <a:off x="3200400" y="6620256"/>
+            <a:ext cx="7863840" cy="201168"/>
+          </a:xfrm>
+          <a:prstGeom prst="rect">
+            <a:avLst/>
+          </a:prstGeom>
+          <a:noFill/>
+        </p:spPr>
+        <p:txBody>
+          <a:bodyPr wrap="square">
+            <a:spAutoFit/>
+          </a:bodyPr>
+          <a:lstStyle/>
+          <a:p>
+            <a:pPr algn="r"/>
+            <a:r>
+              <a:rPr sz="800" b="0" i="1">
+                <a:solidFill>
+                  <a:srgbClr val="D6D3D1"/>
+                </a:solidFill>
+                <a:latin typeface="Calibri"/>
+              </a:rPr>
+              <a:t>Alan Davidson · Business Banking Advisor · Self-initiated · Own time · June 2026</a:t>
+            </a:r>
+          </a:p>
+        </p:txBody>
+      </p:sp>
+      <p:sp>
+        <p:nvSpPr>
+          <p:cNvPr id="11" name="TextBox 10"/>
+          <p:cNvSpPr txBox="1"/>
+          <p:nvPr/>
+        </p:nvSpPr>
+        <p:spPr>
+          <a:xfrm>
+            <a:off x="11750040" y="6620256"/>
+            <a:ext cx="365760" cy="201168"/>
+          </a:xfrm>
+          <a:prstGeom prst="rect">
+            <a:avLst/>
+          </a:prstGeom>
+          <a:noFill/>
+        </p:spPr>
+        <p:txBody>
+          <a:bodyPr wrap="square">
+            <a:spAutoFit/>
+          </a:bodyPr>
+          <a:lstStyle/>
+          <a:p>
+            <a:pPr algn="r"/>
+            <a:r>
+              <a:rPr sz="800" b="0" i="0">
+                <a:solidFill>
+                  <a:srgbClr val="D6D3D1"/>
+                </a:solidFill>
+                <a:latin typeface="Calibri"/>
+              </a:rPr>
+              <a:t>11</a:t>
+            </a:r>
+          </a:p>
+        </p:txBody>
+      </p:sp>
     </p:spTree>
   </p:cSld>
   <p:clrMapOvr>
@@ -4300,6 +4674,154 @@
           </a:p>
         </p:txBody>
       </p:sp>
+      <p:sp>
+        <p:nvSpPr>
+          <p:cNvPr id="6" name="Rectangle 5"/>
+          <p:cNvSpPr/>
+          <p:nvPr/>
+        </p:nvSpPr>
+        <p:spPr>
+          <a:xfrm>
+            <a:off x="0" y="6601968"/>
+            <a:ext cx="12188952" cy="256032"/>
+          </a:xfrm>
+          <a:prstGeom prst="rect">
+            <a:avLst/>
+          </a:prstGeom>
+          <a:solidFill>
+            <a:srgbClr val="1C1917"/>
+          </a:solidFill>
+          <a:ln>
+            <a:noFill/>
+          </a:ln>
+        </p:spPr>
+        <p:style>
+          <a:lnRef idx="1">
+            <a:schemeClr val="accent1"/>
+          </a:lnRef>
+          <a:fillRef idx="3">
+            <a:schemeClr val="accent1"/>
+          </a:fillRef>
+          <a:effectRef idx="2">
+            <a:schemeClr val="accent1"/>
+          </a:effectRef>
+          <a:fontRef idx="minor">
+            <a:schemeClr val="lt1"/>
+          </a:fontRef>
+        </p:style>
+        <p:txBody>
+          <a:bodyPr rtlCol="0" anchor="ctr"/>
+          <a:lstStyle/>
+          <a:p>
+            <a:pPr algn="ctr"/>
+          </a:p>
+        </p:txBody>
+      </p:sp>
+      <p:sp>
+        <p:nvSpPr>
+          <p:cNvPr id="7" name="TextBox 6"/>
+          <p:cNvSpPr txBox="1"/>
+          <p:nvPr/>
+        </p:nvSpPr>
+        <p:spPr>
+          <a:xfrm>
+            <a:off x="457200" y="6620256"/>
+            <a:ext cx="2743200" cy="201168"/>
+          </a:xfrm>
+          <a:prstGeom prst="rect">
+            <a:avLst/>
+          </a:prstGeom>
+          <a:noFill/>
+        </p:spPr>
+        <p:txBody>
+          <a:bodyPr wrap="square">
+            <a:spAutoFit/>
+          </a:bodyPr>
+          <a:lstStyle/>
+          <a:p>
+            <a:pPr algn="l"/>
+            <a:r>
+              <a:rPr sz="800" b="1" i="0">
+                <a:solidFill>
+                  <a:srgbClr val="FECACA"/>
+                </a:solidFill>
+                <a:latin typeface="Calibri"/>
+              </a:rPr>
+              <a:t>INTERNAL · CONFIDENTIAL</a:t>
+            </a:r>
+          </a:p>
+        </p:txBody>
+      </p:sp>
+      <p:sp>
+        <p:nvSpPr>
+          <p:cNvPr id="8" name="TextBox 7"/>
+          <p:cNvSpPr txBox="1"/>
+          <p:nvPr/>
+        </p:nvSpPr>
+        <p:spPr>
+          <a:xfrm>
+            <a:off x="3200400" y="6620256"/>
+            <a:ext cx="7863840" cy="201168"/>
+          </a:xfrm>
+          <a:prstGeom prst="rect">
+            <a:avLst/>
+          </a:prstGeom>
+          <a:noFill/>
+        </p:spPr>
+        <p:txBody>
+          <a:bodyPr wrap="square">
+            <a:spAutoFit/>
+          </a:bodyPr>
+          <a:lstStyle/>
+          <a:p>
+            <a:pPr algn="r"/>
+            <a:r>
+              <a:rPr sz="800" b="0" i="1">
+                <a:solidFill>
+                  <a:srgbClr val="D6D3D1"/>
+                </a:solidFill>
+                <a:latin typeface="Calibri"/>
+              </a:rPr>
+              <a:t>Alan Davidson · Business Banking Advisor · Self-initiated · Own time · June 2026</a:t>
+            </a:r>
+          </a:p>
+        </p:txBody>
+      </p:sp>
+      <p:sp>
+        <p:nvSpPr>
+          <p:cNvPr id="9" name="TextBox 8"/>
+          <p:cNvSpPr txBox="1"/>
+          <p:nvPr/>
+        </p:nvSpPr>
+        <p:spPr>
+          <a:xfrm>
+            <a:off x="11750040" y="6620256"/>
+            <a:ext cx="365760" cy="201168"/>
+          </a:xfrm>
+          <a:prstGeom prst="rect">
+            <a:avLst/>
+          </a:prstGeom>
+          <a:noFill/>
+        </p:spPr>
+        <p:txBody>
+          <a:bodyPr wrap="square">
+            <a:spAutoFit/>
+          </a:bodyPr>
+          <a:lstStyle/>
+          <a:p>
+            <a:pPr algn="r"/>
+            <a:r>
+              <a:rPr sz="800" b="0" i="0">
+                <a:solidFill>
+                  <a:srgbClr val="D6D3D1"/>
+                </a:solidFill>
+                <a:latin typeface="Calibri"/>
+              </a:rPr>
+              <a:t>12</a:t>
+            </a:r>
+          </a:p>
+        </p:txBody>
+      </p:sp>
     </p:spTree>
   </p:cSld>
   <p:clrMapOvr>
@@ -4581,6 +5103,154 @@
           </a:p>
         </p:txBody>
       </p:sp>
+      <p:sp>
+        <p:nvSpPr>
+          <p:cNvPr id="6" name="Rectangle 5"/>
+          <p:cNvSpPr/>
+          <p:nvPr/>
+        </p:nvSpPr>
+        <p:spPr>
+          <a:xfrm>
+            <a:off x="0" y="6601968"/>
+            <a:ext cx="12188952" cy="256032"/>
+          </a:xfrm>
+          <a:prstGeom prst="rect">
+            <a:avLst/>
+          </a:prstGeom>
+          <a:solidFill>
+            <a:srgbClr val="1C1917"/>
+          </a:solidFill>
+          <a:ln>
+            <a:noFill/>
+          </a:ln>
+        </p:spPr>
+        <p:style>
+          <a:lnRef idx="1">
+            <a:schemeClr val="accent1"/>
+          </a:lnRef>
+          <a:fillRef idx="3">
+            <a:schemeClr val="accent1"/>
+          </a:fillRef>
+          <a:effectRef idx="2">
+            <a:schemeClr val="accent1"/>
+          </a:effectRef>
+          <a:fontRef idx="minor">
+            <a:schemeClr val="lt1"/>
+          </a:fontRef>
+        </p:style>
+        <p:txBody>
+          <a:bodyPr rtlCol="0" anchor="ctr"/>
+          <a:lstStyle/>
+          <a:p>
+            <a:pPr algn="ctr"/>
+          </a:p>
+        </p:txBody>
+      </p:sp>
+      <p:sp>
+        <p:nvSpPr>
+          <p:cNvPr id="7" name="TextBox 6"/>
+          <p:cNvSpPr txBox="1"/>
+          <p:nvPr/>
+        </p:nvSpPr>
+        <p:spPr>
+          <a:xfrm>
+            <a:off x="457200" y="6620256"/>
+            <a:ext cx="2743200" cy="201168"/>
+          </a:xfrm>
+          <a:prstGeom prst="rect">
+            <a:avLst/>
+          </a:prstGeom>
+          <a:noFill/>
+        </p:spPr>
+        <p:txBody>
+          <a:bodyPr wrap="square">
+            <a:spAutoFit/>
+          </a:bodyPr>
+          <a:lstStyle/>
+          <a:p>
+            <a:pPr algn="l"/>
+            <a:r>
+              <a:rPr sz="800" b="1" i="0">
+                <a:solidFill>
+                  <a:srgbClr val="FECACA"/>
+                </a:solidFill>
+                <a:latin typeface="Calibri"/>
+              </a:rPr>
+              <a:t>INTERNAL · CONFIDENTIAL</a:t>
+            </a:r>
+          </a:p>
+        </p:txBody>
+      </p:sp>
+      <p:sp>
+        <p:nvSpPr>
+          <p:cNvPr id="8" name="TextBox 7"/>
+          <p:cNvSpPr txBox="1"/>
+          <p:nvPr/>
+        </p:nvSpPr>
+        <p:spPr>
+          <a:xfrm>
+            <a:off x="3200400" y="6620256"/>
+            <a:ext cx="7863840" cy="201168"/>
+          </a:xfrm>
+          <a:prstGeom prst="rect">
+            <a:avLst/>
+          </a:prstGeom>
+          <a:noFill/>
+        </p:spPr>
+        <p:txBody>
+          <a:bodyPr wrap="square">
+            <a:spAutoFit/>
+          </a:bodyPr>
+          <a:lstStyle/>
+          <a:p>
+            <a:pPr algn="r"/>
+            <a:r>
+              <a:rPr sz="800" b="0" i="1">
+                <a:solidFill>
+                  <a:srgbClr val="D6D3D1"/>
+                </a:solidFill>
+                <a:latin typeface="Calibri"/>
+              </a:rPr>
+              <a:t>Alan Davidson · Business Banking Advisor · Self-initiated · Own time · June 2026</a:t>
+            </a:r>
+          </a:p>
+        </p:txBody>
+      </p:sp>
+      <p:sp>
+        <p:nvSpPr>
+          <p:cNvPr id="9" name="TextBox 8"/>
+          <p:cNvSpPr txBox="1"/>
+          <p:nvPr/>
+        </p:nvSpPr>
+        <p:spPr>
+          <a:xfrm>
+            <a:off x="11750040" y="6620256"/>
+            <a:ext cx="365760" cy="201168"/>
+          </a:xfrm>
+          <a:prstGeom prst="rect">
+            <a:avLst/>
+          </a:prstGeom>
+          <a:noFill/>
+        </p:spPr>
+        <p:txBody>
+          <a:bodyPr wrap="square">
+            <a:spAutoFit/>
+          </a:bodyPr>
+          <a:lstStyle/>
+          <a:p>
+            <a:pPr algn="r"/>
+            <a:r>
+              <a:rPr sz="800" b="0" i="0">
+                <a:solidFill>
+                  <a:srgbClr val="D6D3D1"/>
+                </a:solidFill>
+                <a:latin typeface="Calibri"/>
+              </a:rPr>
+              <a:t>2</a:t>
+            </a:r>
+          </a:p>
+        </p:txBody>
+      </p:sp>
     </p:spTree>
   </p:cSld>
   <p:clrMapOvr>
@@ -5542,6 +6212,154 @@
           </a:p>
         </p:txBody>
       </p:sp>
+      <p:sp>
+        <p:nvSpPr>
+          <p:cNvPr id="29" name="Rectangle 28"/>
+          <p:cNvSpPr/>
+          <p:nvPr/>
+        </p:nvSpPr>
+        <p:spPr>
+          <a:xfrm>
+            <a:off x="0" y="6601968"/>
+            <a:ext cx="12188952" cy="256032"/>
+          </a:xfrm>
+          <a:prstGeom prst="rect">
+            <a:avLst/>
+          </a:prstGeom>
+          <a:solidFill>
+            <a:srgbClr val="1C1917"/>
+          </a:solidFill>
+          <a:ln>
+            <a:noFill/>
+          </a:ln>
+        </p:spPr>
+        <p:style>
+          <a:lnRef idx="1">
+            <a:schemeClr val="accent1"/>
+          </a:lnRef>
+          <a:fillRef idx="3">
+            <a:schemeClr val="accent1"/>
+          </a:fillRef>
+          <a:effectRef idx="2">
+            <a:schemeClr val="accent1"/>
+          </a:effectRef>
+          <a:fontRef idx="minor">
+            <a:schemeClr val="lt1"/>
+          </a:fontRef>
+        </p:style>
+        <p:txBody>
+          <a:bodyPr rtlCol="0" anchor="ctr"/>
+          <a:lstStyle/>
+          <a:p>
+            <a:pPr algn="ctr"/>
+          </a:p>
+        </p:txBody>
+      </p:sp>
+      <p:sp>
+        <p:nvSpPr>
+          <p:cNvPr id="30" name="TextBox 29"/>
+          <p:cNvSpPr txBox="1"/>
+          <p:nvPr/>
+        </p:nvSpPr>
+        <p:spPr>
+          <a:xfrm>
+            <a:off x="457200" y="6620256"/>
+            <a:ext cx="2743200" cy="201168"/>
+          </a:xfrm>
+          <a:prstGeom prst="rect">
+            <a:avLst/>
+          </a:prstGeom>
+          <a:noFill/>
+        </p:spPr>
+        <p:txBody>
+          <a:bodyPr wrap="square">
+            <a:spAutoFit/>
+          </a:bodyPr>
+          <a:lstStyle/>
+          <a:p>
+            <a:pPr algn="l"/>
+            <a:r>
+              <a:rPr sz="800" b="1" i="0">
+                <a:solidFill>
+                  <a:srgbClr val="FECACA"/>
+                </a:solidFill>
+                <a:latin typeface="Calibri"/>
+              </a:rPr>
+              <a:t>INTERNAL · CONFIDENTIAL</a:t>
+            </a:r>
+          </a:p>
+        </p:txBody>
+      </p:sp>
+      <p:sp>
+        <p:nvSpPr>
+          <p:cNvPr id="31" name="TextBox 30"/>
+          <p:cNvSpPr txBox="1"/>
+          <p:nvPr/>
+        </p:nvSpPr>
+        <p:spPr>
+          <a:xfrm>
+            <a:off x="3200400" y="6620256"/>
+            <a:ext cx="7863840" cy="201168"/>
+          </a:xfrm>
+          <a:prstGeom prst="rect">
+            <a:avLst/>
+          </a:prstGeom>
+          <a:noFill/>
+        </p:spPr>
+        <p:txBody>
+          <a:bodyPr wrap="square">
+            <a:spAutoFit/>
+          </a:bodyPr>
+          <a:lstStyle/>
+          <a:p>
+            <a:pPr algn="r"/>
+            <a:r>
+              <a:rPr sz="800" b="0" i="1">
+                <a:solidFill>
+                  <a:srgbClr val="D6D3D1"/>
+                </a:solidFill>
+                <a:latin typeface="Calibri"/>
+              </a:rPr>
+              <a:t>Alan Davidson · Business Banking Advisor · Self-initiated · Own time · June 2026</a:t>
+            </a:r>
+          </a:p>
+        </p:txBody>
+      </p:sp>
+      <p:sp>
+        <p:nvSpPr>
+          <p:cNvPr id="32" name="TextBox 31"/>
+          <p:cNvSpPr txBox="1"/>
+          <p:nvPr/>
+        </p:nvSpPr>
+        <p:spPr>
+          <a:xfrm>
+            <a:off x="11750040" y="6620256"/>
+            <a:ext cx="365760" cy="201168"/>
+          </a:xfrm>
+          <a:prstGeom prst="rect">
+            <a:avLst/>
+          </a:prstGeom>
+          <a:noFill/>
+        </p:spPr>
+        <p:txBody>
+          <a:bodyPr wrap="square">
+            <a:spAutoFit/>
+          </a:bodyPr>
+          <a:lstStyle/>
+          <a:p>
+            <a:pPr algn="r"/>
+            <a:r>
+              <a:rPr sz="800" b="0" i="0">
+                <a:solidFill>
+                  <a:srgbClr val="D6D3D1"/>
+                </a:solidFill>
+                <a:latin typeface="Calibri"/>
+              </a:rPr>
+              <a:t>3</a:t>
+            </a:r>
+          </a:p>
+        </p:txBody>
+      </p:sp>
     </p:spTree>
   </p:cSld>
   <p:clrMapOvr>
@@ -5807,6 +6625,154 @@
           </a:p>
         </p:txBody>
       </p:sp>
+      <p:sp>
+        <p:nvSpPr>
+          <p:cNvPr id="6" name="Rectangle 5"/>
+          <p:cNvSpPr/>
+          <p:nvPr/>
+        </p:nvSpPr>
+        <p:spPr>
+          <a:xfrm>
+            <a:off x="0" y="6601968"/>
+            <a:ext cx="12188952" cy="256032"/>
+          </a:xfrm>
+          <a:prstGeom prst="rect">
+            <a:avLst/>
+          </a:prstGeom>
+          <a:solidFill>
+            <a:srgbClr val="1C1917"/>
+          </a:solidFill>
+          <a:ln>
+            <a:noFill/>
+          </a:ln>
+        </p:spPr>
+        <p:style>
+          <a:lnRef idx="1">
+            <a:schemeClr val="accent1"/>
+          </a:lnRef>
+          <a:fillRef idx="3">
+            <a:schemeClr val="accent1"/>
+          </a:fillRef>
+          <a:effectRef idx="2">
+            <a:schemeClr val="accent1"/>
+          </a:effectRef>
+          <a:fontRef idx="minor">
+            <a:schemeClr val="lt1"/>
+          </a:fontRef>
+        </p:style>
+        <p:txBody>
+          <a:bodyPr rtlCol="0" anchor="ctr"/>
+          <a:lstStyle/>
+          <a:p>
+            <a:pPr algn="ctr"/>
+          </a:p>
+        </p:txBody>
+      </p:sp>
+      <p:sp>
+        <p:nvSpPr>
+          <p:cNvPr id="7" name="TextBox 6"/>
+          <p:cNvSpPr txBox="1"/>
+          <p:nvPr/>
+        </p:nvSpPr>
+        <p:spPr>
+          <a:xfrm>
+            <a:off x="457200" y="6620256"/>
+            <a:ext cx="2743200" cy="201168"/>
+          </a:xfrm>
+          <a:prstGeom prst="rect">
+            <a:avLst/>
+          </a:prstGeom>
+          <a:noFill/>
+        </p:spPr>
+        <p:txBody>
+          <a:bodyPr wrap="square">
+            <a:spAutoFit/>
+          </a:bodyPr>
+          <a:lstStyle/>
+          <a:p>
+            <a:pPr algn="l"/>
+            <a:r>
+              <a:rPr sz="800" b="1" i="0">
+                <a:solidFill>
+                  <a:srgbClr val="FECACA"/>
+                </a:solidFill>
+                <a:latin typeface="Calibri"/>
+              </a:rPr>
+              <a:t>INTERNAL · CONFIDENTIAL</a:t>
+            </a:r>
+          </a:p>
+        </p:txBody>
+      </p:sp>
+      <p:sp>
+        <p:nvSpPr>
+          <p:cNvPr id="8" name="TextBox 7"/>
+          <p:cNvSpPr txBox="1"/>
+          <p:nvPr/>
+        </p:nvSpPr>
+        <p:spPr>
+          <a:xfrm>
+            <a:off x="3200400" y="6620256"/>
+            <a:ext cx="7863840" cy="201168"/>
+          </a:xfrm>
+          <a:prstGeom prst="rect">
+            <a:avLst/>
+          </a:prstGeom>
+          <a:noFill/>
+        </p:spPr>
+        <p:txBody>
+          <a:bodyPr wrap="square">
+            <a:spAutoFit/>
+          </a:bodyPr>
+          <a:lstStyle/>
+          <a:p>
+            <a:pPr algn="r"/>
+            <a:r>
+              <a:rPr sz="800" b="0" i="1">
+                <a:solidFill>
+                  <a:srgbClr val="D6D3D1"/>
+                </a:solidFill>
+                <a:latin typeface="Calibri"/>
+              </a:rPr>
+              <a:t>Alan Davidson · Business Banking Advisor · Self-initiated · Own time · June 2026</a:t>
+            </a:r>
+          </a:p>
+        </p:txBody>
+      </p:sp>
+      <p:sp>
+        <p:nvSpPr>
+          <p:cNvPr id="9" name="TextBox 8"/>
+          <p:cNvSpPr txBox="1"/>
+          <p:nvPr/>
+        </p:nvSpPr>
+        <p:spPr>
+          <a:xfrm>
+            <a:off x="11750040" y="6620256"/>
+            <a:ext cx="365760" cy="201168"/>
+          </a:xfrm>
+          <a:prstGeom prst="rect">
+            <a:avLst/>
+          </a:prstGeom>
+          <a:noFill/>
+        </p:spPr>
+        <p:txBody>
+          <a:bodyPr wrap="square">
+            <a:spAutoFit/>
+          </a:bodyPr>
+          <a:lstStyle/>
+          <a:p>
+            <a:pPr algn="r"/>
+            <a:r>
+              <a:rPr sz="800" b="0" i="0">
+                <a:solidFill>
+                  <a:srgbClr val="D6D3D1"/>
+                </a:solidFill>
+                <a:latin typeface="Calibri"/>
+              </a:rPr>
+              <a:t>4</a:t>
+            </a:r>
+          </a:p>
+        </p:txBody>
+      </p:sp>
     </p:spTree>
   </p:cSld>
   <p:clrMapOvr>
@@ -6288,6 +7254,154 @@
           </a:p>
         </p:txBody>
       </p:sp>
+      <p:sp>
+        <p:nvSpPr>
+          <p:cNvPr id="7" name="Rectangle 6"/>
+          <p:cNvSpPr/>
+          <p:nvPr/>
+        </p:nvSpPr>
+        <p:spPr>
+          <a:xfrm>
+            <a:off x="0" y="6601968"/>
+            <a:ext cx="12188952" cy="256032"/>
+          </a:xfrm>
+          <a:prstGeom prst="rect">
+            <a:avLst/>
+          </a:prstGeom>
+          <a:solidFill>
+            <a:srgbClr val="1C1917"/>
+          </a:solidFill>
+          <a:ln>
+            <a:noFill/>
+          </a:ln>
+        </p:spPr>
+        <p:style>
+          <a:lnRef idx="1">
+            <a:schemeClr val="accent1"/>
+          </a:lnRef>
+          <a:fillRef idx="3">
+            <a:schemeClr val="accent1"/>
+          </a:fillRef>
+          <a:effectRef idx="2">
+            <a:schemeClr val="accent1"/>
+          </a:effectRef>
+          <a:fontRef idx="minor">
+            <a:schemeClr val="lt1"/>
+          </a:fontRef>
+        </p:style>
+        <p:txBody>
+          <a:bodyPr rtlCol="0" anchor="ctr"/>
+          <a:lstStyle/>
+          <a:p>
+            <a:pPr algn="ctr"/>
+          </a:p>
+        </p:txBody>
+      </p:sp>
+      <p:sp>
+        <p:nvSpPr>
+          <p:cNvPr id="8" name="TextBox 7"/>
+          <p:cNvSpPr txBox="1"/>
+          <p:nvPr/>
+        </p:nvSpPr>
+        <p:spPr>
+          <a:xfrm>
+            <a:off x="457200" y="6620256"/>
+            <a:ext cx="2743200" cy="201168"/>
+          </a:xfrm>
+          <a:prstGeom prst="rect">
+            <a:avLst/>
+          </a:prstGeom>
+          <a:noFill/>
+        </p:spPr>
+        <p:txBody>
+          <a:bodyPr wrap="square">
+            <a:spAutoFit/>
+          </a:bodyPr>
+          <a:lstStyle/>
+          <a:p>
+            <a:pPr algn="l"/>
+            <a:r>
+              <a:rPr sz="800" b="1" i="0">
+                <a:solidFill>
+                  <a:srgbClr val="FECACA"/>
+                </a:solidFill>
+                <a:latin typeface="Calibri"/>
+              </a:rPr>
+              <a:t>INTERNAL · CONFIDENTIAL</a:t>
+            </a:r>
+          </a:p>
+        </p:txBody>
+      </p:sp>
+      <p:sp>
+        <p:nvSpPr>
+          <p:cNvPr id="9" name="TextBox 8"/>
+          <p:cNvSpPr txBox="1"/>
+          <p:nvPr/>
+        </p:nvSpPr>
+        <p:spPr>
+          <a:xfrm>
+            <a:off x="3200400" y="6620256"/>
+            <a:ext cx="7863840" cy="201168"/>
+          </a:xfrm>
+          <a:prstGeom prst="rect">
+            <a:avLst/>
+          </a:prstGeom>
+          <a:noFill/>
+        </p:spPr>
+        <p:txBody>
+          <a:bodyPr wrap="square">
+            <a:spAutoFit/>
+          </a:bodyPr>
+          <a:lstStyle/>
+          <a:p>
+            <a:pPr algn="r"/>
+            <a:r>
+              <a:rPr sz="800" b="0" i="1">
+                <a:solidFill>
+                  <a:srgbClr val="D6D3D1"/>
+                </a:solidFill>
+                <a:latin typeface="Calibri"/>
+              </a:rPr>
+              <a:t>Alan Davidson · Business Banking Advisor · Self-initiated · Own time · June 2026</a:t>
+            </a:r>
+          </a:p>
+        </p:txBody>
+      </p:sp>
+      <p:sp>
+        <p:nvSpPr>
+          <p:cNvPr id="10" name="TextBox 9"/>
+          <p:cNvSpPr txBox="1"/>
+          <p:nvPr/>
+        </p:nvSpPr>
+        <p:spPr>
+          <a:xfrm>
+            <a:off x="11750040" y="6620256"/>
+            <a:ext cx="365760" cy="201168"/>
+          </a:xfrm>
+          <a:prstGeom prst="rect">
+            <a:avLst/>
+          </a:prstGeom>
+          <a:noFill/>
+        </p:spPr>
+        <p:txBody>
+          <a:bodyPr wrap="square">
+            <a:spAutoFit/>
+          </a:bodyPr>
+          <a:lstStyle/>
+          <a:p>
+            <a:pPr algn="r"/>
+            <a:r>
+              <a:rPr sz="800" b="0" i="0">
+                <a:solidFill>
+                  <a:srgbClr val="D6D3D1"/>
+                </a:solidFill>
+                <a:latin typeface="Calibri"/>
+              </a:rPr>
+              <a:t>5</a:t>
+            </a:r>
+          </a:p>
+        </p:txBody>
+      </p:sp>
     </p:spTree>
   </p:cSld>
   <p:clrMapOvr>
@@ -6569,6 +7683,154 @@
           </a:p>
         </p:txBody>
       </p:sp>
+      <p:sp>
+        <p:nvSpPr>
+          <p:cNvPr id="6" name="Rectangle 5"/>
+          <p:cNvSpPr/>
+          <p:nvPr/>
+        </p:nvSpPr>
+        <p:spPr>
+          <a:xfrm>
+            <a:off x="0" y="6601968"/>
+            <a:ext cx="12188952" cy="256032"/>
+          </a:xfrm>
+          <a:prstGeom prst="rect">
+            <a:avLst/>
+          </a:prstGeom>
+          <a:solidFill>
+            <a:srgbClr val="1C1917"/>
+          </a:solidFill>
+          <a:ln>
+            <a:noFill/>
+          </a:ln>
+        </p:spPr>
+        <p:style>
+          <a:lnRef idx="1">
+            <a:schemeClr val="accent1"/>
+          </a:lnRef>
+          <a:fillRef idx="3">
+            <a:schemeClr val="accent1"/>
+          </a:fillRef>
+          <a:effectRef idx="2">
+            <a:schemeClr val="accent1"/>
+          </a:effectRef>
+          <a:fontRef idx="minor">
+            <a:schemeClr val="lt1"/>
+          </a:fontRef>
+        </p:style>
+        <p:txBody>
+          <a:bodyPr rtlCol="0" anchor="ctr"/>
+          <a:lstStyle/>
+          <a:p>
+            <a:pPr algn="ctr"/>
+          </a:p>
+        </p:txBody>
+      </p:sp>
+      <p:sp>
+        <p:nvSpPr>
+          <p:cNvPr id="7" name="TextBox 6"/>
+          <p:cNvSpPr txBox="1"/>
+          <p:nvPr/>
+        </p:nvSpPr>
+        <p:spPr>
+          <a:xfrm>
+            <a:off x="457200" y="6620256"/>
+            <a:ext cx="2743200" cy="201168"/>
+          </a:xfrm>
+          <a:prstGeom prst="rect">
+            <a:avLst/>
+          </a:prstGeom>
+          <a:noFill/>
+        </p:spPr>
+        <p:txBody>
+          <a:bodyPr wrap="square">
+            <a:spAutoFit/>
+          </a:bodyPr>
+          <a:lstStyle/>
+          <a:p>
+            <a:pPr algn="l"/>
+            <a:r>
+              <a:rPr sz="800" b="1" i="0">
+                <a:solidFill>
+                  <a:srgbClr val="FECACA"/>
+                </a:solidFill>
+                <a:latin typeface="Calibri"/>
+              </a:rPr>
+              <a:t>INTERNAL · CONFIDENTIAL</a:t>
+            </a:r>
+          </a:p>
+        </p:txBody>
+      </p:sp>
+      <p:sp>
+        <p:nvSpPr>
+          <p:cNvPr id="8" name="TextBox 7"/>
+          <p:cNvSpPr txBox="1"/>
+          <p:nvPr/>
+        </p:nvSpPr>
+        <p:spPr>
+          <a:xfrm>
+            <a:off x="3200400" y="6620256"/>
+            <a:ext cx="7863840" cy="201168"/>
+          </a:xfrm>
+          <a:prstGeom prst="rect">
+            <a:avLst/>
+          </a:prstGeom>
+          <a:noFill/>
+        </p:spPr>
+        <p:txBody>
+          <a:bodyPr wrap="square">
+            <a:spAutoFit/>
+          </a:bodyPr>
+          <a:lstStyle/>
+          <a:p>
+            <a:pPr algn="r"/>
+            <a:r>
+              <a:rPr sz="800" b="0" i="1">
+                <a:solidFill>
+                  <a:srgbClr val="D6D3D1"/>
+                </a:solidFill>
+                <a:latin typeface="Calibri"/>
+              </a:rPr>
+              <a:t>Alan Davidson · Business Banking Advisor · Self-initiated · Own time · June 2026</a:t>
+            </a:r>
+          </a:p>
+        </p:txBody>
+      </p:sp>
+      <p:sp>
+        <p:nvSpPr>
+          <p:cNvPr id="9" name="TextBox 8"/>
+          <p:cNvSpPr txBox="1"/>
+          <p:nvPr/>
+        </p:nvSpPr>
+        <p:spPr>
+          <a:xfrm>
+            <a:off x="11750040" y="6620256"/>
+            <a:ext cx="365760" cy="201168"/>
+          </a:xfrm>
+          <a:prstGeom prst="rect">
+            <a:avLst/>
+          </a:prstGeom>
+          <a:noFill/>
+        </p:spPr>
+        <p:txBody>
+          <a:bodyPr wrap="square">
+            <a:spAutoFit/>
+          </a:bodyPr>
+          <a:lstStyle/>
+          <a:p>
+            <a:pPr algn="r"/>
+            <a:r>
+              <a:rPr sz="800" b="0" i="0">
+                <a:solidFill>
+                  <a:srgbClr val="D6D3D1"/>
+                </a:solidFill>
+                <a:latin typeface="Calibri"/>
+              </a:rPr>
+              <a:t>6</a:t>
+            </a:r>
+          </a:p>
+        </p:txBody>
+      </p:sp>
     </p:spTree>
   </p:cSld>
   <p:clrMapOvr>
@@ -6850,6 +8112,154 @@
           </a:p>
         </p:txBody>
       </p:sp>
+      <p:sp>
+        <p:nvSpPr>
+          <p:cNvPr id="6" name="Rectangle 5"/>
+          <p:cNvSpPr/>
+          <p:nvPr/>
+        </p:nvSpPr>
+        <p:spPr>
+          <a:xfrm>
+            <a:off x="0" y="6601968"/>
+            <a:ext cx="12188952" cy="256032"/>
+          </a:xfrm>
+          <a:prstGeom prst="rect">
+            <a:avLst/>
+          </a:prstGeom>
+          <a:solidFill>
+            <a:srgbClr val="1C1917"/>
+          </a:solidFill>
+          <a:ln>
+            <a:noFill/>
+          </a:ln>
+        </p:spPr>
+        <p:style>
+          <a:lnRef idx="1">
+            <a:schemeClr val="accent1"/>
+          </a:lnRef>
+          <a:fillRef idx="3">
+            <a:schemeClr val="accent1"/>
+          </a:fillRef>
+          <a:effectRef idx="2">
+            <a:schemeClr val="accent1"/>
+          </a:effectRef>
+          <a:fontRef idx="minor">
+            <a:schemeClr val="lt1"/>
+          </a:fontRef>
+        </p:style>
+        <p:txBody>
+          <a:bodyPr rtlCol="0" anchor="ctr"/>
+          <a:lstStyle/>
+          <a:p>
+            <a:pPr algn="ctr"/>
+          </a:p>
+        </p:txBody>
+      </p:sp>
+      <p:sp>
+        <p:nvSpPr>
+          <p:cNvPr id="7" name="TextBox 6"/>
+          <p:cNvSpPr txBox="1"/>
+          <p:nvPr/>
+        </p:nvSpPr>
+        <p:spPr>
+          <a:xfrm>
+            <a:off x="457200" y="6620256"/>
+            <a:ext cx="2743200" cy="201168"/>
+          </a:xfrm>
+          <a:prstGeom prst="rect">
+            <a:avLst/>
+          </a:prstGeom>
+          <a:noFill/>
+        </p:spPr>
+        <p:txBody>
+          <a:bodyPr wrap="square">
+            <a:spAutoFit/>
+          </a:bodyPr>
+          <a:lstStyle/>
+          <a:p>
+            <a:pPr algn="l"/>
+            <a:r>
+              <a:rPr sz="800" b="1" i="0">
+                <a:solidFill>
+                  <a:srgbClr val="FECACA"/>
+                </a:solidFill>
+                <a:latin typeface="Calibri"/>
+              </a:rPr>
+              <a:t>INTERNAL · CONFIDENTIAL</a:t>
+            </a:r>
+          </a:p>
+        </p:txBody>
+      </p:sp>
+      <p:sp>
+        <p:nvSpPr>
+          <p:cNvPr id="8" name="TextBox 7"/>
+          <p:cNvSpPr txBox="1"/>
+          <p:nvPr/>
+        </p:nvSpPr>
+        <p:spPr>
+          <a:xfrm>
+            <a:off x="3200400" y="6620256"/>
+            <a:ext cx="7863840" cy="201168"/>
+          </a:xfrm>
+          <a:prstGeom prst="rect">
+            <a:avLst/>
+          </a:prstGeom>
+          <a:noFill/>
+        </p:spPr>
+        <p:txBody>
+          <a:bodyPr wrap="square">
+            <a:spAutoFit/>
+          </a:bodyPr>
+          <a:lstStyle/>
+          <a:p>
+            <a:pPr algn="r"/>
+            <a:r>
+              <a:rPr sz="800" b="0" i="1">
+                <a:solidFill>
+                  <a:srgbClr val="D6D3D1"/>
+                </a:solidFill>
+                <a:latin typeface="Calibri"/>
+              </a:rPr>
+              <a:t>Alan Davidson · Business Banking Advisor · Self-initiated · Own time · June 2026</a:t>
+            </a:r>
+          </a:p>
+        </p:txBody>
+      </p:sp>
+      <p:sp>
+        <p:nvSpPr>
+          <p:cNvPr id="9" name="TextBox 8"/>
+          <p:cNvSpPr txBox="1"/>
+          <p:nvPr/>
+        </p:nvSpPr>
+        <p:spPr>
+          <a:xfrm>
+            <a:off x="11750040" y="6620256"/>
+            <a:ext cx="365760" cy="201168"/>
+          </a:xfrm>
+          <a:prstGeom prst="rect">
+            <a:avLst/>
+          </a:prstGeom>
+          <a:noFill/>
+        </p:spPr>
+        <p:txBody>
+          <a:bodyPr wrap="square">
+            <a:spAutoFit/>
+          </a:bodyPr>
+          <a:lstStyle/>
+          <a:p>
+            <a:pPr algn="r"/>
+            <a:r>
+              <a:rPr sz="800" b="0" i="0">
+                <a:solidFill>
+                  <a:srgbClr val="D6D3D1"/>
+                </a:solidFill>
+                <a:latin typeface="Calibri"/>
+              </a:rPr>
+              <a:t>7</a:t>
+            </a:r>
+          </a:p>
+        </p:txBody>
+      </p:sp>
     </p:spTree>
   </p:cSld>
   <p:clrMapOvr>
@@ -7265,6 +8675,154 @@
           </a:p>
         </p:txBody>
       </p:sp>
+      <p:sp>
+        <p:nvSpPr>
+          <p:cNvPr id="10" name="Rectangle 9"/>
+          <p:cNvSpPr/>
+          <p:nvPr/>
+        </p:nvSpPr>
+        <p:spPr>
+          <a:xfrm>
+            <a:off x="0" y="6601968"/>
+            <a:ext cx="12188952" cy="256032"/>
+          </a:xfrm>
+          <a:prstGeom prst="rect">
+            <a:avLst/>
+          </a:prstGeom>
+          <a:solidFill>
+            <a:srgbClr val="1C1917"/>
+          </a:solidFill>
+          <a:ln>
+            <a:noFill/>
+          </a:ln>
+        </p:spPr>
+        <p:style>
+          <a:lnRef idx="1">
+            <a:schemeClr val="accent1"/>
+          </a:lnRef>
+          <a:fillRef idx="3">
+            <a:schemeClr val="accent1"/>
+          </a:fillRef>
+          <a:effectRef idx="2">
+            <a:schemeClr val="accent1"/>
+          </a:effectRef>
+          <a:fontRef idx="minor">
+            <a:schemeClr val="lt1"/>
+          </a:fontRef>
+        </p:style>
+        <p:txBody>
+          <a:bodyPr rtlCol="0" anchor="ctr"/>
+          <a:lstStyle/>
+          <a:p>
+            <a:pPr algn="ctr"/>
+          </a:p>
+        </p:txBody>
+      </p:sp>
+      <p:sp>
+        <p:nvSpPr>
+          <p:cNvPr id="11" name="TextBox 10"/>
+          <p:cNvSpPr txBox="1"/>
+          <p:nvPr/>
+        </p:nvSpPr>
+        <p:spPr>
+          <a:xfrm>
+            <a:off x="457200" y="6620256"/>
+            <a:ext cx="2743200" cy="201168"/>
+          </a:xfrm>
+          <a:prstGeom prst="rect">
+            <a:avLst/>
+          </a:prstGeom>
+          <a:noFill/>
+        </p:spPr>
+        <p:txBody>
+          <a:bodyPr wrap="square">
+            <a:spAutoFit/>
+          </a:bodyPr>
+          <a:lstStyle/>
+          <a:p>
+            <a:pPr algn="l"/>
+            <a:r>
+              <a:rPr sz="800" b="1" i="0">
+                <a:solidFill>
+                  <a:srgbClr val="FECACA"/>
+                </a:solidFill>
+                <a:latin typeface="Calibri"/>
+              </a:rPr>
+              <a:t>INTERNAL · CONFIDENTIAL</a:t>
+            </a:r>
+          </a:p>
+        </p:txBody>
+      </p:sp>
+      <p:sp>
+        <p:nvSpPr>
+          <p:cNvPr id="12" name="TextBox 11"/>
+          <p:cNvSpPr txBox="1"/>
+          <p:nvPr/>
+        </p:nvSpPr>
+        <p:spPr>
+          <a:xfrm>
+            <a:off x="3200400" y="6620256"/>
+            <a:ext cx="7863840" cy="201168"/>
+          </a:xfrm>
+          <a:prstGeom prst="rect">
+            <a:avLst/>
+          </a:prstGeom>
+          <a:noFill/>
+        </p:spPr>
+        <p:txBody>
+          <a:bodyPr wrap="square">
+            <a:spAutoFit/>
+          </a:bodyPr>
+          <a:lstStyle/>
+          <a:p>
+            <a:pPr algn="r"/>
+            <a:r>
+              <a:rPr sz="800" b="0" i="1">
+                <a:solidFill>
+                  <a:srgbClr val="D6D3D1"/>
+                </a:solidFill>
+                <a:latin typeface="Calibri"/>
+              </a:rPr>
+              <a:t>Alan Davidson · Business Banking Advisor · Self-initiated · Own time · June 2026</a:t>
+            </a:r>
+          </a:p>
+        </p:txBody>
+      </p:sp>
+      <p:sp>
+        <p:nvSpPr>
+          <p:cNvPr id="13" name="TextBox 12"/>
+          <p:cNvSpPr txBox="1"/>
+          <p:nvPr/>
+        </p:nvSpPr>
+        <p:spPr>
+          <a:xfrm>
+            <a:off x="11750040" y="6620256"/>
+            <a:ext cx="365760" cy="201168"/>
+          </a:xfrm>
+          <a:prstGeom prst="rect">
+            <a:avLst/>
+          </a:prstGeom>
+          <a:noFill/>
+        </p:spPr>
+        <p:txBody>
+          <a:bodyPr wrap="square">
+            <a:spAutoFit/>
+          </a:bodyPr>
+          <a:lstStyle/>
+          <a:p>
+            <a:pPr algn="r"/>
+            <a:r>
+              <a:rPr sz="800" b="0" i="0">
+                <a:solidFill>
+                  <a:srgbClr val="D6D3D1"/>
+                </a:solidFill>
+                <a:latin typeface="Calibri"/>
+              </a:rPr>
+              <a:t>8</a:t>
+            </a:r>
+          </a:p>
+        </p:txBody>
+      </p:sp>
     </p:spTree>
   </p:cSld>
   <p:clrMapOvr>
@@ -7622,6 +9180,154 @@
                 <a:latin typeface="Calibri"/>
               </a:rPr>
               <a:t>• renderMtdSubmit (~4998) — Making Tax Digital HMRC submission</a:t>
+            </a:r>
+          </a:p>
+        </p:txBody>
+      </p:sp>
+      <p:sp>
+        <p:nvSpPr>
+          <p:cNvPr id="6" name="Rectangle 5"/>
+          <p:cNvSpPr/>
+          <p:nvPr/>
+        </p:nvSpPr>
+        <p:spPr>
+          <a:xfrm>
+            <a:off x="0" y="6601968"/>
+            <a:ext cx="12188952" cy="256032"/>
+          </a:xfrm>
+          <a:prstGeom prst="rect">
+            <a:avLst/>
+          </a:prstGeom>
+          <a:solidFill>
+            <a:srgbClr val="1C1917"/>
+          </a:solidFill>
+          <a:ln>
+            <a:noFill/>
+          </a:ln>
+        </p:spPr>
+        <p:style>
+          <a:lnRef idx="1">
+            <a:schemeClr val="accent1"/>
+          </a:lnRef>
+          <a:fillRef idx="3">
+            <a:schemeClr val="accent1"/>
+          </a:fillRef>
+          <a:effectRef idx="2">
+            <a:schemeClr val="accent1"/>
+          </a:effectRef>
+          <a:fontRef idx="minor">
+            <a:schemeClr val="lt1"/>
+          </a:fontRef>
+        </p:style>
+        <p:txBody>
+          <a:bodyPr rtlCol="0" anchor="ctr"/>
+          <a:lstStyle/>
+          <a:p>
+            <a:pPr algn="ctr"/>
+          </a:p>
+        </p:txBody>
+      </p:sp>
+      <p:sp>
+        <p:nvSpPr>
+          <p:cNvPr id="7" name="TextBox 6"/>
+          <p:cNvSpPr txBox="1"/>
+          <p:nvPr/>
+        </p:nvSpPr>
+        <p:spPr>
+          <a:xfrm>
+            <a:off x="457200" y="6620256"/>
+            <a:ext cx="2743200" cy="201168"/>
+          </a:xfrm>
+          <a:prstGeom prst="rect">
+            <a:avLst/>
+          </a:prstGeom>
+          <a:noFill/>
+        </p:spPr>
+        <p:txBody>
+          <a:bodyPr wrap="square">
+            <a:spAutoFit/>
+          </a:bodyPr>
+          <a:lstStyle/>
+          <a:p>
+            <a:pPr algn="l"/>
+            <a:r>
+              <a:rPr sz="800" b="1" i="0">
+                <a:solidFill>
+                  <a:srgbClr val="FECACA"/>
+                </a:solidFill>
+                <a:latin typeface="Calibri"/>
+              </a:rPr>
+              <a:t>INTERNAL · CONFIDENTIAL</a:t>
+            </a:r>
+          </a:p>
+        </p:txBody>
+      </p:sp>
+      <p:sp>
+        <p:nvSpPr>
+          <p:cNvPr id="8" name="TextBox 7"/>
+          <p:cNvSpPr txBox="1"/>
+          <p:nvPr/>
+        </p:nvSpPr>
+        <p:spPr>
+          <a:xfrm>
+            <a:off x="3200400" y="6620256"/>
+            <a:ext cx="7863840" cy="201168"/>
+          </a:xfrm>
+          <a:prstGeom prst="rect">
+            <a:avLst/>
+          </a:prstGeom>
+          <a:noFill/>
+        </p:spPr>
+        <p:txBody>
+          <a:bodyPr wrap="square">
+            <a:spAutoFit/>
+          </a:bodyPr>
+          <a:lstStyle/>
+          <a:p>
+            <a:pPr algn="r"/>
+            <a:r>
+              <a:rPr sz="800" b="0" i="1">
+                <a:solidFill>
+                  <a:srgbClr val="D6D3D1"/>
+                </a:solidFill>
+                <a:latin typeface="Calibri"/>
+              </a:rPr>
+              <a:t>Alan Davidson · Business Banking Advisor · Self-initiated · Own time · June 2026</a:t>
+            </a:r>
+          </a:p>
+        </p:txBody>
+      </p:sp>
+      <p:sp>
+        <p:nvSpPr>
+          <p:cNvPr id="9" name="TextBox 8"/>
+          <p:cNvSpPr txBox="1"/>
+          <p:nvPr/>
+        </p:nvSpPr>
+        <p:spPr>
+          <a:xfrm>
+            <a:off x="11750040" y="6620256"/>
+            <a:ext cx="365760" cy="201168"/>
+          </a:xfrm>
+          <a:prstGeom prst="rect">
+            <a:avLst/>
+          </a:prstGeom>
+          <a:noFill/>
+        </p:spPr>
+        <p:txBody>
+          <a:bodyPr wrap="square">
+            <a:spAutoFit/>
+          </a:bodyPr>
+          <a:lstStyle/>
+          <a:p>
+            <a:pPr algn="r"/>
+            <a:r>
+              <a:rPr sz="800" b="0" i="0">
+                <a:solidFill>
+                  <a:srgbClr val="D6D3D1"/>
+                </a:solidFill>
+                <a:latin typeface="Calibri"/>
+              </a:rPr>
+              <a:t>9</a:t>
             </a:r>
           </a:p>
         </p:txBody>

--- a/Santander_Architecture.pptx
+++ b/Santander_Architecture.pptx
@@ -3157,7 +3157,7 @@
             <a:avLst/>
           </a:prstGeom>
           <a:solidFill>
-            <a:srgbClr val="C8102E"/>
+            <a:srgbClr val="DA291C"/>
           </a:solidFill>
           <a:ln>
             <a:noFill/>
@@ -3243,7 +3243,7 @@
             <a:avLst/>
           </a:prstGeom>
           <a:solidFill>
-            <a:srgbClr val="C8102E"/>
+            <a:srgbClr val="DA291C"/>
           </a:solidFill>
           <a:ln>
             <a:noFill/>
@@ -3356,7 +3356,7 @@
             <a:avLst/>
           </a:prstGeom>
           <a:solidFill>
-            <a:srgbClr val="C8102E"/>
+            <a:srgbClr val="DA291C"/>
           </a:solidFill>
           <a:ln>
             <a:noFill/>
@@ -3442,7 +3442,7 @@
             <a:avLst/>
           </a:prstGeom>
           <a:solidFill>
-            <a:srgbClr val="C8102E"/>
+            <a:srgbClr val="DA291C"/>
           </a:solidFill>
           <a:ln>
             <a:noFill/>
@@ -3598,7 +3598,7 @@
             <a:avLst/>
           </a:prstGeom>
           <a:solidFill>
-            <a:srgbClr val="C8102E"/>
+            <a:srgbClr val="DA291C"/>
           </a:solidFill>
           <a:ln>
             <a:noFill/>
@@ -3754,7 +3754,7 @@
             <a:avLst/>
           </a:prstGeom>
           <a:solidFill>
-            <a:srgbClr val="C8102E"/>
+            <a:srgbClr val="DA291C"/>
           </a:solidFill>
           <a:ln>
             <a:noFill/>
@@ -3910,7 +3910,7 @@
             <a:avLst/>
           </a:prstGeom>
           <a:solidFill>
-            <a:srgbClr val="C8102E"/>
+            <a:srgbClr val="DA291C"/>
           </a:solidFill>
           <a:ln>
             <a:noFill/>
@@ -4093,7 +4093,7 @@
             <a:avLst/>
           </a:prstGeom>
           <a:solidFill>
-            <a:srgbClr val="C8102E"/>
+            <a:srgbClr val="DA291C"/>
           </a:solidFill>
           <a:ln>
             <a:noFill/>
@@ -4232,7 +4232,7 @@
             <a:avLst/>
           </a:prstGeom>
           <a:solidFill>
-            <a:srgbClr val="C8102E"/>
+            <a:srgbClr val="DA291C"/>
           </a:solidFill>
           <a:ln>
             <a:noFill/>
@@ -4286,7 +4286,7 @@
             <a:r>
               <a:rPr sz="950" b="1" i="0">
                 <a:solidFill>
-                  <a:srgbClr val="C8102E"/>
+                  <a:srgbClr val="DA291C"/>
                 </a:solidFill>
                 <a:latin typeface="Calibri"/>
               </a:rPr>
@@ -4423,7 +4423,7 @@
             <a:avLst/>
           </a:prstGeom>
           <a:solidFill>
-            <a:srgbClr val="C8102E"/>
+            <a:srgbClr val="DA291C"/>
           </a:solidFill>
           <a:ln w="9525">
             <a:solidFill>
@@ -4939,7 +4939,7 @@
             <a:r>
               <a:rPr sz="1100" b="1" i="0">
                 <a:solidFill>
-                  <a:srgbClr val="C8102E"/>
+                  <a:srgbClr val="DA291C"/>
                 </a:solidFill>
                 <a:latin typeface="Calibri"/>
               </a:rPr>
@@ -5043,7 +5043,7 @@
             <a:avLst/>
           </a:prstGeom>
           <a:solidFill>
-            <a:srgbClr val="C8102E"/>
+            <a:srgbClr val="DA291C"/>
           </a:solidFill>
           <a:ln>
             <a:noFill/>
@@ -5205,7 +5205,7 @@
             <a:avLst/>
           </a:prstGeom>
           <a:solidFill>
-            <a:srgbClr val="C8102E"/>
+            <a:srgbClr val="DA291C"/>
           </a:solidFill>
           <a:ln>
             <a:noFill/>
@@ -5367,7 +5367,7 @@
             <a:avLst/>
           </a:prstGeom>
           <a:solidFill>
-            <a:srgbClr val="C8102E"/>
+            <a:srgbClr val="DA291C"/>
           </a:solidFill>
           <a:ln>
             <a:noFill/>
@@ -5529,7 +5529,7 @@
             <a:avLst/>
           </a:prstGeom>
           <a:solidFill>
-            <a:srgbClr val="C8102E"/>
+            <a:srgbClr val="DA291C"/>
           </a:solidFill>
           <a:ln>
             <a:noFill/>
@@ -5691,7 +5691,7 @@
             <a:avLst/>
           </a:prstGeom>
           <a:solidFill>
-            <a:srgbClr val="C8102E"/>
+            <a:srgbClr val="DA291C"/>
           </a:solidFill>
           <a:ln>
             <a:noFill/>
@@ -5853,7 +5853,7 @@
             <a:avLst/>
           </a:prstGeom>
           <a:solidFill>
-            <a:srgbClr val="C8102E"/>
+            <a:srgbClr val="DA291C"/>
           </a:solidFill>
           <a:ln>
             <a:noFill/>
@@ -6179,7 +6179,7 @@
             <a:avLst/>
           </a:prstGeom>
           <a:solidFill>
-            <a:srgbClr val="C8102E"/>
+            <a:srgbClr val="DA291C"/>
           </a:solidFill>
           <a:ln>
             <a:noFill/>
@@ -6233,7 +6233,7 @@
             <a:r>
               <a:rPr sz="950" b="1" i="0">
                 <a:solidFill>
-                  <a:srgbClr val="C8102E"/>
+                  <a:srgbClr val="DA291C"/>
                 </a:solidFill>
                 <a:latin typeface="Calibri"/>
               </a:rPr>
@@ -6381,7 +6381,7 @@
             <a:r>
               <a:rPr sz="1000" b="1" i="0">
                 <a:solidFill>
-                  <a:srgbClr val="C8102E"/>
+                  <a:srgbClr val="DA291C"/>
                 </a:solidFill>
                 <a:latin typeface="Calibri"/>
               </a:rPr>
@@ -6450,7 +6450,7 @@
             <a:avLst/>
           </a:prstGeom>
           <a:solidFill>
-            <a:srgbClr val="C8102E"/>
+            <a:srgbClr val="DA291C"/>
           </a:solidFill>
           <a:ln>
             <a:noFill/>
@@ -6612,7 +6612,7 @@
             <a:avLst/>
           </a:prstGeom>
           <a:solidFill>
-            <a:srgbClr val="C8102E"/>
+            <a:srgbClr val="DA291C"/>
           </a:solidFill>
           <a:ln>
             <a:noFill/>
@@ -6774,7 +6774,7 @@
             <a:avLst/>
           </a:prstGeom>
           <a:solidFill>
-            <a:srgbClr val="C8102E"/>
+            <a:srgbClr val="DA291C"/>
           </a:solidFill>
           <a:ln>
             <a:noFill/>
@@ -6902,7 +6902,7 @@
             <a:r>
               <a:rPr sz="1000" b="1" i="0">
                 <a:solidFill>
-                  <a:srgbClr val="C8102E"/>
+                  <a:srgbClr val="DA291C"/>
                 </a:solidFill>
                 <a:latin typeface="Calibri"/>
               </a:rPr>
@@ -7699,7 +7699,7 @@
             <a:avLst/>
           </a:prstGeom>
           <a:solidFill>
-            <a:srgbClr val="C8102E"/>
+            <a:srgbClr val="DA291C"/>
           </a:solidFill>
           <a:ln>
             <a:noFill/>
@@ -7753,7 +7753,7 @@
             <a:r>
               <a:rPr sz="950" b="1" i="0">
                 <a:solidFill>
-                  <a:srgbClr val="C8102E"/>
+                  <a:srgbClr val="DA291C"/>
                 </a:solidFill>
                 <a:latin typeface="Calibri"/>
               </a:rPr>
@@ -7935,7 +7935,7 @@
             <a:avLst/>
           </a:prstGeom>
           <a:solidFill>
-            <a:srgbClr val="C8102E"/>
+            <a:srgbClr val="DA291C"/>
           </a:solidFill>
           <a:ln>
             <a:noFill/>
@@ -8097,7 +8097,7 @@
             <a:avLst/>
           </a:prstGeom>
           <a:solidFill>
-            <a:srgbClr val="C8102E"/>
+            <a:srgbClr val="DA291C"/>
           </a:solidFill>
           <a:ln>
             <a:noFill/>
@@ -8259,7 +8259,7 @@
             <a:avLst/>
           </a:prstGeom>
           <a:solidFill>
-            <a:srgbClr val="C8102E"/>
+            <a:srgbClr val="DA291C"/>
           </a:solidFill>
           <a:ln>
             <a:noFill/>
@@ -8421,7 +8421,7 @@
             <a:avLst/>
           </a:prstGeom>
           <a:solidFill>
-            <a:srgbClr val="C8102E"/>
+            <a:srgbClr val="DA291C"/>
           </a:solidFill>
           <a:ln>
             <a:noFill/>
@@ -8583,7 +8583,7 @@
             <a:avLst/>
           </a:prstGeom>
           <a:solidFill>
-            <a:srgbClr val="C8102E"/>
+            <a:srgbClr val="DA291C"/>
           </a:solidFill>
           <a:ln>
             <a:noFill/>
@@ -8745,7 +8745,7 @@
             <a:avLst/>
           </a:prstGeom>
           <a:solidFill>
-            <a:srgbClr val="C8102E"/>
+            <a:srgbClr val="DA291C"/>
           </a:solidFill>
           <a:ln>
             <a:noFill/>
@@ -8907,7 +8907,7 @@
             <a:avLst/>
           </a:prstGeom>
           <a:solidFill>
-            <a:srgbClr val="C8102E"/>
+            <a:srgbClr val="DA291C"/>
           </a:solidFill>
           <a:ln>
             <a:noFill/>
@@ -9069,7 +9069,7 @@
             <a:avLst/>
           </a:prstGeom>
           <a:solidFill>
-            <a:srgbClr val="C8102E"/>
+            <a:srgbClr val="DA291C"/>
           </a:solidFill>
           <a:ln>
             <a:noFill/>
@@ -9395,7 +9395,7 @@
             <a:avLst/>
           </a:prstGeom>
           <a:solidFill>
-            <a:srgbClr val="C8102E"/>
+            <a:srgbClr val="DA291C"/>
           </a:solidFill>
           <a:ln>
             <a:noFill/>
@@ -9449,7 +9449,7 @@
             <a:r>
               <a:rPr sz="950" b="1" i="0">
                 <a:solidFill>
-                  <a:srgbClr val="C8102E"/>
+                  <a:srgbClr val="DA291C"/>
                 </a:solidFill>
                 <a:latin typeface="Calibri"/>
               </a:rPr>
@@ -9629,7 +9629,7 @@
             <a:avLst/>
           </a:prstGeom>
           <a:solidFill>
-            <a:srgbClr val="C8102E"/>
+            <a:srgbClr val="DA291C"/>
           </a:solidFill>
           <a:ln>
             <a:noFill/>
@@ -9785,7 +9785,7 @@
             <a:avLst/>
           </a:prstGeom>
           <a:solidFill>
-            <a:srgbClr val="C8102E"/>
+            <a:srgbClr val="DA291C"/>
           </a:solidFill>
           <a:ln>
             <a:noFill/>
@@ -9941,7 +9941,7 @@
             <a:avLst/>
           </a:prstGeom>
           <a:solidFill>
-            <a:srgbClr val="C8102E"/>
+            <a:srgbClr val="DA291C"/>
           </a:solidFill>
           <a:ln>
             <a:noFill/>
@@ -10099,7 +10099,7 @@
             <a:avLst/>
           </a:prstGeom>
           <a:solidFill>
-            <a:srgbClr val="C8102E"/>
+            <a:srgbClr val="DA291C"/>
           </a:solidFill>
           <a:ln>
             <a:noFill/>
@@ -10261,7 +10261,7 @@
             <a:avLst/>
           </a:prstGeom>
           <a:solidFill>
-            <a:srgbClr val="C8102E"/>
+            <a:srgbClr val="DA291C"/>
           </a:solidFill>
           <a:ln>
             <a:noFill/>
@@ -10423,7 +10423,7 @@
             <a:avLst/>
           </a:prstGeom>
           <a:solidFill>
-            <a:srgbClr val="C8102E"/>
+            <a:srgbClr val="DA291C"/>
           </a:solidFill>
           <a:ln>
             <a:noFill/>
@@ -10585,7 +10585,7 @@
             <a:avLst/>
           </a:prstGeom>
           <a:solidFill>
-            <a:srgbClr val="C8102E"/>
+            <a:srgbClr val="DA291C"/>
           </a:solidFill>
           <a:ln>
             <a:noFill/>
@@ -10747,7 +10747,7 @@
             <a:avLst/>
           </a:prstGeom>
           <a:solidFill>
-            <a:srgbClr val="C8102E"/>
+            <a:srgbClr val="DA291C"/>
           </a:solidFill>
           <a:ln>
             <a:noFill/>
@@ -10909,7 +10909,7 @@
             <a:avLst/>
           </a:prstGeom>
           <a:solidFill>
-            <a:srgbClr val="C8102E"/>
+            <a:srgbClr val="DA291C"/>
           </a:solidFill>
           <a:ln>
             <a:noFill/>
@@ -11235,7 +11235,7 @@
             <a:avLst/>
           </a:prstGeom>
           <a:solidFill>
-            <a:srgbClr val="C8102E"/>
+            <a:srgbClr val="DA291C"/>
           </a:solidFill>
           <a:ln>
             <a:noFill/>
@@ -11289,7 +11289,7 @@
             <a:r>
               <a:rPr sz="950" b="1" i="0">
                 <a:solidFill>
-                  <a:srgbClr val="C8102E"/>
+                  <a:srgbClr val="DA291C"/>
                 </a:solidFill>
                 <a:latin typeface="Calibri"/>
               </a:rPr>
@@ -11383,7 +11383,7 @@
             <a:avLst/>
           </a:prstGeom>
           <a:solidFill>
-            <a:srgbClr val="C8102E"/>
+            <a:srgbClr val="DA291C"/>
           </a:solidFill>
           <a:ln>
             <a:noFill/>
@@ -11469,7 +11469,7 @@
             <a:avLst/>
           </a:prstGeom>
           <a:solidFill>
-            <a:srgbClr val="C8102E"/>
+            <a:srgbClr val="DA291C"/>
           </a:solidFill>
           <a:ln>
             <a:noFill/>
@@ -11660,7 +11660,7 @@
             <a:avLst/>
           </a:prstGeom>
           <a:solidFill>
-            <a:srgbClr val="C8102E"/>
+            <a:srgbClr val="DA291C"/>
           </a:solidFill>
           <a:ln>
             <a:noFill/>
@@ -11851,7 +11851,7 @@
             <a:avLst/>
           </a:prstGeom>
           <a:solidFill>
-            <a:srgbClr val="C8102E"/>
+            <a:srgbClr val="DA291C"/>
           </a:solidFill>
           <a:ln>
             <a:noFill/>
@@ -12042,7 +12042,7 @@
             <a:avLst/>
           </a:prstGeom>
           <a:solidFill>
-            <a:srgbClr val="C8102E"/>
+            <a:srgbClr val="DA291C"/>
           </a:solidFill>
           <a:ln>
             <a:noFill/>
@@ -12233,7 +12233,7 @@
             <a:avLst/>
           </a:prstGeom>
           <a:solidFill>
-            <a:srgbClr val="C8102E"/>
+            <a:srgbClr val="DA291C"/>
           </a:solidFill>
           <a:ln>
             <a:noFill/>
@@ -12424,7 +12424,7 @@
             <a:avLst/>
           </a:prstGeom>
           <a:solidFill>
-            <a:srgbClr val="C8102E"/>
+            <a:srgbClr val="DA291C"/>
           </a:solidFill>
           <a:ln>
             <a:noFill/>
@@ -12615,7 +12615,7 @@
             <a:avLst/>
           </a:prstGeom>
           <a:solidFill>
-            <a:srgbClr val="C8102E"/>
+            <a:srgbClr val="DA291C"/>
           </a:solidFill>
           <a:ln>
             <a:noFill/>
@@ -12806,7 +12806,7 @@
             <a:avLst/>
           </a:prstGeom>
           <a:solidFill>
-            <a:srgbClr val="C8102E"/>
+            <a:srgbClr val="DA291C"/>
           </a:solidFill>
           <a:ln>
             <a:noFill/>
@@ -13163,7 +13163,7 @@
             <a:avLst/>
           </a:prstGeom>
           <a:solidFill>
-            <a:srgbClr val="C8102E"/>
+            <a:srgbClr val="DA291C"/>
           </a:solidFill>
           <a:ln>
             <a:noFill/>
@@ -13217,7 +13217,7 @@
             <a:r>
               <a:rPr sz="950" b="1" i="0">
                 <a:solidFill>
-                  <a:srgbClr val="C8102E"/>
+                  <a:srgbClr val="DA291C"/>
                 </a:solidFill>
                 <a:latin typeface="Calibri"/>
               </a:rPr>
@@ -13354,7 +13354,7 @@
             <a:avLst/>
           </a:prstGeom>
           <a:solidFill>
-            <a:srgbClr val="C8102E"/>
+            <a:srgbClr val="DA291C"/>
           </a:solidFill>
           <a:ln>
             <a:noFill/>
@@ -13512,7 +13512,7 @@
             <a:avLst/>
           </a:prstGeom>
           <a:solidFill>
-            <a:srgbClr val="C8102E"/>
+            <a:srgbClr val="DA291C"/>
           </a:solidFill>
           <a:ln>
             <a:noFill/>
@@ -13674,7 +13674,7 @@
             <a:avLst/>
           </a:prstGeom>
           <a:solidFill>
-            <a:srgbClr val="C8102E"/>
+            <a:srgbClr val="DA291C"/>
           </a:solidFill>
           <a:ln>
             <a:noFill/>
@@ -13836,7 +13836,7 @@
             <a:avLst/>
           </a:prstGeom>
           <a:solidFill>
-            <a:srgbClr val="C8102E"/>
+            <a:srgbClr val="DA291C"/>
           </a:solidFill>
           <a:ln>
             <a:noFill/>
@@ -13998,7 +13998,7 @@
             <a:avLst/>
           </a:prstGeom>
           <a:solidFill>
-            <a:srgbClr val="C8102E"/>
+            <a:srgbClr val="DA291C"/>
           </a:solidFill>
           <a:ln>
             <a:noFill/>
@@ -14160,7 +14160,7 @@
             <a:avLst/>
           </a:prstGeom>
           <a:solidFill>
-            <a:srgbClr val="C8102E"/>
+            <a:srgbClr val="DA291C"/>
           </a:solidFill>
           <a:ln>
             <a:noFill/>
@@ -14322,7 +14322,7 @@
             <a:avLst/>
           </a:prstGeom>
           <a:solidFill>
-            <a:srgbClr val="C8102E"/>
+            <a:srgbClr val="DA291C"/>
           </a:solidFill>
           <a:ln>
             <a:noFill/>
@@ -14648,7 +14648,7 @@
             <a:avLst/>
           </a:prstGeom>
           <a:solidFill>
-            <a:srgbClr val="C8102E"/>
+            <a:srgbClr val="DA291C"/>
           </a:solidFill>
           <a:ln>
             <a:noFill/>
@@ -14702,7 +14702,7 @@
             <a:r>
               <a:rPr sz="950" b="1" i="0">
                 <a:solidFill>
-                  <a:srgbClr val="C8102E"/>
+                  <a:srgbClr val="DA291C"/>
                 </a:solidFill>
                 <a:latin typeface="Calibri"/>
               </a:rPr>
@@ -14884,7 +14884,7 @@
             <a:avLst/>
           </a:prstGeom>
           <a:solidFill>
-            <a:srgbClr val="C8102E"/>
+            <a:srgbClr val="DA291C"/>
           </a:solidFill>
           <a:ln>
             <a:noFill/>
@@ -14993,7 +14993,7 @@
             <a:r>
               <a:rPr sz="1600" b="1" i="0">
                 <a:solidFill>
-                  <a:srgbClr val="C8102E"/>
+                  <a:srgbClr val="DA291C"/>
                 </a:solidFill>
                 <a:latin typeface="Calibri"/>
               </a:rPr>
@@ -15187,7 +15187,7 @@
             <a:r>
               <a:rPr sz="1600" b="1" i="0">
                 <a:solidFill>
-                  <a:srgbClr val="C8102E"/>
+                  <a:srgbClr val="DA291C"/>
                 </a:solidFill>
                 <a:latin typeface="Calibri"/>
               </a:rPr>
@@ -15383,7 +15383,7 @@
             <a:avLst/>
           </a:prstGeom>
           <a:solidFill>
-            <a:srgbClr val="C8102E"/>
+            <a:srgbClr val="DA291C"/>
           </a:solidFill>
           <a:ln>
             <a:noFill/>
@@ -15999,7 +15999,7 @@
             <a:avLst/>
           </a:prstGeom>
           <a:solidFill>
-            <a:srgbClr val="C8102E"/>
+            <a:srgbClr val="DA291C"/>
           </a:solidFill>
           <a:ln>
             <a:noFill/>
@@ -16053,7 +16053,7 @@
             <a:r>
               <a:rPr sz="950" b="1" i="0">
                 <a:solidFill>
-                  <a:srgbClr val="C8102E"/>
+                  <a:srgbClr val="DA291C"/>
                 </a:solidFill>
                 <a:latin typeface="Calibri"/>
               </a:rPr>
@@ -16233,7 +16233,7 @@
             <a:avLst/>
           </a:prstGeom>
           <a:solidFill>
-            <a:srgbClr val="C8102E"/>
+            <a:srgbClr val="DA291C"/>
           </a:solidFill>
           <a:ln>
             <a:noFill/>
@@ -16354,7 +16354,7 @@
             <a:avLst/>
           </a:prstGeom>
           <a:solidFill>
-            <a:srgbClr val="C8102E"/>
+            <a:srgbClr val="DA291C"/>
           </a:solidFill>
           <a:ln>
             <a:noFill/>
@@ -16475,7 +16475,7 @@
             <a:avLst/>
           </a:prstGeom>
           <a:solidFill>
-            <a:srgbClr val="C8102E"/>
+            <a:srgbClr val="DA291C"/>
           </a:solidFill>
           <a:ln>
             <a:noFill/>
@@ -16596,7 +16596,7 @@
             <a:avLst/>
           </a:prstGeom>
           <a:solidFill>
-            <a:srgbClr val="C8102E"/>
+            <a:srgbClr val="DA291C"/>
           </a:solidFill>
           <a:ln>
             <a:noFill/>
@@ -16717,7 +16717,7 @@
             <a:avLst/>
           </a:prstGeom>
           <a:solidFill>
-            <a:srgbClr val="C8102E"/>
+            <a:srgbClr val="DA291C"/>
           </a:solidFill>
           <a:ln>
             <a:noFill/>
@@ -16838,7 +16838,7 @@
             <a:avLst/>
           </a:prstGeom>
           <a:solidFill>
-            <a:srgbClr val="C8102E"/>
+            <a:srgbClr val="DA291C"/>
           </a:solidFill>
           <a:ln>
             <a:noFill/>
@@ -16959,7 +16959,7 @@
             <a:avLst/>
           </a:prstGeom>
           <a:solidFill>
-            <a:srgbClr val="C8102E"/>
+            <a:srgbClr val="DA291C"/>
           </a:solidFill>
           <a:ln>
             <a:noFill/>
@@ -17117,7 +17117,7 @@
             <a:avLst/>
           </a:prstGeom>
           <a:solidFill>
-            <a:srgbClr val="C8102E"/>
+            <a:srgbClr val="DA291C"/>
           </a:solidFill>
           <a:ln>
             <a:noFill/>
@@ -17279,7 +17279,7 @@
             <a:avLst/>
           </a:prstGeom>
           <a:solidFill>
-            <a:srgbClr val="C8102E"/>
+            <a:srgbClr val="DA291C"/>
           </a:solidFill>
           <a:ln>
             <a:noFill/>
@@ -17441,7 +17441,7 @@
             <a:avLst/>
           </a:prstGeom>
           <a:solidFill>
-            <a:srgbClr val="C8102E"/>
+            <a:srgbClr val="DA291C"/>
           </a:solidFill>
           <a:ln>
             <a:noFill/>
@@ -17603,7 +17603,7 @@
             <a:avLst/>
           </a:prstGeom>
           <a:solidFill>
-            <a:srgbClr val="C8102E"/>
+            <a:srgbClr val="DA291C"/>
           </a:solidFill>
           <a:ln>
             <a:noFill/>
@@ -17765,7 +17765,7 @@
             <a:avLst/>
           </a:prstGeom>
           <a:solidFill>
-            <a:srgbClr val="C8102E"/>
+            <a:srgbClr val="DA291C"/>
           </a:solidFill>
           <a:ln>
             <a:noFill/>
@@ -17927,7 +17927,7 @@
             <a:avLst/>
           </a:prstGeom>
           <a:solidFill>
-            <a:srgbClr val="C8102E"/>
+            <a:srgbClr val="DA291C"/>
           </a:solidFill>
           <a:ln>
             <a:noFill/>
@@ -18253,7 +18253,7 @@
             <a:avLst/>
           </a:prstGeom>
           <a:solidFill>
-            <a:srgbClr val="C8102E"/>
+            <a:srgbClr val="DA291C"/>
           </a:solidFill>
           <a:ln>
             <a:noFill/>
@@ -18307,7 +18307,7 @@
             <a:r>
               <a:rPr sz="950" b="1" i="0">
                 <a:solidFill>
-                  <a:srgbClr val="C8102E"/>
+                  <a:srgbClr val="DA291C"/>
                 </a:solidFill>
                 <a:latin typeface="Calibri"/>
               </a:rPr>
@@ -18875,7 +18875,7 @@
             <a:avLst/>
           </a:prstGeom>
           <a:solidFill>
-            <a:srgbClr val="C8102E"/>
+            <a:srgbClr val="DA291C"/>
           </a:solidFill>
           <a:ln>
             <a:noFill/>
@@ -19138,7 +19138,7 @@
             <a:avLst/>
           </a:prstGeom>
           <a:solidFill>
-            <a:srgbClr val="C8102E"/>
+            <a:srgbClr val="DA291C"/>
           </a:solidFill>
           <a:ln>
             <a:noFill/>
@@ -19460,7 +19460,7 @@
             <a:avLst/>
           </a:prstGeom>
           <a:solidFill>
-            <a:srgbClr val="C8102E"/>
+            <a:srgbClr val="DA291C"/>
           </a:solidFill>
           <a:ln>
             <a:noFill/>
@@ -19514,7 +19514,7 @@
             <a:r>
               <a:rPr sz="950" b="1" i="0">
                 <a:solidFill>
-                  <a:srgbClr val="C8102E"/>
+                  <a:srgbClr val="DA291C"/>
                 </a:solidFill>
                 <a:latin typeface="Calibri"/>
               </a:rPr>
@@ -19696,7 +19696,7 @@
             <a:avLst/>
           </a:prstGeom>
           <a:solidFill>
-            <a:srgbClr val="C8102E"/>
+            <a:srgbClr val="DA291C"/>
           </a:solidFill>
           <a:ln>
             <a:noFill/>
@@ -20520,7 +20520,7 @@
             <a:avLst/>
           </a:prstGeom>
           <a:solidFill>
-            <a:srgbClr val="C8102E"/>
+            <a:srgbClr val="DA291C"/>
           </a:solidFill>
           <a:ln>
             <a:noFill/>
@@ -20574,7 +20574,7 @@
             <a:r>
               <a:rPr sz="950" b="1" i="0">
                 <a:solidFill>
-                  <a:srgbClr val="C8102E"/>
+                  <a:srgbClr val="DA291C"/>
                 </a:solidFill>
                 <a:latin typeface="Calibri"/>
               </a:rPr>
@@ -20756,7 +20756,7 @@
             <a:avLst/>
           </a:prstGeom>
           <a:solidFill>
-            <a:srgbClr val="C8102E"/>
+            <a:srgbClr val="DA291C"/>
           </a:solidFill>
           <a:ln>
             <a:noFill/>
@@ -20845,7 +20845,7 @@
             <a:r>
               <a:rPr sz="850" b="1" i="0">
                 <a:solidFill>
-                  <a:srgbClr val="C8102E"/>
+                  <a:srgbClr val="DA291C"/>
                 </a:solidFill>
                 <a:latin typeface="Calibri"/>
               </a:rPr>
@@ -20949,7 +20949,7 @@
             <a:avLst/>
           </a:prstGeom>
           <a:solidFill>
-            <a:srgbClr val="C8102E"/>
+            <a:srgbClr val="DA291C"/>
           </a:solidFill>
           <a:ln>
             <a:noFill/>
@@ -21038,7 +21038,7 @@
             <a:r>
               <a:rPr sz="850" b="1" i="0">
                 <a:solidFill>
-                  <a:srgbClr val="C8102E"/>
+                  <a:srgbClr val="DA291C"/>
                 </a:solidFill>
                 <a:latin typeface="Calibri"/>
               </a:rPr>
@@ -21142,7 +21142,7 @@
             <a:avLst/>
           </a:prstGeom>
           <a:solidFill>
-            <a:srgbClr val="C8102E"/>
+            <a:srgbClr val="DA291C"/>
           </a:solidFill>
           <a:ln>
             <a:noFill/>
@@ -21231,7 +21231,7 @@
             <a:r>
               <a:rPr sz="850" b="1" i="0">
                 <a:solidFill>
-                  <a:srgbClr val="C8102E"/>
+                  <a:srgbClr val="DA291C"/>
                 </a:solidFill>
                 <a:latin typeface="Calibri"/>
               </a:rPr>
@@ -21335,7 +21335,7 @@
             <a:avLst/>
           </a:prstGeom>
           <a:solidFill>
-            <a:srgbClr val="C8102E"/>
+            <a:srgbClr val="DA291C"/>
           </a:solidFill>
           <a:ln>
             <a:noFill/>
@@ -21424,7 +21424,7 @@
             <a:r>
               <a:rPr sz="850" b="1" i="0">
                 <a:solidFill>
-                  <a:srgbClr val="C8102E"/>
+                  <a:srgbClr val="DA291C"/>
                 </a:solidFill>
                 <a:latin typeface="Calibri"/>
               </a:rPr>
@@ -21528,7 +21528,7 @@
             <a:avLst/>
           </a:prstGeom>
           <a:solidFill>
-            <a:srgbClr val="C8102E"/>
+            <a:srgbClr val="DA291C"/>
           </a:solidFill>
           <a:ln>
             <a:noFill/>
@@ -21617,7 +21617,7 @@
             <a:r>
               <a:rPr sz="850" b="1" i="0">
                 <a:solidFill>
-                  <a:srgbClr val="C8102E"/>
+                  <a:srgbClr val="DA291C"/>
                 </a:solidFill>
                 <a:latin typeface="Calibri"/>
               </a:rPr>
@@ -21721,7 +21721,7 @@
             <a:avLst/>
           </a:prstGeom>
           <a:solidFill>
-            <a:srgbClr val="C8102E"/>
+            <a:srgbClr val="DA291C"/>
           </a:solidFill>
           <a:ln>
             <a:noFill/>
@@ -21810,7 +21810,7 @@
             <a:r>
               <a:rPr sz="850" b="1" i="0">
                 <a:solidFill>
-                  <a:srgbClr val="C8102E"/>
+                  <a:srgbClr val="DA291C"/>
                 </a:solidFill>
                 <a:latin typeface="Calibri"/>
               </a:rPr>
@@ -21914,7 +21914,7 @@
             <a:avLst/>
           </a:prstGeom>
           <a:solidFill>
-            <a:srgbClr val="C8102E"/>
+            <a:srgbClr val="DA291C"/>
           </a:solidFill>
           <a:ln>
             <a:noFill/>
@@ -22003,7 +22003,7 @@
             <a:r>
               <a:rPr sz="850" b="1" i="0">
                 <a:solidFill>
-                  <a:srgbClr val="C8102E"/>
+                  <a:srgbClr val="DA291C"/>
                 </a:solidFill>
                 <a:latin typeface="Calibri"/>
               </a:rPr>
@@ -22107,7 +22107,7 @@
             <a:avLst/>
           </a:prstGeom>
           <a:solidFill>
-            <a:srgbClr val="C8102E"/>
+            <a:srgbClr val="DA291C"/>
           </a:solidFill>
           <a:ln>
             <a:noFill/>
@@ -22196,7 +22196,7 @@
             <a:r>
               <a:rPr sz="850" b="1" i="0">
                 <a:solidFill>
-                  <a:srgbClr val="C8102E"/>
+                  <a:srgbClr val="DA291C"/>
                 </a:solidFill>
                 <a:latin typeface="Calibri"/>
               </a:rPr>
@@ -22300,7 +22300,7 @@
             <a:avLst/>
           </a:prstGeom>
           <a:solidFill>
-            <a:srgbClr val="C8102E"/>
+            <a:srgbClr val="DA291C"/>
           </a:solidFill>
           <a:ln>
             <a:noFill/>
@@ -22389,7 +22389,7 @@
             <a:r>
               <a:rPr sz="850" b="1" i="0">
                 <a:solidFill>
-                  <a:srgbClr val="C8102E"/>
+                  <a:srgbClr val="DA291C"/>
                 </a:solidFill>
                 <a:latin typeface="Calibri"/>
               </a:rPr>
@@ -22493,7 +22493,7 @@
             <a:avLst/>
           </a:prstGeom>
           <a:solidFill>
-            <a:srgbClr val="C8102E"/>
+            <a:srgbClr val="DA291C"/>
           </a:solidFill>
           <a:ln>
             <a:noFill/>
@@ -22582,7 +22582,7 @@
             <a:r>
               <a:rPr sz="850" b="1" i="0">
                 <a:solidFill>
-                  <a:srgbClr val="C8102E"/>
+                  <a:srgbClr val="DA291C"/>
                 </a:solidFill>
                 <a:latin typeface="Calibri"/>
               </a:rPr>
@@ -22686,7 +22686,7 @@
             <a:avLst/>
           </a:prstGeom>
           <a:solidFill>
-            <a:srgbClr val="C8102E"/>
+            <a:srgbClr val="DA291C"/>
           </a:solidFill>
           <a:ln>
             <a:noFill/>
@@ -22775,7 +22775,7 @@
             <a:r>
               <a:rPr sz="850" b="1" i="0">
                 <a:solidFill>
-                  <a:srgbClr val="C8102E"/>
+                  <a:srgbClr val="DA291C"/>
                 </a:solidFill>
                 <a:latin typeface="Calibri"/>
               </a:rPr>
@@ -22879,7 +22879,7 @@
             <a:avLst/>
           </a:prstGeom>
           <a:solidFill>
-            <a:srgbClr val="C8102E"/>
+            <a:srgbClr val="DA291C"/>
           </a:solidFill>
           <a:ln>
             <a:noFill/>
@@ -22968,7 +22968,7 @@
             <a:r>
               <a:rPr sz="850" b="1" i="0">
                 <a:solidFill>
-                  <a:srgbClr val="C8102E"/>
+                  <a:srgbClr val="DA291C"/>
                 </a:solidFill>
                 <a:latin typeface="Calibri"/>
               </a:rPr>

--- a/Santander_Architecture.pptx
+++ b/Santander_Architecture.pptx
@@ -3230,14 +3230,84 @@
       </p:sp>
       <p:sp>
         <p:nvSpPr>
-          <p:cNvPr id="5" name="Rectangle 4"/>
+          <p:cNvPr id="6" name="TextBox 5"/>
+          <p:cNvSpPr txBox="1"/>
+          <p:nvPr/>
+        </p:nvSpPr>
+        <p:spPr>
+          <a:xfrm>
+            <a:off x="502920" y="1783080"/>
+            <a:ext cx="10058400" cy="822960"/>
+          </a:xfrm>
+          <a:prstGeom prst="rect">
+            <a:avLst/>
+          </a:prstGeom>
+          <a:noFill/>
+        </p:spPr>
+        <p:txBody>
+          <a:bodyPr wrap="square">
+            <a:noAutofit/>
+          </a:bodyPr>
+          <a:lstStyle/>
+          <a:p>
+            <a:pPr algn="l"/>
+            <a:r>
+              <a:rPr sz="5000" b="1" i="0">
+                <a:solidFill>
+                  <a:srgbClr val="FFFFFF"/>
+                </a:solidFill>
+                <a:latin typeface="Calibri"/>
+              </a:rPr>
+              <a:t>Architecture Report</a:t>
+            </a:r>
+          </a:p>
+        </p:txBody>
+      </p:sp>
+      <p:sp>
+        <p:nvSpPr>
+          <p:cNvPr id="7" name="TextBox 6"/>
+          <p:cNvSpPr txBox="1"/>
+          <p:nvPr/>
+        </p:nvSpPr>
+        <p:spPr>
+          <a:xfrm>
+            <a:off x="502920" y="2697480"/>
+            <a:ext cx="10058400" cy="502920"/>
+          </a:xfrm>
+          <a:prstGeom prst="rect">
+            <a:avLst/>
+          </a:prstGeom>
+          <a:noFill/>
+        </p:spPr>
+        <p:txBody>
+          <a:bodyPr wrap="square">
+            <a:noAutofit/>
+          </a:bodyPr>
+          <a:lstStyle/>
+          <a:p>
+            <a:pPr algn="l"/>
+            <a:r>
+              <a:rPr sz="2200" b="0" i="0">
+                <a:solidFill>
+                  <a:srgbClr val="FECACA"/>
+                </a:solidFill>
+                <a:latin typeface="Calibri"/>
+              </a:rPr>
+              <a:t>Santander Business Banking Prototype</a:t>
+            </a:r>
+          </a:p>
+        </p:txBody>
+      </p:sp>
+      <p:sp>
+        <p:nvSpPr>
+          <p:cNvPr id="8" name="Rectangle 7"/>
           <p:cNvSpPr/>
           <p:nvPr/>
         </p:nvSpPr>
         <p:spPr>
           <a:xfrm>
-            <a:off x="502920" y="1188720"/>
-            <a:ext cx="457200" cy="457200"/>
+            <a:off x="502920" y="3310128"/>
+            <a:ext cx="7772400" cy="36576"/>
           </a:xfrm>
           <a:prstGeom prst="rect">
             <a:avLst/>
@@ -3273,90 +3343,20 @@
       </p:sp>
       <p:sp>
         <p:nvSpPr>
-          <p:cNvPr id="6" name="TextBox 5"/>
-          <p:cNvSpPr txBox="1"/>
-          <p:nvPr/>
-        </p:nvSpPr>
-        <p:spPr>
-          <a:xfrm>
-            <a:off x="502920" y="1783080"/>
-            <a:ext cx="10058400" cy="822960"/>
-          </a:xfrm>
-          <a:prstGeom prst="rect">
-            <a:avLst/>
-          </a:prstGeom>
-          <a:noFill/>
-        </p:spPr>
-        <p:txBody>
-          <a:bodyPr wrap="square">
-            <a:noAutofit/>
-          </a:bodyPr>
-          <a:lstStyle/>
-          <a:p>
-            <a:pPr algn="l"/>
-            <a:r>
-              <a:rPr sz="5000" b="1" i="0">
-                <a:solidFill>
-                  <a:srgbClr val="FFFFFF"/>
-                </a:solidFill>
-                <a:latin typeface="Calibri"/>
-              </a:rPr>
-              <a:t>Architecture Report</a:t>
-            </a:r>
-          </a:p>
-        </p:txBody>
-      </p:sp>
-      <p:sp>
-        <p:nvSpPr>
-          <p:cNvPr id="7" name="TextBox 6"/>
-          <p:cNvSpPr txBox="1"/>
-          <p:nvPr/>
-        </p:nvSpPr>
-        <p:spPr>
-          <a:xfrm>
-            <a:off x="502920" y="2697480"/>
-            <a:ext cx="10058400" cy="502920"/>
-          </a:xfrm>
-          <a:prstGeom prst="rect">
-            <a:avLst/>
-          </a:prstGeom>
-          <a:noFill/>
-        </p:spPr>
-        <p:txBody>
-          <a:bodyPr wrap="square">
-            <a:noAutofit/>
-          </a:bodyPr>
-          <a:lstStyle/>
-          <a:p>
-            <a:pPr algn="l"/>
-            <a:r>
-              <a:rPr sz="2200" b="0" i="0">
-                <a:solidFill>
-                  <a:srgbClr val="FECACA"/>
-                </a:solidFill>
-                <a:latin typeface="Calibri"/>
-              </a:rPr>
-              <a:t>Santander Business Banking Prototype</a:t>
-            </a:r>
-          </a:p>
-        </p:txBody>
-      </p:sp>
-      <p:sp>
-        <p:nvSpPr>
-          <p:cNvPr id="8" name="Rectangle 7"/>
+          <p:cNvPr id="9" name="Rectangle 8"/>
           <p:cNvSpPr/>
           <p:nvPr/>
         </p:nvSpPr>
         <p:spPr>
           <a:xfrm>
-            <a:off x="502920" y="3310128"/>
-            <a:ext cx="7772400" cy="36576"/>
-          </a:xfrm>
-          <a:prstGeom prst="rect">
-            <a:avLst/>
-          </a:prstGeom>
-          <a:solidFill>
-            <a:srgbClr val="DA291C"/>
+            <a:off x="502920" y="3520440"/>
+            <a:ext cx="2286000" cy="822960"/>
+          </a:xfrm>
+          <a:prstGeom prst="rect">
+            <a:avLst/>
+          </a:prstGeom>
+          <a:solidFill>
+            <a:srgbClr val="44403C"/>
           </a:solidFill>
           <a:ln>
             <a:noFill/>
@@ -3386,20 +3386,20 @@
       </p:sp>
       <p:sp>
         <p:nvSpPr>
-          <p:cNvPr id="9" name="Rectangle 8"/>
+          <p:cNvPr id="10" name="Rectangle 9"/>
           <p:cNvSpPr/>
           <p:nvPr/>
         </p:nvSpPr>
         <p:spPr>
           <a:xfrm>
             <a:off x="502920" y="3520440"/>
-            <a:ext cx="2286000" cy="822960"/>
-          </a:xfrm>
-          <a:prstGeom prst="rect">
-            <a:avLst/>
-          </a:prstGeom>
-          <a:solidFill>
-            <a:srgbClr val="44403C"/>
+            <a:ext cx="2286000" cy="45720"/>
+          </a:xfrm>
+          <a:prstGeom prst="rect">
+            <a:avLst/>
+          </a:prstGeom>
+          <a:solidFill>
+            <a:srgbClr val="DA291C"/>
           </a:solidFill>
           <a:ln>
             <a:noFill/>
@@ -3429,20 +3429,90 @@
       </p:sp>
       <p:sp>
         <p:nvSpPr>
-          <p:cNvPr id="10" name="Rectangle 9"/>
+          <p:cNvPr id="11" name="TextBox 10"/>
+          <p:cNvSpPr txBox="1"/>
+          <p:nvPr/>
+        </p:nvSpPr>
+        <p:spPr>
+          <a:xfrm>
+            <a:off x="612648" y="3584448"/>
+            <a:ext cx="2103120" cy="457200"/>
+          </a:xfrm>
+          <a:prstGeom prst="rect">
+            <a:avLst/>
+          </a:prstGeom>
+          <a:noFill/>
+        </p:spPr>
+        <p:txBody>
+          <a:bodyPr wrap="square">
+            <a:noAutofit/>
+          </a:bodyPr>
+          <a:lstStyle/>
+          <a:p>
+            <a:pPr algn="l"/>
+            <a:r>
+              <a:rPr sz="2400" b="1" i="0">
+                <a:solidFill>
+                  <a:srgbClr val="FFFFFF"/>
+                </a:solidFill>
+                <a:latin typeface="Calibri"/>
+              </a:rPr>
+              <a:t>5,700</a:t>
+            </a:r>
+          </a:p>
+        </p:txBody>
+      </p:sp>
+      <p:sp>
+        <p:nvSpPr>
+          <p:cNvPr id="12" name="TextBox 11"/>
+          <p:cNvSpPr txBox="1"/>
+          <p:nvPr/>
+        </p:nvSpPr>
+        <p:spPr>
+          <a:xfrm>
+            <a:off x="630936" y="4041648"/>
+            <a:ext cx="2011680" cy="256032"/>
+          </a:xfrm>
+          <a:prstGeom prst="rect">
+            <a:avLst/>
+          </a:prstGeom>
+          <a:noFill/>
+        </p:spPr>
+        <p:txBody>
+          <a:bodyPr wrap="square">
+            <a:noAutofit/>
+          </a:bodyPr>
+          <a:lstStyle/>
+          <a:p>
+            <a:pPr algn="l"/>
+            <a:r>
+              <a:rPr sz="900" b="0" i="0">
+                <a:solidFill>
+                  <a:srgbClr val="D6D3D1"/>
+                </a:solidFill>
+                <a:latin typeface="Calibri"/>
+              </a:rPr>
+              <a:t>lines · 1 file</a:t>
+            </a:r>
+          </a:p>
+        </p:txBody>
+      </p:sp>
+      <p:sp>
+        <p:nvSpPr>
+          <p:cNvPr id="13" name="Rectangle 12"/>
           <p:cNvSpPr/>
           <p:nvPr/>
         </p:nvSpPr>
         <p:spPr>
           <a:xfrm>
-            <a:off x="502920" y="3520440"/>
-            <a:ext cx="2286000" cy="45720"/>
-          </a:xfrm>
-          <a:prstGeom prst="rect">
-            <a:avLst/>
-          </a:prstGeom>
-          <a:solidFill>
-            <a:srgbClr val="DA291C"/>
+            <a:off x="2971800" y="3520440"/>
+            <a:ext cx="2286000" cy="822960"/>
+          </a:xfrm>
+          <a:prstGeom prst="rect">
+            <a:avLst/>
+          </a:prstGeom>
+          <a:solidFill>
+            <a:srgbClr val="44403C"/>
           </a:solidFill>
           <a:ln>
             <a:noFill/>
@@ -3472,90 +3542,20 @@
       </p:sp>
       <p:sp>
         <p:nvSpPr>
-          <p:cNvPr id="11" name="TextBox 10"/>
-          <p:cNvSpPr txBox="1"/>
-          <p:nvPr/>
-        </p:nvSpPr>
-        <p:spPr>
-          <a:xfrm>
-            <a:off x="612648" y="3584448"/>
-            <a:ext cx="2103120" cy="457200"/>
-          </a:xfrm>
-          <a:prstGeom prst="rect">
-            <a:avLst/>
-          </a:prstGeom>
-          <a:noFill/>
-        </p:spPr>
-        <p:txBody>
-          <a:bodyPr wrap="square">
-            <a:noAutofit/>
-          </a:bodyPr>
-          <a:lstStyle/>
-          <a:p>
-            <a:pPr algn="l"/>
-            <a:r>
-              <a:rPr sz="2400" b="1" i="0">
-                <a:solidFill>
-                  <a:srgbClr val="FFFFFF"/>
-                </a:solidFill>
-                <a:latin typeface="Calibri"/>
-              </a:rPr>
-              <a:t>5,700</a:t>
-            </a:r>
-          </a:p>
-        </p:txBody>
-      </p:sp>
-      <p:sp>
-        <p:nvSpPr>
-          <p:cNvPr id="12" name="TextBox 11"/>
-          <p:cNvSpPr txBox="1"/>
-          <p:nvPr/>
-        </p:nvSpPr>
-        <p:spPr>
-          <a:xfrm>
-            <a:off x="630936" y="4041648"/>
-            <a:ext cx="2011680" cy="256032"/>
-          </a:xfrm>
-          <a:prstGeom prst="rect">
-            <a:avLst/>
-          </a:prstGeom>
-          <a:noFill/>
-        </p:spPr>
-        <p:txBody>
-          <a:bodyPr wrap="square">
-            <a:noAutofit/>
-          </a:bodyPr>
-          <a:lstStyle/>
-          <a:p>
-            <a:pPr algn="l"/>
-            <a:r>
-              <a:rPr sz="900" b="0" i="0">
-                <a:solidFill>
-                  <a:srgbClr val="D6D3D1"/>
-                </a:solidFill>
-                <a:latin typeface="Calibri"/>
-              </a:rPr>
-              <a:t>lines · 1 file</a:t>
-            </a:r>
-          </a:p>
-        </p:txBody>
-      </p:sp>
-      <p:sp>
-        <p:nvSpPr>
-          <p:cNvPr id="13" name="Rectangle 12"/>
+          <p:cNvPr id="14" name="Rectangle 13"/>
           <p:cNvSpPr/>
           <p:nvPr/>
         </p:nvSpPr>
         <p:spPr>
           <a:xfrm>
             <a:off x="2971800" y="3520440"/>
-            <a:ext cx="2286000" cy="822960"/>
-          </a:xfrm>
-          <a:prstGeom prst="rect">
-            <a:avLst/>
-          </a:prstGeom>
-          <a:solidFill>
-            <a:srgbClr val="44403C"/>
+            <a:ext cx="2286000" cy="45720"/>
+          </a:xfrm>
+          <a:prstGeom prst="rect">
+            <a:avLst/>
+          </a:prstGeom>
+          <a:solidFill>
+            <a:srgbClr val="DA291C"/>
           </a:solidFill>
           <a:ln>
             <a:noFill/>
@@ -3585,20 +3585,90 @@
       </p:sp>
       <p:sp>
         <p:nvSpPr>
-          <p:cNvPr id="14" name="Rectangle 13"/>
+          <p:cNvPr id="15" name="TextBox 14"/>
+          <p:cNvSpPr txBox="1"/>
+          <p:nvPr/>
+        </p:nvSpPr>
+        <p:spPr>
+          <a:xfrm>
+            <a:off x="3081528" y="3584448"/>
+            <a:ext cx="2103120" cy="457200"/>
+          </a:xfrm>
+          <a:prstGeom prst="rect">
+            <a:avLst/>
+          </a:prstGeom>
+          <a:noFill/>
+        </p:spPr>
+        <p:txBody>
+          <a:bodyPr wrap="square">
+            <a:noAutofit/>
+          </a:bodyPr>
+          <a:lstStyle/>
+          <a:p>
+            <a:pPr algn="l"/>
+            <a:r>
+              <a:rPr sz="2400" b="1" i="0">
+                <a:solidFill>
+                  <a:srgbClr val="FFFFFF"/>
+                </a:solidFill>
+                <a:latin typeface="Calibri"/>
+              </a:rPr>
+              <a:t>12</a:t>
+            </a:r>
+          </a:p>
+        </p:txBody>
+      </p:sp>
+      <p:sp>
+        <p:nvSpPr>
+          <p:cNvPr id="16" name="TextBox 15"/>
+          <p:cNvSpPr txBox="1"/>
+          <p:nvPr/>
+        </p:nvSpPr>
+        <p:spPr>
+          <a:xfrm>
+            <a:off x="3099816" y="4041648"/>
+            <a:ext cx="2011680" cy="256032"/>
+          </a:xfrm>
+          <a:prstGeom prst="rect">
+            <a:avLst/>
+          </a:prstGeom>
+          <a:noFill/>
+        </p:spPr>
+        <p:txBody>
+          <a:bodyPr wrap="square">
+            <a:noAutofit/>
+          </a:bodyPr>
+          <a:lstStyle/>
+          <a:p>
+            <a:pPr algn="l"/>
+            <a:r>
+              <a:rPr sz="900" b="0" i="0">
+                <a:solidFill>
+                  <a:srgbClr val="D6D3D1"/>
+                </a:solidFill>
+                <a:latin typeface="Calibri"/>
+              </a:rPr>
+              <a:t>workflows</a:t>
+            </a:r>
+          </a:p>
+        </p:txBody>
+      </p:sp>
+      <p:sp>
+        <p:nvSpPr>
+          <p:cNvPr id="17" name="Rectangle 16"/>
           <p:cNvSpPr/>
           <p:nvPr/>
         </p:nvSpPr>
         <p:spPr>
           <a:xfrm>
-            <a:off x="2971800" y="3520440"/>
-            <a:ext cx="2286000" cy="45720"/>
-          </a:xfrm>
-          <a:prstGeom prst="rect">
-            <a:avLst/>
-          </a:prstGeom>
-          <a:solidFill>
-            <a:srgbClr val="DA291C"/>
+            <a:off x="5440680" y="3520440"/>
+            <a:ext cx="2286000" cy="822960"/>
+          </a:xfrm>
+          <a:prstGeom prst="rect">
+            <a:avLst/>
+          </a:prstGeom>
+          <a:solidFill>
+            <a:srgbClr val="44403C"/>
           </a:solidFill>
           <a:ln>
             <a:noFill/>
@@ -3628,90 +3698,20 @@
       </p:sp>
       <p:sp>
         <p:nvSpPr>
-          <p:cNvPr id="15" name="TextBox 14"/>
-          <p:cNvSpPr txBox="1"/>
-          <p:nvPr/>
-        </p:nvSpPr>
-        <p:spPr>
-          <a:xfrm>
-            <a:off x="3081528" y="3584448"/>
-            <a:ext cx="2103120" cy="457200"/>
-          </a:xfrm>
-          <a:prstGeom prst="rect">
-            <a:avLst/>
-          </a:prstGeom>
-          <a:noFill/>
-        </p:spPr>
-        <p:txBody>
-          <a:bodyPr wrap="square">
-            <a:noAutofit/>
-          </a:bodyPr>
-          <a:lstStyle/>
-          <a:p>
-            <a:pPr algn="l"/>
-            <a:r>
-              <a:rPr sz="2400" b="1" i="0">
-                <a:solidFill>
-                  <a:srgbClr val="FFFFFF"/>
-                </a:solidFill>
-                <a:latin typeface="Calibri"/>
-              </a:rPr>
-              <a:t>12</a:t>
-            </a:r>
-          </a:p>
-        </p:txBody>
-      </p:sp>
-      <p:sp>
-        <p:nvSpPr>
-          <p:cNvPr id="16" name="TextBox 15"/>
-          <p:cNvSpPr txBox="1"/>
-          <p:nvPr/>
-        </p:nvSpPr>
-        <p:spPr>
-          <a:xfrm>
-            <a:off x="3099816" y="4041648"/>
-            <a:ext cx="2011680" cy="256032"/>
-          </a:xfrm>
-          <a:prstGeom prst="rect">
-            <a:avLst/>
-          </a:prstGeom>
-          <a:noFill/>
-        </p:spPr>
-        <p:txBody>
-          <a:bodyPr wrap="square">
-            <a:noAutofit/>
-          </a:bodyPr>
-          <a:lstStyle/>
-          <a:p>
-            <a:pPr algn="l"/>
-            <a:r>
-              <a:rPr sz="900" b="0" i="0">
-                <a:solidFill>
-                  <a:srgbClr val="D6D3D1"/>
-                </a:solidFill>
-                <a:latin typeface="Calibri"/>
-              </a:rPr>
-              <a:t>workflows</a:t>
-            </a:r>
-          </a:p>
-        </p:txBody>
-      </p:sp>
-      <p:sp>
-        <p:nvSpPr>
-          <p:cNvPr id="17" name="Rectangle 16"/>
+          <p:cNvPr id="18" name="Rectangle 17"/>
           <p:cNvSpPr/>
           <p:nvPr/>
         </p:nvSpPr>
         <p:spPr>
           <a:xfrm>
             <a:off x="5440680" y="3520440"/>
-            <a:ext cx="2286000" cy="822960"/>
-          </a:xfrm>
-          <a:prstGeom prst="rect">
-            <a:avLst/>
-          </a:prstGeom>
-          <a:solidFill>
-            <a:srgbClr val="44403C"/>
+            <a:ext cx="2286000" cy="45720"/>
+          </a:xfrm>
+          <a:prstGeom prst="rect">
+            <a:avLst/>
+          </a:prstGeom>
+          <a:solidFill>
+            <a:srgbClr val="DA291C"/>
           </a:solidFill>
           <a:ln>
             <a:noFill/>
@@ -3741,20 +3741,90 @@
       </p:sp>
       <p:sp>
         <p:nvSpPr>
-          <p:cNvPr id="18" name="Rectangle 17"/>
+          <p:cNvPr id="19" name="TextBox 18"/>
+          <p:cNvSpPr txBox="1"/>
+          <p:nvPr/>
+        </p:nvSpPr>
+        <p:spPr>
+          <a:xfrm>
+            <a:off x="5550408" y="3584448"/>
+            <a:ext cx="2103120" cy="457200"/>
+          </a:xfrm>
+          <a:prstGeom prst="rect">
+            <a:avLst/>
+          </a:prstGeom>
+          <a:noFill/>
+        </p:spPr>
+        <p:txBody>
+          <a:bodyPr wrap="square">
+            <a:noAutofit/>
+          </a:bodyPr>
+          <a:lstStyle/>
+          <a:p>
+            <a:pPr algn="l"/>
+            <a:r>
+              <a:rPr sz="2400" b="1" i="0">
+                <a:solidFill>
+                  <a:srgbClr val="FFFFFF"/>
+                </a:solidFill>
+                <a:latin typeface="Calibri"/>
+              </a:rPr>
+              <a:t>7</a:t>
+            </a:r>
+          </a:p>
+        </p:txBody>
+      </p:sp>
+      <p:sp>
+        <p:nvSpPr>
+          <p:cNvPr id="20" name="TextBox 19"/>
+          <p:cNvSpPr txBox="1"/>
+          <p:nvPr/>
+        </p:nvSpPr>
+        <p:spPr>
+          <a:xfrm>
+            <a:off x="5568696" y="4041648"/>
+            <a:ext cx="2011680" cy="256032"/>
+          </a:xfrm>
+          <a:prstGeom prst="rect">
+            <a:avLst/>
+          </a:prstGeom>
+          <a:noFill/>
+        </p:spPr>
+        <p:txBody>
+          <a:bodyPr wrap="square">
+            <a:noAutofit/>
+          </a:bodyPr>
+          <a:lstStyle/>
+          <a:p>
+            <a:pPr algn="l"/>
+            <a:r>
+              <a:rPr sz="900" b="0" i="0">
+                <a:solidFill>
+                  <a:srgbClr val="D6D3D1"/>
+                </a:solidFill>
+                <a:latin typeface="Calibri"/>
+              </a:rPr>
+              <a:t>entity types</a:t>
+            </a:r>
+          </a:p>
+        </p:txBody>
+      </p:sp>
+      <p:sp>
+        <p:nvSpPr>
+          <p:cNvPr id="21" name="Rectangle 20"/>
           <p:cNvSpPr/>
           <p:nvPr/>
         </p:nvSpPr>
         <p:spPr>
           <a:xfrm>
-            <a:off x="5440680" y="3520440"/>
-            <a:ext cx="2286000" cy="45720"/>
-          </a:xfrm>
-          <a:prstGeom prst="rect">
-            <a:avLst/>
-          </a:prstGeom>
-          <a:solidFill>
-            <a:srgbClr val="DA291C"/>
+            <a:off x="7909560" y="3520440"/>
+            <a:ext cx="2286000" cy="822960"/>
+          </a:xfrm>
+          <a:prstGeom prst="rect">
+            <a:avLst/>
+          </a:prstGeom>
+          <a:solidFill>
+            <a:srgbClr val="44403C"/>
           </a:solidFill>
           <a:ln>
             <a:noFill/>
@@ -3784,90 +3854,20 @@
       </p:sp>
       <p:sp>
         <p:nvSpPr>
-          <p:cNvPr id="19" name="TextBox 18"/>
-          <p:cNvSpPr txBox="1"/>
-          <p:nvPr/>
-        </p:nvSpPr>
-        <p:spPr>
-          <a:xfrm>
-            <a:off x="5550408" y="3584448"/>
-            <a:ext cx="2103120" cy="457200"/>
-          </a:xfrm>
-          <a:prstGeom prst="rect">
-            <a:avLst/>
-          </a:prstGeom>
-          <a:noFill/>
-        </p:spPr>
-        <p:txBody>
-          <a:bodyPr wrap="square">
-            <a:noAutofit/>
-          </a:bodyPr>
-          <a:lstStyle/>
-          <a:p>
-            <a:pPr algn="l"/>
-            <a:r>
-              <a:rPr sz="2400" b="1" i="0">
-                <a:solidFill>
-                  <a:srgbClr val="FFFFFF"/>
-                </a:solidFill>
-                <a:latin typeface="Calibri"/>
-              </a:rPr>
-              <a:t>7</a:t>
-            </a:r>
-          </a:p>
-        </p:txBody>
-      </p:sp>
-      <p:sp>
-        <p:nvSpPr>
-          <p:cNvPr id="20" name="TextBox 19"/>
-          <p:cNvSpPr txBox="1"/>
-          <p:nvPr/>
-        </p:nvSpPr>
-        <p:spPr>
-          <a:xfrm>
-            <a:off x="5568696" y="4041648"/>
-            <a:ext cx="2011680" cy="256032"/>
-          </a:xfrm>
-          <a:prstGeom prst="rect">
-            <a:avLst/>
-          </a:prstGeom>
-          <a:noFill/>
-        </p:spPr>
-        <p:txBody>
-          <a:bodyPr wrap="square">
-            <a:noAutofit/>
-          </a:bodyPr>
-          <a:lstStyle/>
-          <a:p>
-            <a:pPr algn="l"/>
-            <a:r>
-              <a:rPr sz="900" b="0" i="0">
-                <a:solidFill>
-                  <a:srgbClr val="D6D3D1"/>
-                </a:solidFill>
-                <a:latin typeface="Calibri"/>
-              </a:rPr>
-              <a:t>entity types</a:t>
-            </a:r>
-          </a:p>
-        </p:txBody>
-      </p:sp>
-      <p:sp>
-        <p:nvSpPr>
-          <p:cNvPr id="21" name="Rectangle 20"/>
+          <p:cNvPr id="22" name="Rectangle 21"/>
           <p:cNvSpPr/>
           <p:nvPr/>
         </p:nvSpPr>
         <p:spPr>
           <a:xfrm>
             <a:off x="7909560" y="3520440"/>
-            <a:ext cx="2286000" cy="822960"/>
-          </a:xfrm>
-          <a:prstGeom prst="rect">
-            <a:avLst/>
-          </a:prstGeom>
-          <a:solidFill>
-            <a:srgbClr val="44403C"/>
+            <a:ext cx="2286000" cy="45720"/>
+          </a:xfrm>
+          <a:prstGeom prst="rect">
+            <a:avLst/>
+          </a:prstGeom>
+          <a:solidFill>
+            <a:srgbClr val="DA291C"/>
           </a:solidFill>
           <a:ln>
             <a:noFill/>
@@ -3897,14 +3897,154 @@
       </p:sp>
       <p:sp>
         <p:nvSpPr>
-          <p:cNvPr id="22" name="Rectangle 21"/>
+          <p:cNvPr id="23" name="TextBox 22"/>
+          <p:cNvSpPr txBox="1"/>
+          <p:nvPr/>
+        </p:nvSpPr>
+        <p:spPr>
+          <a:xfrm>
+            <a:off x="8019288" y="3584448"/>
+            <a:ext cx="2103120" cy="457200"/>
+          </a:xfrm>
+          <a:prstGeom prst="rect">
+            <a:avLst/>
+          </a:prstGeom>
+          <a:noFill/>
+        </p:spPr>
+        <p:txBody>
+          <a:bodyPr wrap="square">
+            <a:noAutofit/>
+          </a:bodyPr>
+          <a:lstStyle/>
+          <a:p>
+            <a:pPr algn="l"/>
+            <a:r>
+              <a:rPr sz="2400" b="1" i="0">
+                <a:solidFill>
+                  <a:srgbClr val="FFFFFF"/>
+                </a:solidFill>
+                <a:latin typeface="Calibri"/>
+              </a:rPr>
+              <a:t>16:9</a:t>
+            </a:r>
+          </a:p>
+        </p:txBody>
+      </p:sp>
+      <p:sp>
+        <p:nvSpPr>
+          <p:cNvPr id="24" name="TextBox 23"/>
+          <p:cNvSpPr txBox="1"/>
+          <p:nvPr/>
+        </p:nvSpPr>
+        <p:spPr>
+          <a:xfrm>
+            <a:off x="8037576" y="4041648"/>
+            <a:ext cx="2011680" cy="256032"/>
+          </a:xfrm>
+          <a:prstGeom prst="rect">
+            <a:avLst/>
+          </a:prstGeom>
+          <a:noFill/>
+        </p:spPr>
+        <p:txBody>
+          <a:bodyPr wrap="square">
+            <a:noAutofit/>
+          </a:bodyPr>
+          <a:lstStyle/>
+          <a:p>
+            <a:pPr algn="l"/>
+            <a:r>
+              <a:rPr sz="900" b="0" i="0">
+                <a:solidFill>
+                  <a:srgbClr val="D6D3D1"/>
+                </a:solidFill>
+                <a:latin typeface="Calibri"/>
+              </a:rPr>
+              <a:t>deck</a:t>
+            </a:r>
+          </a:p>
+        </p:txBody>
+      </p:sp>
+      <p:sp>
+        <p:nvSpPr>
+          <p:cNvPr id="25" name="TextBox 24"/>
+          <p:cNvSpPr txBox="1"/>
+          <p:nvPr/>
+        </p:nvSpPr>
+        <p:spPr>
+          <a:xfrm>
+            <a:off x="502920" y="4617720"/>
+            <a:ext cx="10515600" cy="365760"/>
+          </a:xfrm>
+          <a:prstGeom prst="rect">
+            <a:avLst/>
+          </a:prstGeom>
+          <a:noFill/>
+        </p:spPr>
+        <p:txBody>
+          <a:bodyPr wrap="square">
+            <a:noAutofit/>
+          </a:bodyPr>
+          <a:lstStyle/>
+          <a:p>
+            <a:pPr algn="l"/>
+            <a:r>
+              <a:rPr sz="1100" b="0" i="1">
+                <a:solidFill>
+                  <a:srgbClr val="D6D3D1"/>
+                </a:solidFill>
+                <a:latin typeface="Calibri"/>
+              </a:rPr>
+              <a:t>Technical deep-dive  ·  single-file React architecture  ·  state model  ·  entity &amp; mandate logic  ·  design system</a:t>
+            </a:r>
+          </a:p>
+        </p:txBody>
+      </p:sp>
+      <p:sp>
+        <p:nvSpPr>
+          <p:cNvPr id="26" name="TextBox 25"/>
+          <p:cNvSpPr txBox="1"/>
+          <p:nvPr/>
+        </p:nvSpPr>
+        <p:spPr>
+          <a:xfrm>
+            <a:off x="502920" y="6446520"/>
+            <a:ext cx="10058400" cy="310896"/>
+          </a:xfrm>
+          <a:prstGeom prst="rect">
+            <a:avLst/>
+          </a:prstGeom>
+          <a:noFill/>
+        </p:spPr>
+        <p:txBody>
+          <a:bodyPr wrap="square">
+            <a:noAutofit/>
+          </a:bodyPr>
+          <a:lstStyle/>
+          <a:p>
+            <a:pPr algn="l"/>
+            <a:r>
+              <a:rPr sz="1000" b="0" i="0">
+                <a:solidFill>
+                  <a:srgbClr val="FECACA"/>
+                </a:solidFill>
+                <a:latin typeface="Calibri"/>
+              </a:rPr>
+              <a:t>Alan Davidson  ·  Business Banking Advisor  ·  Self-initiated  ·  June 2026</a:t>
+            </a:r>
+          </a:p>
+        </p:txBody>
+      </p:sp>
+      <p:sp>
+        <p:nvSpPr>
+          <p:cNvPr id="27" name="Rectangle 26"/>
           <p:cNvSpPr/>
           <p:nvPr/>
         </p:nvSpPr>
         <p:spPr>
           <a:xfrm>
-            <a:off x="7909560" y="3520440"/>
-            <a:ext cx="2286000" cy="45720"/>
+            <a:off x="10012680" y="274320"/>
+            <a:ext cx="1783080" cy="310896"/>
           </a:xfrm>
           <a:prstGeom prst="rect">
             <a:avLst/>
@@ -3940,189 +4080,6 @@
       </p:sp>
       <p:sp>
         <p:nvSpPr>
-          <p:cNvPr id="23" name="TextBox 22"/>
-          <p:cNvSpPr txBox="1"/>
-          <p:nvPr/>
-        </p:nvSpPr>
-        <p:spPr>
-          <a:xfrm>
-            <a:off x="8019288" y="3584448"/>
-            <a:ext cx="2103120" cy="457200"/>
-          </a:xfrm>
-          <a:prstGeom prst="rect">
-            <a:avLst/>
-          </a:prstGeom>
-          <a:noFill/>
-        </p:spPr>
-        <p:txBody>
-          <a:bodyPr wrap="square">
-            <a:noAutofit/>
-          </a:bodyPr>
-          <a:lstStyle/>
-          <a:p>
-            <a:pPr algn="l"/>
-            <a:r>
-              <a:rPr sz="2400" b="1" i="0">
-                <a:solidFill>
-                  <a:srgbClr val="FFFFFF"/>
-                </a:solidFill>
-                <a:latin typeface="Calibri"/>
-              </a:rPr>
-              <a:t>16:9</a:t>
-            </a:r>
-          </a:p>
-        </p:txBody>
-      </p:sp>
-      <p:sp>
-        <p:nvSpPr>
-          <p:cNvPr id="24" name="TextBox 23"/>
-          <p:cNvSpPr txBox="1"/>
-          <p:nvPr/>
-        </p:nvSpPr>
-        <p:spPr>
-          <a:xfrm>
-            <a:off x="8037576" y="4041648"/>
-            <a:ext cx="2011680" cy="256032"/>
-          </a:xfrm>
-          <a:prstGeom prst="rect">
-            <a:avLst/>
-          </a:prstGeom>
-          <a:noFill/>
-        </p:spPr>
-        <p:txBody>
-          <a:bodyPr wrap="square">
-            <a:noAutofit/>
-          </a:bodyPr>
-          <a:lstStyle/>
-          <a:p>
-            <a:pPr algn="l"/>
-            <a:r>
-              <a:rPr sz="900" b="0" i="0">
-                <a:solidFill>
-                  <a:srgbClr val="D6D3D1"/>
-                </a:solidFill>
-                <a:latin typeface="Calibri"/>
-              </a:rPr>
-              <a:t>deck</a:t>
-            </a:r>
-          </a:p>
-        </p:txBody>
-      </p:sp>
-      <p:sp>
-        <p:nvSpPr>
-          <p:cNvPr id="25" name="TextBox 24"/>
-          <p:cNvSpPr txBox="1"/>
-          <p:nvPr/>
-        </p:nvSpPr>
-        <p:spPr>
-          <a:xfrm>
-            <a:off x="502920" y="4617720"/>
-            <a:ext cx="10515600" cy="365760"/>
-          </a:xfrm>
-          <a:prstGeom prst="rect">
-            <a:avLst/>
-          </a:prstGeom>
-          <a:noFill/>
-        </p:spPr>
-        <p:txBody>
-          <a:bodyPr wrap="square">
-            <a:noAutofit/>
-          </a:bodyPr>
-          <a:lstStyle/>
-          <a:p>
-            <a:pPr algn="l"/>
-            <a:r>
-              <a:rPr sz="1100" b="0" i="1">
-                <a:solidFill>
-                  <a:srgbClr val="D6D3D1"/>
-                </a:solidFill>
-                <a:latin typeface="Calibri"/>
-              </a:rPr>
-              <a:t>Technical deep-dive  ·  single-file React architecture  ·  state model  ·  entity &amp; mandate logic  ·  design system</a:t>
-            </a:r>
-          </a:p>
-        </p:txBody>
-      </p:sp>
-      <p:sp>
-        <p:nvSpPr>
-          <p:cNvPr id="26" name="TextBox 25"/>
-          <p:cNvSpPr txBox="1"/>
-          <p:nvPr/>
-        </p:nvSpPr>
-        <p:spPr>
-          <a:xfrm>
-            <a:off x="502920" y="6446520"/>
-            <a:ext cx="10058400" cy="310896"/>
-          </a:xfrm>
-          <a:prstGeom prst="rect">
-            <a:avLst/>
-          </a:prstGeom>
-          <a:noFill/>
-        </p:spPr>
-        <p:txBody>
-          <a:bodyPr wrap="square">
-            <a:noAutofit/>
-          </a:bodyPr>
-          <a:lstStyle/>
-          <a:p>
-            <a:pPr algn="l"/>
-            <a:r>
-              <a:rPr sz="1000" b="0" i="0">
-                <a:solidFill>
-                  <a:srgbClr val="FECACA"/>
-                </a:solidFill>
-                <a:latin typeface="Calibri"/>
-              </a:rPr>
-              <a:t>Alan Davidson  ·  Business Banking Advisor  ·  Self-initiated  ·  June 2026</a:t>
-            </a:r>
-          </a:p>
-        </p:txBody>
-      </p:sp>
-      <p:sp>
-        <p:nvSpPr>
-          <p:cNvPr id="27" name="Rectangle 26"/>
-          <p:cNvSpPr/>
-          <p:nvPr/>
-        </p:nvSpPr>
-        <p:spPr>
-          <a:xfrm>
-            <a:off x="10012680" y="274320"/>
-            <a:ext cx="1783080" cy="310896"/>
-          </a:xfrm>
-          <a:prstGeom prst="rect">
-            <a:avLst/>
-          </a:prstGeom>
-          <a:solidFill>
-            <a:srgbClr val="DA291C"/>
-          </a:solidFill>
-          <a:ln>
-            <a:noFill/>
-          </a:ln>
-        </p:spPr>
-        <p:style>
-          <a:lnRef idx="1">
-            <a:schemeClr val="accent1"/>
-          </a:lnRef>
-          <a:fillRef idx="3">
-            <a:schemeClr val="accent1"/>
-          </a:fillRef>
-          <a:effectRef idx="2">
-            <a:schemeClr val="accent1"/>
-          </a:effectRef>
-          <a:fontRef idx="minor">
-            <a:schemeClr val="lt1"/>
-          </a:fontRef>
-        </p:style>
-        <p:txBody>
-          <a:bodyPr rtlCol="0" anchor="ctr"/>
-          <a:lstStyle/>
-          <a:p>
-            <a:pPr algn="ctr"/>
-          </a:p>
-        </p:txBody>
-      </p:sp>
-      <p:sp>
-        <p:nvSpPr>
           <p:cNvPr id="28" name="TextBox 27"/>
           <p:cNvSpPr txBox="1"/>
           <p:nvPr/>
@@ -4156,6 +4113,30 @@
           </a:p>
         </p:txBody>
       </p:sp>
+      <p:pic>
+        <p:nvPicPr>
+          <p:cNvPr id="29" name="Santander logo" descr="santander-logo-white.png"/>
+          <p:cNvPicPr>
+            <a:picLocks noChangeAspect="1"/>
+          </p:cNvPicPr>
+          <p:nvPr/>
+        </p:nvPicPr>
+        <p:blipFill>
+          <a:blip r:embed="rId2"/>
+          <a:stretch>
+            <a:fillRect/>
+          </a:stretch>
+        </p:blipFill>
+        <p:spPr>
+          <a:xfrm>
+            <a:off x="502920" y="457200"/>
+            <a:ext cx="2377440" cy="411297"/>
+          </a:xfrm>
+          <a:prstGeom prst="rect">
+            <a:avLst/>
+          </a:prstGeom>
+        </p:spPr>
+      </p:pic>
     </p:spTree>
   </p:cSld>
   <p:clrMapOvr>

--- a/Santander_Architecture.pptx
+++ b/Santander_Architecture.pptx
@@ -3457,7 +3457,7 @@
                 </a:solidFill>
                 <a:latin typeface="Calibri"/>
               </a:rPr>
-              <a:t>5,700</a:t>
+              <a:t>7,400</a:t>
             </a:r>
           </a:p>
         </p:txBody>
@@ -9668,7 +9668,7 @@
                 </a:solidFill>
                 <a:latin typeface="Calibri"/>
               </a:rPr>
-              <a:t>5,700</a:t>
+              <a:t>7,400</a:t>
             </a:r>
           </a:p>
         </p:txBody>
@@ -15121,7 +15121,7 @@
                 </a:solidFill>
                 <a:latin typeface="Calibri"/>
               </a:rPr>
-              <a:t>null · closure · biz · mandate · wages · lending · fx ·</a:t>
+              <a:t>null · closure · biz · mandate · wages · lending</a:t>
             </a:r>
           </a:p>
           <a:p>
@@ -15137,7 +15137,23 @@
                 </a:solidFill>
                 <a:latin typeface="Calibri"/>
               </a:rPr>
-              <a:t>dormancy · unlink · ringfence · idcheck · mtd-submit · complaint</a:t>
+              <a:t>fx · dormancy · unlink · ringfence · idcheck · mtd-submit</a:t>
+            </a:r>
+          </a:p>
+          <a:p>
+            <a:pPr>
+              <a:spcAft>
+                <a:spcPts val="200"/>
+              </a:spcAft>
+            </a:pPr>
+            <a:r>
+              <a:rPr sz="1050">
+                <a:solidFill>
+                  <a:srgbClr val="1C1917"/>
+                </a:solidFill>
+                <a:latin typeface="Calibri"/>
+              </a:rPr>
+              <a:t>complaint · recurring · dispute · beneficiary · certificate · trusted</a:t>
             </a:r>
           </a:p>
         </p:txBody>

--- a/Santander_Architecture.pptx
+++ b/Santander_Architecture.pptx
@@ -4464,7 +4464,7 @@
                 </a:solidFill>
                 <a:latin typeface="Calibri"/>
               </a:rPr>
-              <a:t>#c8102e</a:t>
+              <a:t>#DA291C</a:t>
             </a:r>
           </a:p>
         </p:txBody>
@@ -5121,7 +5121,7 @@
                 </a:solidFill>
                 <a:latin typeface="Calibri"/>
               </a:rPr>
-              <a:t>Fraunces — display headings (Google Fonts). Geist — body. Geist Mono — account numbers and figures.</a:t>
+              <a:t>Santander Text — display + body (named family; Geist fallback). Geist Mono — account numbers and figures.</a:t>
             </a:r>
           </a:p>
         </p:txBody>
@@ -5445,7 +5445,7 @@
                 </a:solidFill>
                 <a:latin typeface="Calibri"/>
               </a:rPr>
-              <a:t>Exactly one bg-[#c8102e] or bg-stone-900 primary button per view — hierarchy stays clear.</a:t>
+              <a:t>Exactly one bg-[#DA291C] or bg-stone-900 primary button per view — hierarchy stays clear.</a:t>
             </a:r>
           </a:p>
         </p:txBody>

--- a/Santander_Architecture.pptx
+++ b/Santander_Architecture.pptx
@@ -20575,7 +20575,7 @@
                 </a:solidFill>
                 <a:latin typeface="Calibri"/>
               </a:rPr>
-              <a:t>12 STEP-BASED WIZARDS</a:t>
+              <a:t>17 STEP-BASED WIZARDS</a:t>
             </a:r>
           </a:p>
         </p:txBody>
@@ -20695,25 +20695,23 @@
       </p:sp>
       <p:sp>
         <p:nvSpPr>
-          <p:cNvPr id="8" name="Rectangle 7"/>
+          <p:cNvPr id="68" name="Rectangle 67"/>
           <p:cNvSpPr/>
           <p:nvPr/>
         </p:nvSpPr>
         <p:spPr>
           <a:xfrm>
-            <a:off x="457200" y="1371600"/>
-            <a:ext cx="3703320" cy="1024128"/>
-          </a:xfrm>
-          <a:prstGeom prst="rect">
-            <a:avLst/>
-          </a:prstGeom>
-          <a:solidFill>
-            <a:srgbClr val="FFFFFF"/>
-          </a:solidFill>
-          <a:ln w="9525">
-            <a:solidFill>
-              <a:srgbClr val="D6D3D1"/>
-            </a:solidFill>
+            <a:off x="0" y="6601968"/>
+            <a:ext cx="12188952" cy="256032"/>
+          </a:xfrm>
+          <a:prstGeom prst="rect">
+            <a:avLst/>
+          </a:prstGeom>
+          <a:solidFill>
+            <a:srgbClr val="1C1917"/>
+          </a:solidFill>
+          <a:ln>
+            <a:noFill/>
           </a:ln>
         </p:spPr>
         <p:style>
@@ -20740,24 +20738,130 @@
       </p:sp>
       <p:sp>
         <p:nvSpPr>
-          <p:cNvPr id="9" name="Rectangle 8"/>
+          <p:cNvPr id="69" name="TextBox 68"/>
+          <p:cNvSpPr txBox="1"/>
+          <p:nvPr/>
+        </p:nvSpPr>
+        <p:spPr>
+          <a:xfrm>
+            <a:off x="457200" y="6620256"/>
+            <a:ext cx="2743200" cy="201168"/>
+          </a:xfrm>
+          <a:prstGeom prst="rect">
+            <a:avLst/>
+          </a:prstGeom>
+          <a:noFill/>
+        </p:spPr>
+        <p:txBody>
+          <a:bodyPr wrap="square">
+            <a:noAutofit/>
+          </a:bodyPr>
+          <a:lstStyle/>
+          <a:p>
+            <a:pPr algn="l"/>
+            <a:r>
+              <a:rPr sz="800" b="1" i="0">
+                <a:solidFill>
+                  <a:srgbClr val="FECACA"/>
+                </a:solidFill>
+                <a:latin typeface="Calibri"/>
+              </a:rPr>
+              <a:t>INTERNAL · CONFIDENTIAL</a:t>
+            </a:r>
+          </a:p>
+        </p:txBody>
+      </p:sp>
+      <p:sp>
+        <p:nvSpPr>
+          <p:cNvPr id="70" name="TextBox 69"/>
+          <p:cNvSpPr txBox="1"/>
+          <p:nvPr/>
+        </p:nvSpPr>
+        <p:spPr>
+          <a:xfrm>
+            <a:off x="3200400" y="6620256"/>
+            <a:ext cx="7863840" cy="201168"/>
+          </a:xfrm>
+          <a:prstGeom prst="rect">
+            <a:avLst/>
+          </a:prstGeom>
+          <a:noFill/>
+        </p:spPr>
+        <p:txBody>
+          <a:bodyPr wrap="square">
+            <a:noAutofit/>
+          </a:bodyPr>
+          <a:lstStyle/>
+          <a:p>
+            <a:pPr algn="r"/>
+            <a:r>
+              <a:rPr sz="800" b="0" i="1">
+                <a:solidFill>
+                  <a:srgbClr val="D6D3D1"/>
+                </a:solidFill>
+                <a:latin typeface="Calibri"/>
+              </a:rPr>
+              <a:t>Alan Davidson · Business Banking Advisor · Self-initiated · Own time · June 2026</a:t>
+            </a:r>
+          </a:p>
+        </p:txBody>
+      </p:sp>
+      <p:sp>
+        <p:nvSpPr>
+          <p:cNvPr id="71" name="TextBox 70"/>
+          <p:cNvSpPr txBox="1"/>
+          <p:nvPr/>
+        </p:nvSpPr>
+        <p:spPr>
+          <a:xfrm>
+            <a:off x="11750040" y="6620256"/>
+            <a:ext cx="365760" cy="201168"/>
+          </a:xfrm>
+          <a:prstGeom prst="rect">
+            <a:avLst/>
+          </a:prstGeom>
+          <a:noFill/>
+        </p:spPr>
+        <p:txBody>
+          <a:bodyPr wrap="square">
+            <a:noAutofit/>
+          </a:bodyPr>
+          <a:lstStyle/>
+          <a:p>
+            <a:pPr algn="r"/>
+            <a:r>
+              <a:rPr sz="800" b="0" i="0">
+                <a:solidFill>
+                  <a:srgbClr val="D6D3D1"/>
+                </a:solidFill>
+                <a:latin typeface="Calibri"/>
+              </a:rPr>
+              <a:t>9</a:t>
+            </a:r>
+          </a:p>
+        </p:txBody>
+      </p:sp>
+      <p:sp>
+        <p:nvSpPr>
+          <p:cNvPr id="72" name="Rectangle 71"/>
           <p:cNvSpPr/>
           <p:nvPr/>
         </p:nvSpPr>
         <p:spPr>
           <a:xfrm>
             <a:off x="457200" y="1371600"/>
-            <a:ext cx="50292" cy="1024128"/>
-          </a:xfrm>
-          <a:prstGeom prst="rect">
-            <a:avLst/>
-          </a:prstGeom>
-          <a:solidFill>
-            <a:srgbClr val="DA291C"/>
+            <a:ext cx="2697480" cy="859536"/>
+          </a:xfrm>
+          <a:prstGeom prst="rect">
+            <a:avLst/>
+          </a:prstGeom>
+          <a:solidFill>
+            <a:srgbClr val="FFFFFF"/>
           </a:solidFill>
           <a:ln>
             <a:noFill/>
           </a:ln>
+          <a:effectLst/>
         </p:spPr>
         <p:style>
           <a:lnRef idx="1">
@@ -20783,131 +20887,25 @@
       </p:sp>
       <p:sp>
         <p:nvSpPr>
-          <p:cNvPr id="10" name="TextBox 9"/>
-          <p:cNvSpPr txBox="1"/>
-          <p:nvPr/>
-        </p:nvSpPr>
-        <p:spPr>
-          <a:xfrm>
-            <a:off x="621792" y="1481328"/>
-            <a:ext cx="2697479" cy="274320"/>
-          </a:xfrm>
-          <a:prstGeom prst="rect">
-            <a:avLst/>
-          </a:prstGeom>
-          <a:noFill/>
-        </p:spPr>
-        <p:txBody>
-          <a:bodyPr wrap="square">
-            <a:noAutofit/>
-          </a:bodyPr>
-          <a:lstStyle/>
-          <a:p>
-            <a:pPr algn="l"/>
-            <a:r>
-              <a:rPr sz="1100" b="1" i="0">
-                <a:solidFill>
-                  <a:srgbClr val="1C1917"/>
-                </a:solidFill>
-                <a:latin typeface="Consolas"/>
-              </a:rPr>
-              <a:t>renderClosure</a:t>
-            </a:r>
-          </a:p>
-        </p:txBody>
-      </p:sp>
-      <p:sp>
-        <p:nvSpPr>
-          <p:cNvPr id="11" name="TextBox 10"/>
-          <p:cNvSpPr txBox="1"/>
-          <p:nvPr/>
-        </p:nvSpPr>
-        <p:spPr>
-          <a:xfrm>
-            <a:off x="3291839" y="1481328"/>
-            <a:ext cx="777240" cy="237744"/>
-          </a:xfrm>
-          <a:prstGeom prst="rect">
-            <a:avLst/>
-          </a:prstGeom>
-          <a:noFill/>
-        </p:spPr>
-        <p:txBody>
-          <a:bodyPr wrap="square">
-            <a:noAutofit/>
-          </a:bodyPr>
-          <a:lstStyle/>
-          <a:p>
-            <a:pPr algn="r"/>
-            <a:r>
-              <a:rPr sz="850" b="1" i="0">
-                <a:solidFill>
-                  <a:srgbClr val="DA291C"/>
-                </a:solidFill>
-                <a:latin typeface="Calibri"/>
-              </a:rPr>
-              <a:t>~1021</a:t>
-            </a:r>
-          </a:p>
-        </p:txBody>
-      </p:sp>
-      <p:sp>
-        <p:nvSpPr>
-          <p:cNvPr id="12" name="TextBox 11"/>
-          <p:cNvSpPr txBox="1"/>
-          <p:nvPr/>
-        </p:nvSpPr>
-        <p:spPr>
-          <a:xfrm>
-            <a:off x="621792" y="1828800"/>
-            <a:ext cx="3429000" cy="457200"/>
-          </a:xfrm>
-          <a:prstGeom prst="rect">
-            <a:avLst/>
-          </a:prstGeom>
-          <a:noFill/>
-        </p:spPr>
-        <p:txBody>
-          <a:bodyPr wrap="square">
-            <a:noAutofit/>
-          </a:bodyPr>
-          <a:lstStyle/>
-          <a:p>
-            <a:pPr algn="l"/>
-            <a:r>
-              <a:rPr sz="900" b="0" i="0">
-                <a:solidFill>
-                  <a:srgbClr val="78716C"/>
-                </a:solidFill>
-                <a:latin typeface="Calibri"/>
-              </a:rPr>
-              <a:t>Account closure + compliance</a:t>
-            </a:r>
-          </a:p>
-        </p:txBody>
-      </p:sp>
-      <p:sp>
-        <p:nvSpPr>
-          <p:cNvPr id="13" name="Rectangle 12"/>
+          <p:cNvPr id="73" name="Rectangle 72"/>
           <p:cNvSpPr/>
           <p:nvPr/>
         </p:nvSpPr>
         <p:spPr>
           <a:xfrm>
-            <a:off x="4370832" y="1371600"/>
-            <a:ext cx="3703320" cy="1024128"/>
-          </a:xfrm>
-          <a:prstGeom prst="rect">
-            <a:avLst/>
-          </a:prstGeom>
-          <a:solidFill>
-            <a:srgbClr val="FFFFFF"/>
-          </a:solidFill>
-          <a:ln w="9525">
-            <a:solidFill>
-              <a:srgbClr val="D6D3D1"/>
-            </a:solidFill>
+            <a:off x="457200" y="1371600"/>
+            <a:ext cx="54864" cy="859536"/>
+          </a:xfrm>
+          <a:prstGeom prst="rect">
+            <a:avLst/>
+          </a:prstGeom>
+          <a:solidFill>
+            <a:srgbClr val="DA291C"/>
+          </a:solidFill>
+          <a:ln>
+            <a:noFill/>
           </a:ln>
+          <a:effectLst/>
         </p:spPr>
         <p:style>
           <a:lnRef idx="1">
@@ -20933,24 +20931,93 @@
       </p:sp>
       <p:sp>
         <p:nvSpPr>
-          <p:cNvPr id="14" name="Rectangle 13"/>
+          <p:cNvPr id="74" name="TextBox 73"/>
+          <p:cNvSpPr txBox="1"/>
+          <p:nvPr/>
+        </p:nvSpPr>
+        <p:spPr>
+          <a:xfrm>
+            <a:off x="621792" y="1481328"/>
+            <a:ext cx="2423160" cy="256032"/>
+          </a:xfrm>
+          <a:prstGeom prst="rect">
+            <a:avLst/>
+          </a:prstGeom>
+          <a:noFill/>
+        </p:spPr>
+        <p:txBody>
+          <a:bodyPr wrap="square" lIns="12700" rIns="12700" tIns="0" bIns="0">
+            <a:spAutoFit/>
+          </a:bodyPr>
+          <a:lstStyle/>
+          <a:p>
+            <a:r>
+              <a:rPr sz="1050" b="1">
+                <a:solidFill>
+                  <a:srgbClr val="1C1917"/>
+                </a:solidFill>
+                <a:latin typeface="Consolas"/>
+              </a:rPr>
+              <a:t>renderClosure</a:t>
+            </a:r>
+          </a:p>
+        </p:txBody>
+      </p:sp>
+      <p:sp>
+        <p:nvSpPr>
+          <p:cNvPr id="75" name="TextBox 74"/>
+          <p:cNvSpPr txBox="1"/>
+          <p:nvPr/>
+        </p:nvSpPr>
+        <p:spPr>
+          <a:xfrm>
+            <a:off x="621792" y="1773936"/>
+            <a:ext cx="2423160" cy="402336"/>
+          </a:xfrm>
+          <a:prstGeom prst="rect">
+            <a:avLst/>
+          </a:prstGeom>
+          <a:noFill/>
+        </p:spPr>
+        <p:txBody>
+          <a:bodyPr wrap="square" lIns="12700" rIns="12700" tIns="0" bIns="0">
+            <a:spAutoFit/>
+          </a:bodyPr>
+          <a:lstStyle/>
+          <a:p>
+            <a:r>
+              <a:rPr sz="850" b="0">
+                <a:solidFill>
+                  <a:srgbClr val="78716C"/>
+                </a:solidFill>
+                <a:latin typeface="Calibri"/>
+              </a:rPr>
+              <a:t>Account closure + compliance</a:t>
+            </a:r>
+          </a:p>
+        </p:txBody>
+      </p:sp>
+      <p:sp>
+        <p:nvSpPr>
+          <p:cNvPr id="76" name="Rectangle 75"/>
           <p:cNvSpPr/>
           <p:nvPr/>
         </p:nvSpPr>
         <p:spPr>
           <a:xfrm>
-            <a:off x="4370832" y="1371600"/>
-            <a:ext cx="50292" cy="1024128"/>
-          </a:xfrm>
-          <a:prstGeom prst="rect">
-            <a:avLst/>
-          </a:prstGeom>
-          <a:solidFill>
-            <a:srgbClr val="DA291C"/>
+            <a:off x="3392424" y="1371600"/>
+            <a:ext cx="2697480" cy="859536"/>
+          </a:xfrm>
+          <a:prstGeom prst="rect">
+            <a:avLst/>
+          </a:prstGeom>
+          <a:solidFill>
+            <a:srgbClr val="FFFFFF"/>
           </a:solidFill>
           <a:ln>
             <a:noFill/>
           </a:ln>
+          <a:effectLst/>
         </p:spPr>
         <p:style>
           <a:lnRef idx="1">
@@ -20976,131 +21043,25 @@
       </p:sp>
       <p:sp>
         <p:nvSpPr>
-          <p:cNvPr id="15" name="TextBox 14"/>
-          <p:cNvSpPr txBox="1"/>
-          <p:nvPr/>
-        </p:nvSpPr>
-        <p:spPr>
-          <a:xfrm>
-            <a:off x="4535424" y="1481328"/>
-            <a:ext cx="2697479" cy="274320"/>
-          </a:xfrm>
-          <a:prstGeom prst="rect">
-            <a:avLst/>
-          </a:prstGeom>
-          <a:noFill/>
-        </p:spPr>
-        <p:txBody>
-          <a:bodyPr wrap="square">
-            <a:noAutofit/>
-          </a:bodyPr>
-          <a:lstStyle/>
-          <a:p>
-            <a:pPr algn="l"/>
-            <a:r>
-              <a:rPr sz="1100" b="1" i="0">
-                <a:solidFill>
-                  <a:srgbClr val="1C1917"/>
-                </a:solidFill>
-                <a:latin typeface="Consolas"/>
-              </a:rPr>
-              <a:t>renderBiz</a:t>
-            </a:r>
-          </a:p>
-        </p:txBody>
-      </p:sp>
-      <p:sp>
-        <p:nvSpPr>
-          <p:cNvPr id="16" name="TextBox 15"/>
-          <p:cNvSpPr txBox="1"/>
-          <p:nvPr/>
-        </p:nvSpPr>
-        <p:spPr>
-          <a:xfrm>
-            <a:off x="7205472" y="1481328"/>
-            <a:ext cx="777240" cy="237744"/>
-          </a:xfrm>
-          <a:prstGeom prst="rect">
-            <a:avLst/>
-          </a:prstGeom>
-          <a:noFill/>
-        </p:spPr>
-        <p:txBody>
-          <a:bodyPr wrap="square">
-            <a:noAutofit/>
-          </a:bodyPr>
-          <a:lstStyle/>
-          <a:p>
-            <a:pPr algn="r"/>
-            <a:r>
-              <a:rPr sz="850" b="1" i="0">
-                <a:solidFill>
-                  <a:srgbClr val="DA291C"/>
-                </a:solidFill>
-                <a:latin typeface="Calibri"/>
-              </a:rPr>
-              <a:t>~1332</a:t>
-            </a:r>
-          </a:p>
-        </p:txBody>
-      </p:sp>
-      <p:sp>
-        <p:nvSpPr>
-          <p:cNvPr id="17" name="TextBox 16"/>
-          <p:cNvSpPr txBox="1"/>
-          <p:nvPr/>
-        </p:nvSpPr>
-        <p:spPr>
-          <a:xfrm>
-            <a:off x="4535424" y="1828800"/>
-            <a:ext cx="3429000" cy="457200"/>
-          </a:xfrm>
-          <a:prstGeom prst="rect">
-            <a:avLst/>
-          </a:prstGeom>
-          <a:noFill/>
-        </p:spPr>
-        <p:txBody>
-          <a:bodyPr wrap="square">
-            <a:noAutofit/>
-          </a:bodyPr>
-          <a:lstStyle/>
-          <a:p>
-            <a:pPr algn="l"/>
-            <a:r>
-              <a:rPr sz="900" b="0" i="0">
-                <a:solidFill>
-                  <a:srgbClr val="78716C"/>
-                </a:solidFill>
-                <a:latin typeface="Calibri"/>
-              </a:rPr>
-              <a:t>Business KYC / KYB verification</a:t>
-            </a:r>
-          </a:p>
-        </p:txBody>
-      </p:sp>
-      <p:sp>
-        <p:nvSpPr>
-          <p:cNvPr id="18" name="Rectangle 17"/>
+          <p:cNvPr id="77" name="Rectangle 76"/>
           <p:cNvSpPr/>
           <p:nvPr/>
         </p:nvSpPr>
         <p:spPr>
           <a:xfrm>
-            <a:off x="8284464" y="1371600"/>
-            <a:ext cx="3703320" cy="1024128"/>
-          </a:xfrm>
-          <a:prstGeom prst="rect">
-            <a:avLst/>
-          </a:prstGeom>
-          <a:solidFill>
-            <a:srgbClr val="FFFFFF"/>
-          </a:solidFill>
-          <a:ln w="9525">
-            <a:solidFill>
-              <a:srgbClr val="D6D3D1"/>
-            </a:solidFill>
+            <a:off x="3392424" y="1371600"/>
+            <a:ext cx="54864" cy="859536"/>
+          </a:xfrm>
+          <a:prstGeom prst="rect">
+            <a:avLst/>
+          </a:prstGeom>
+          <a:solidFill>
+            <a:srgbClr val="DA291C"/>
+          </a:solidFill>
+          <a:ln>
+            <a:noFill/>
           </a:ln>
+          <a:effectLst/>
         </p:spPr>
         <p:style>
           <a:lnRef idx="1">
@@ -21126,24 +21087,93 @@
       </p:sp>
       <p:sp>
         <p:nvSpPr>
-          <p:cNvPr id="19" name="Rectangle 18"/>
+          <p:cNvPr id="78" name="TextBox 77"/>
+          <p:cNvSpPr txBox="1"/>
+          <p:nvPr/>
+        </p:nvSpPr>
+        <p:spPr>
+          <a:xfrm>
+            <a:off x="3557016" y="1481328"/>
+            <a:ext cx="2423160" cy="256032"/>
+          </a:xfrm>
+          <a:prstGeom prst="rect">
+            <a:avLst/>
+          </a:prstGeom>
+          <a:noFill/>
+        </p:spPr>
+        <p:txBody>
+          <a:bodyPr wrap="square" lIns="12700" rIns="12700" tIns="0" bIns="0">
+            <a:spAutoFit/>
+          </a:bodyPr>
+          <a:lstStyle/>
+          <a:p>
+            <a:r>
+              <a:rPr sz="1050" b="1">
+                <a:solidFill>
+                  <a:srgbClr val="1C1917"/>
+                </a:solidFill>
+                <a:latin typeface="Consolas"/>
+              </a:rPr>
+              <a:t>renderBiz</a:t>
+            </a:r>
+          </a:p>
+        </p:txBody>
+      </p:sp>
+      <p:sp>
+        <p:nvSpPr>
+          <p:cNvPr id="79" name="TextBox 78"/>
+          <p:cNvSpPr txBox="1"/>
+          <p:nvPr/>
+        </p:nvSpPr>
+        <p:spPr>
+          <a:xfrm>
+            <a:off x="3557016" y="1773936"/>
+            <a:ext cx="2423160" cy="402336"/>
+          </a:xfrm>
+          <a:prstGeom prst="rect">
+            <a:avLst/>
+          </a:prstGeom>
+          <a:noFill/>
+        </p:spPr>
+        <p:txBody>
+          <a:bodyPr wrap="square" lIns="12700" rIns="12700" tIns="0" bIns="0">
+            <a:spAutoFit/>
+          </a:bodyPr>
+          <a:lstStyle/>
+          <a:p>
+            <a:r>
+              <a:rPr sz="850" b="0">
+                <a:solidFill>
+                  <a:srgbClr val="78716C"/>
+                </a:solidFill>
+                <a:latin typeface="Calibri"/>
+              </a:rPr>
+              <a:t>Business KYC / KYB verification</a:t>
+            </a:r>
+          </a:p>
+        </p:txBody>
+      </p:sp>
+      <p:sp>
+        <p:nvSpPr>
+          <p:cNvPr id="80" name="Rectangle 79"/>
           <p:cNvSpPr/>
           <p:nvPr/>
         </p:nvSpPr>
         <p:spPr>
           <a:xfrm>
-            <a:off x="8284464" y="1371600"/>
-            <a:ext cx="50292" cy="1024128"/>
-          </a:xfrm>
-          <a:prstGeom prst="rect">
-            <a:avLst/>
-          </a:prstGeom>
-          <a:solidFill>
-            <a:srgbClr val="DA291C"/>
+            <a:off x="6327648" y="1371600"/>
+            <a:ext cx="2697480" cy="859536"/>
+          </a:xfrm>
+          <a:prstGeom prst="rect">
+            <a:avLst/>
+          </a:prstGeom>
+          <a:solidFill>
+            <a:srgbClr val="FFFFFF"/>
           </a:solidFill>
           <a:ln>
             <a:noFill/>
           </a:ln>
+          <a:effectLst/>
         </p:spPr>
         <p:style>
           <a:lnRef idx="1">
@@ -21169,131 +21199,25 @@
       </p:sp>
       <p:sp>
         <p:nvSpPr>
-          <p:cNvPr id="20" name="TextBox 19"/>
-          <p:cNvSpPr txBox="1"/>
-          <p:nvPr/>
-        </p:nvSpPr>
-        <p:spPr>
-          <a:xfrm>
-            <a:off x="8449056" y="1481328"/>
-            <a:ext cx="2697479" cy="274320"/>
-          </a:xfrm>
-          <a:prstGeom prst="rect">
-            <a:avLst/>
-          </a:prstGeom>
-          <a:noFill/>
-        </p:spPr>
-        <p:txBody>
-          <a:bodyPr wrap="square">
-            <a:noAutofit/>
-          </a:bodyPr>
-          <a:lstStyle/>
-          <a:p>
-            <a:pPr algn="l"/>
-            <a:r>
-              <a:rPr sz="1100" b="1" i="0">
-                <a:solidFill>
-                  <a:srgbClr val="1C1917"/>
-                </a:solidFill>
-                <a:latin typeface="Consolas"/>
-              </a:rPr>
-              <a:t>renderMandate</a:t>
-            </a:r>
-          </a:p>
-        </p:txBody>
-      </p:sp>
-      <p:sp>
-        <p:nvSpPr>
-          <p:cNvPr id="21" name="TextBox 20"/>
-          <p:cNvSpPr txBox="1"/>
-          <p:nvPr/>
-        </p:nvSpPr>
-        <p:spPr>
-          <a:xfrm>
-            <a:off x="11119104" y="1481328"/>
-            <a:ext cx="777240" cy="237744"/>
-          </a:xfrm>
-          <a:prstGeom prst="rect">
-            <a:avLst/>
-          </a:prstGeom>
-          <a:noFill/>
-        </p:spPr>
-        <p:txBody>
-          <a:bodyPr wrap="square">
-            <a:noAutofit/>
-          </a:bodyPr>
-          <a:lstStyle/>
-          <a:p>
-            <a:pPr algn="r"/>
-            <a:r>
-              <a:rPr sz="850" b="1" i="0">
-                <a:solidFill>
-                  <a:srgbClr val="DA291C"/>
-                </a:solidFill>
-                <a:latin typeface="Calibri"/>
-              </a:rPr>
-              <a:t>~1428</a:t>
-            </a:r>
-          </a:p>
-        </p:txBody>
-      </p:sp>
-      <p:sp>
-        <p:nvSpPr>
-          <p:cNvPr id="22" name="TextBox 21"/>
-          <p:cNvSpPr txBox="1"/>
-          <p:nvPr/>
-        </p:nvSpPr>
-        <p:spPr>
-          <a:xfrm>
-            <a:off x="8449056" y="1828800"/>
-            <a:ext cx="3429000" cy="457200"/>
-          </a:xfrm>
-          <a:prstGeom prst="rect">
-            <a:avLst/>
-          </a:prstGeom>
-          <a:noFill/>
-        </p:spPr>
-        <p:txBody>
-          <a:bodyPr wrap="square">
-            <a:noAutofit/>
-          </a:bodyPr>
-          <a:lstStyle/>
-          <a:p>
-            <a:pPr algn="l"/>
-            <a:r>
-              <a:rPr sz="900" b="0" i="0">
-                <a:solidFill>
-                  <a:srgbClr val="78716C"/>
-                </a:solidFill>
-                <a:latin typeface="Calibri"/>
-              </a:rPr>
-              <a:t>Signatory mandate changes</a:t>
-            </a:r>
-          </a:p>
-        </p:txBody>
-      </p:sp>
-      <p:sp>
-        <p:nvSpPr>
-          <p:cNvPr id="23" name="Rectangle 22"/>
+          <p:cNvPr id="81" name="Rectangle 80"/>
           <p:cNvSpPr/>
           <p:nvPr/>
         </p:nvSpPr>
         <p:spPr>
           <a:xfrm>
-            <a:off x="457200" y="2532888"/>
-            <a:ext cx="3703320" cy="1024128"/>
-          </a:xfrm>
-          <a:prstGeom prst="rect">
-            <a:avLst/>
-          </a:prstGeom>
-          <a:solidFill>
-            <a:srgbClr val="FFFFFF"/>
-          </a:solidFill>
-          <a:ln w="9525">
-            <a:solidFill>
-              <a:srgbClr val="D6D3D1"/>
-            </a:solidFill>
+            <a:off x="6327648" y="1371600"/>
+            <a:ext cx="54864" cy="859536"/>
+          </a:xfrm>
+          <a:prstGeom prst="rect">
+            <a:avLst/>
+          </a:prstGeom>
+          <a:solidFill>
+            <a:srgbClr val="DA291C"/>
+          </a:solidFill>
+          <a:ln>
+            <a:noFill/>
           </a:ln>
+          <a:effectLst/>
         </p:spPr>
         <p:style>
           <a:lnRef idx="1">
@@ -21319,24 +21243,93 @@
       </p:sp>
       <p:sp>
         <p:nvSpPr>
-          <p:cNvPr id="24" name="Rectangle 23"/>
+          <p:cNvPr id="82" name="TextBox 81"/>
+          <p:cNvSpPr txBox="1"/>
+          <p:nvPr/>
+        </p:nvSpPr>
+        <p:spPr>
+          <a:xfrm>
+            <a:off x="6492240" y="1481328"/>
+            <a:ext cx="2423160" cy="256032"/>
+          </a:xfrm>
+          <a:prstGeom prst="rect">
+            <a:avLst/>
+          </a:prstGeom>
+          <a:noFill/>
+        </p:spPr>
+        <p:txBody>
+          <a:bodyPr wrap="square" lIns="12700" rIns="12700" tIns="0" bIns="0">
+            <a:spAutoFit/>
+          </a:bodyPr>
+          <a:lstStyle/>
+          <a:p>
+            <a:r>
+              <a:rPr sz="1050" b="1">
+                <a:solidFill>
+                  <a:srgbClr val="1C1917"/>
+                </a:solidFill>
+                <a:latin typeface="Consolas"/>
+              </a:rPr>
+              <a:t>renderMandate</a:t>
+            </a:r>
+          </a:p>
+        </p:txBody>
+      </p:sp>
+      <p:sp>
+        <p:nvSpPr>
+          <p:cNvPr id="83" name="TextBox 82"/>
+          <p:cNvSpPr txBox="1"/>
+          <p:nvPr/>
+        </p:nvSpPr>
+        <p:spPr>
+          <a:xfrm>
+            <a:off x="6492240" y="1773936"/>
+            <a:ext cx="2423160" cy="402336"/>
+          </a:xfrm>
+          <a:prstGeom prst="rect">
+            <a:avLst/>
+          </a:prstGeom>
+          <a:noFill/>
+        </p:spPr>
+        <p:txBody>
+          <a:bodyPr wrap="square" lIns="12700" rIns="12700" tIns="0" bIns="0">
+            <a:spAutoFit/>
+          </a:bodyPr>
+          <a:lstStyle/>
+          <a:p>
+            <a:r>
+              <a:rPr sz="850" b="0">
+                <a:solidFill>
+                  <a:srgbClr val="78716C"/>
+                </a:solidFill>
+                <a:latin typeface="Calibri"/>
+              </a:rPr>
+              <a:t>Signatory mandate changes</a:t>
+            </a:r>
+          </a:p>
+        </p:txBody>
+      </p:sp>
+      <p:sp>
+        <p:nvSpPr>
+          <p:cNvPr id="84" name="Rectangle 83"/>
           <p:cNvSpPr/>
           <p:nvPr/>
         </p:nvSpPr>
         <p:spPr>
           <a:xfrm>
-            <a:off x="457200" y="2532888"/>
-            <a:ext cx="50292" cy="1024128"/>
-          </a:xfrm>
-          <a:prstGeom prst="rect">
-            <a:avLst/>
-          </a:prstGeom>
-          <a:solidFill>
-            <a:srgbClr val="DA291C"/>
+            <a:off x="9262872" y="1371600"/>
+            <a:ext cx="2697480" cy="859536"/>
+          </a:xfrm>
+          <a:prstGeom prst="rect">
+            <a:avLst/>
+          </a:prstGeom>
+          <a:solidFill>
+            <a:srgbClr val="FFFFFF"/>
           </a:solidFill>
           <a:ln>
             <a:noFill/>
           </a:ln>
+          <a:effectLst/>
         </p:spPr>
         <p:style>
           <a:lnRef idx="1">
@@ -21362,131 +21355,25 @@
       </p:sp>
       <p:sp>
         <p:nvSpPr>
-          <p:cNvPr id="25" name="TextBox 24"/>
-          <p:cNvSpPr txBox="1"/>
-          <p:nvPr/>
-        </p:nvSpPr>
-        <p:spPr>
-          <a:xfrm>
-            <a:off x="621792" y="2642616"/>
-            <a:ext cx="2697479" cy="274320"/>
-          </a:xfrm>
-          <a:prstGeom prst="rect">
-            <a:avLst/>
-          </a:prstGeom>
-          <a:noFill/>
-        </p:spPr>
-        <p:txBody>
-          <a:bodyPr wrap="square">
-            <a:noAutofit/>
-          </a:bodyPr>
-          <a:lstStyle/>
-          <a:p>
-            <a:pPr algn="l"/>
-            <a:r>
-              <a:rPr sz="1100" b="1" i="0">
-                <a:solidFill>
-                  <a:srgbClr val="1C1917"/>
-                </a:solidFill>
-                <a:latin typeface="Consolas"/>
-              </a:rPr>
-              <a:t>renderWages</a:t>
-            </a:r>
-          </a:p>
-        </p:txBody>
-      </p:sp>
-      <p:sp>
-        <p:nvSpPr>
-          <p:cNvPr id="26" name="TextBox 25"/>
-          <p:cNvSpPr txBox="1"/>
-          <p:nvPr/>
-        </p:nvSpPr>
-        <p:spPr>
-          <a:xfrm>
-            <a:off x="3291839" y="2642616"/>
-            <a:ext cx="777240" cy="237744"/>
-          </a:xfrm>
-          <a:prstGeom prst="rect">
-            <a:avLst/>
-          </a:prstGeom>
-          <a:noFill/>
-        </p:spPr>
-        <p:txBody>
-          <a:bodyPr wrap="square">
-            <a:noAutofit/>
-          </a:bodyPr>
-          <a:lstStyle/>
-          <a:p>
-            <a:pPr algn="r"/>
-            <a:r>
-              <a:rPr sz="850" b="1" i="0">
-                <a:solidFill>
-                  <a:srgbClr val="DA291C"/>
-                </a:solidFill>
-                <a:latin typeface="Calibri"/>
-              </a:rPr>
-              <a:t>~1630</a:t>
-            </a:r>
-          </a:p>
-        </p:txBody>
-      </p:sp>
-      <p:sp>
-        <p:nvSpPr>
-          <p:cNvPr id="27" name="TextBox 26"/>
-          <p:cNvSpPr txBox="1"/>
-          <p:nvPr/>
-        </p:nvSpPr>
-        <p:spPr>
-          <a:xfrm>
-            <a:off x="621792" y="2990088"/>
-            <a:ext cx="3429000" cy="457200"/>
-          </a:xfrm>
-          <a:prstGeom prst="rect">
-            <a:avLst/>
-          </a:prstGeom>
-          <a:noFill/>
-        </p:spPr>
-        <p:txBody>
-          <a:bodyPr wrap="square">
-            <a:noAutofit/>
-          </a:bodyPr>
-          <a:lstStyle/>
-          <a:p>
-            <a:pPr algn="l"/>
-            <a:r>
-              <a:rPr sz="900" b="0" i="0">
-                <a:solidFill>
-                  <a:srgbClr val="78716C"/>
-                </a:solidFill>
-                <a:latin typeface="Calibri"/>
-              </a:rPr>
-              <a:t>Bulk wages (CSV + approval)</a:t>
-            </a:r>
-          </a:p>
-        </p:txBody>
-      </p:sp>
-      <p:sp>
-        <p:nvSpPr>
-          <p:cNvPr id="28" name="Rectangle 27"/>
+          <p:cNvPr id="85" name="Rectangle 84"/>
           <p:cNvSpPr/>
           <p:nvPr/>
         </p:nvSpPr>
         <p:spPr>
           <a:xfrm>
-            <a:off x="4370832" y="2532888"/>
-            <a:ext cx="3703320" cy="1024128"/>
-          </a:xfrm>
-          <a:prstGeom prst="rect">
-            <a:avLst/>
-          </a:prstGeom>
-          <a:solidFill>
-            <a:srgbClr val="FFFFFF"/>
-          </a:solidFill>
-          <a:ln w="9525">
-            <a:solidFill>
-              <a:srgbClr val="D6D3D1"/>
-            </a:solidFill>
+            <a:off x="9262872" y="1371600"/>
+            <a:ext cx="54864" cy="859536"/>
+          </a:xfrm>
+          <a:prstGeom prst="rect">
+            <a:avLst/>
+          </a:prstGeom>
+          <a:solidFill>
+            <a:srgbClr val="DA291C"/>
+          </a:solidFill>
+          <a:ln>
+            <a:noFill/>
           </a:ln>
+          <a:effectLst/>
         </p:spPr>
         <p:style>
           <a:lnRef idx="1">
@@ -21512,24 +21399,93 @@
       </p:sp>
       <p:sp>
         <p:nvSpPr>
-          <p:cNvPr id="29" name="Rectangle 28"/>
+          <p:cNvPr id="86" name="TextBox 85"/>
+          <p:cNvSpPr txBox="1"/>
+          <p:nvPr/>
+        </p:nvSpPr>
+        <p:spPr>
+          <a:xfrm>
+            <a:off x="9427464" y="1481328"/>
+            <a:ext cx="2423160" cy="256032"/>
+          </a:xfrm>
+          <a:prstGeom prst="rect">
+            <a:avLst/>
+          </a:prstGeom>
+          <a:noFill/>
+        </p:spPr>
+        <p:txBody>
+          <a:bodyPr wrap="square" lIns="12700" rIns="12700" tIns="0" bIns="0">
+            <a:spAutoFit/>
+          </a:bodyPr>
+          <a:lstStyle/>
+          <a:p>
+            <a:r>
+              <a:rPr sz="1050" b="1">
+                <a:solidFill>
+                  <a:srgbClr val="1C1917"/>
+                </a:solidFill>
+                <a:latin typeface="Consolas"/>
+              </a:rPr>
+              <a:t>renderWages</a:t>
+            </a:r>
+          </a:p>
+        </p:txBody>
+      </p:sp>
+      <p:sp>
+        <p:nvSpPr>
+          <p:cNvPr id="87" name="TextBox 86"/>
+          <p:cNvSpPr txBox="1"/>
+          <p:nvPr/>
+        </p:nvSpPr>
+        <p:spPr>
+          <a:xfrm>
+            <a:off x="9427464" y="1773936"/>
+            <a:ext cx="2423160" cy="402336"/>
+          </a:xfrm>
+          <a:prstGeom prst="rect">
+            <a:avLst/>
+          </a:prstGeom>
+          <a:noFill/>
+        </p:spPr>
+        <p:txBody>
+          <a:bodyPr wrap="square" lIns="12700" rIns="12700" tIns="0" bIns="0">
+            <a:spAutoFit/>
+          </a:bodyPr>
+          <a:lstStyle/>
+          <a:p>
+            <a:r>
+              <a:rPr sz="850" b="0">
+                <a:solidFill>
+                  <a:srgbClr val="78716C"/>
+                </a:solidFill>
+                <a:latin typeface="Calibri"/>
+              </a:rPr>
+              <a:t>Bulk wages (CSV + approval)</a:t>
+            </a:r>
+          </a:p>
+        </p:txBody>
+      </p:sp>
+      <p:sp>
+        <p:nvSpPr>
+          <p:cNvPr id="88" name="Rectangle 87"/>
           <p:cNvSpPr/>
           <p:nvPr/>
         </p:nvSpPr>
         <p:spPr>
           <a:xfrm>
-            <a:off x="4370832" y="2532888"/>
-            <a:ext cx="50292" cy="1024128"/>
-          </a:xfrm>
-          <a:prstGeom prst="rect">
-            <a:avLst/>
-          </a:prstGeom>
-          <a:solidFill>
-            <a:srgbClr val="DA291C"/>
+            <a:off x="457200" y="2377440"/>
+            <a:ext cx="2697480" cy="859536"/>
+          </a:xfrm>
+          <a:prstGeom prst="rect">
+            <a:avLst/>
+          </a:prstGeom>
+          <a:solidFill>
+            <a:srgbClr val="FFFFFF"/>
           </a:solidFill>
           <a:ln>
             <a:noFill/>
           </a:ln>
+          <a:effectLst/>
         </p:spPr>
         <p:style>
           <a:lnRef idx="1">
@@ -21555,131 +21511,25 @@
       </p:sp>
       <p:sp>
         <p:nvSpPr>
-          <p:cNvPr id="30" name="TextBox 29"/>
-          <p:cNvSpPr txBox="1"/>
-          <p:nvPr/>
-        </p:nvSpPr>
-        <p:spPr>
-          <a:xfrm>
-            <a:off x="4535424" y="2642616"/>
-            <a:ext cx="2697479" cy="274320"/>
-          </a:xfrm>
-          <a:prstGeom prst="rect">
-            <a:avLst/>
-          </a:prstGeom>
-          <a:noFill/>
-        </p:spPr>
-        <p:txBody>
-          <a:bodyPr wrap="square">
-            <a:noAutofit/>
-          </a:bodyPr>
-          <a:lstStyle/>
-          <a:p>
-            <a:pPr algn="l"/>
-            <a:r>
-              <a:rPr sz="1100" b="1" i="0">
-                <a:solidFill>
-                  <a:srgbClr val="1C1917"/>
-                </a:solidFill>
-                <a:latin typeface="Consolas"/>
-              </a:rPr>
-              <a:t>renderLending</a:t>
-            </a:r>
-          </a:p>
-        </p:txBody>
-      </p:sp>
-      <p:sp>
-        <p:nvSpPr>
-          <p:cNvPr id="31" name="TextBox 30"/>
-          <p:cNvSpPr txBox="1"/>
-          <p:nvPr/>
-        </p:nvSpPr>
-        <p:spPr>
-          <a:xfrm>
-            <a:off x="7205472" y="2642616"/>
-            <a:ext cx="777240" cy="237744"/>
-          </a:xfrm>
-          <a:prstGeom prst="rect">
-            <a:avLst/>
-          </a:prstGeom>
-          <a:noFill/>
-        </p:spPr>
-        <p:txBody>
-          <a:bodyPr wrap="square">
-            <a:noAutofit/>
-          </a:bodyPr>
-          <a:lstStyle/>
-          <a:p>
-            <a:pPr algn="r"/>
-            <a:r>
-              <a:rPr sz="850" b="1" i="0">
-                <a:solidFill>
-                  <a:srgbClr val="DA291C"/>
-                </a:solidFill>
-                <a:latin typeface="Calibri"/>
-              </a:rPr>
-              <a:t>~1915</a:t>
-            </a:r>
-          </a:p>
-        </p:txBody>
-      </p:sp>
-      <p:sp>
-        <p:nvSpPr>
-          <p:cNvPr id="32" name="TextBox 31"/>
-          <p:cNvSpPr txBox="1"/>
-          <p:nvPr/>
-        </p:nvSpPr>
-        <p:spPr>
-          <a:xfrm>
-            <a:off x="4535424" y="2990088"/>
-            <a:ext cx="3429000" cy="457200"/>
-          </a:xfrm>
-          <a:prstGeom prst="rect">
-            <a:avLst/>
-          </a:prstGeom>
-          <a:noFill/>
-        </p:spPr>
-        <p:txBody>
-          <a:bodyPr wrap="square">
-            <a:noAutofit/>
-          </a:bodyPr>
-          <a:lstStyle/>
-          <a:p>
-            <a:pPr algn="l"/>
-            <a:r>
-              <a:rPr sz="900" b="0" i="0">
-                <a:solidFill>
-                  <a:srgbClr val="78716C"/>
-                </a:solidFill>
-                <a:latin typeface="Calibri"/>
-              </a:rPr>
-              <a:t>Business lending application</a:t>
-            </a:r>
-          </a:p>
-        </p:txBody>
-      </p:sp>
-      <p:sp>
-        <p:nvSpPr>
-          <p:cNvPr id="33" name="Rectangle 32"/>
+          <p:cNvPr id="89" name="Rectangle 88"/>
           <p:cNvSpPr/>
           <p:nvPr/>
         </p:nvSpPr>
         <p:spPr>
           <a:xfrm>
-            <a:off x="8284464" y="2532888"/>
-            <a:ext cx="3703320" cy="1024128"/>
-          </a:xfrm>
-          <a:prstGeom prst="rect">
-            <a:avLst/>
-          </a:prstGeom>
-          <a:solidFill>
-            <a:srgbClr val="FFFFFF"/>
-          </a:solidFill>
-          <a:ln w="9525">
-            <a:solidFill>
-              <a:srgbClr val="D6D3D1"/>
-            </a:solidFill>
+            <a:off x="457200" y="2377440"/>
+            <a:ext cx="54864" cy="859536"/>
+          </a:xfrm>
+          <a:prstGeom prst="rect">
+            <a:avLst/>
+          </a:prstGeom>
+          <a:solidFill>
+            <a:srgbClr val="DA291C"/>
+          </a:solidFill>
+          <a:ln>
+            <a:noFill/>
           </a:ln>
+          <a:effectLst/>
         </p:spPr>
         <p:style>
           <a:lnRef idx="1">
@@ -21705,24 +21555,93 @@
       </p:sp>
       <p:sp>
         <p:nvSpPr>
-          <p:cNvPr id="34" name="Rectangle 33"/>
+          <p:cNvPr id="90" name="TextBox 89"/>
+          <p:cNvSpPr txBox="1"/>
+          <p:nvPr/>
+        </p:nvSpPr>
+        <p:spPr>
+          <a:xfrm>
+            <a:off x="621792" y="2487168"/>
+            <a:ext cx="2423160" cy="256032"/>
+          </a:xfrm>
+          <a:prstGeom prst="rect">
+            <a:avLst/>
+          </a:prstGeom>
+          <a:noFill/>
+        </p:spPr>
+        <p:txBody>
+          <a:bodyPr wrap="square" lIns="12700" rIns="12700" tIns="0" bIns="0">
+            <a:spAutoFit/>
+          </a:bodyPr>
+          <a:lstStyle/>
+          <a:p>
+            <a:r>
+              <a:rPr sz="1050" b="1">
+                <a:solidFill>
+                  <a:srgbClr val="1C1917"/>
+                </a:solidFill>
+                <a:latin typeface="Consolas"/>
+              </a:rPr>
+              <a:t>renderLending</a:t>
+            </a:r>
+          </a:p>
+        </p:txBody>
+      </p:sp>
+      <p:sp>
+        <p:nvSpPr>
+          <p:cNvPr id="91" name="TextBox 90"/>
+          <p:cNvSpPr txBox="1"/>
+          <p:nvPr/>
+        </p:nvSpPr>
+        <p:spPr>
+          <a:xfrm>
+            <a:off x="621792" y="2779776"/>
+            <a:ext cx="2423160" cy="402336"/>
+          </a:xfrm>
+          <a:prstGeom prst="rect">
+            <a:avLst/>
+          </a:prstGeom>
+          <a:noFill/>
+        </p:spPr>
+        <p:txBody>
+          <a:bodyPr wrap="square" lIns="12700" rIns="12700" tIns="0" bIns="0">
+            <a:spAutoFit/>
+          </a:bodyPr>
+          <a:lstStyle/>
+          <a:p>
+            <a:r>
+              <a:rPr sz="850" b="0">
+                <a:solidFill>
+                  <a:srgbClr val="78716C"/>
+                </a:solidFill>
+                <a:latin typeface="Calibri"/>
+              </a:rPr>
+              <a:t>Business lending application</a:t>
+            </a:r>
+          </a:p>
+        </p:txBody>
+      </p:sp>
+      <p:sp>
+        <p:nvSpPr>
+          <p:cNvPr id="92" name="Rectangle 91"/>
           <p:cNvSpPr/>
           <p:nvPr/>
         </p:nvSpPr>
         <p:spPr>
           <a:xfrm>
-            <a:off x="8284464" y="2532888"/>
-            <a:ext cx="50292" cy="1024128"/>
-          </a:xfrm>
-          <a:prstGeom prst="rect">
-            <a:avLst/>
-          </a:prstGeom>
-          <a:solidFill>
-            <a:srgbClr val="DA291C"/>
+            <a:off x="3392424" y="2377440"/>
+            <a:ext cx="2697480" cy="859536"/>
+          </a:xfrm>
+          <a:prstGeom prst="rect">
+            <a:avLst/>
+          </a:prstGeom>
+          <a:solidFill>
+            <a:srgbClr val="FFFFFF"/>
           </a:solidFill>
           <a:ln>
             <a:noFill/>
           </a:ln>
+          <a:effectLst/>
         </p:spPr>
         <p:style>
           <a:lnRef idx="1">
@@ -21748,131 +21667,25 @@
       </p:sp>
       <p:sp>
         <p:nvSpPr>
-          <p:cNvPr id="35" name="TextBox 34"/>
-          <p:cNvSpPr txBox="1"/>
-          <p:nvPr/>
-        </p:nvSpPr>
-        <p:spPr>
-          <a:xfrm>
-            <a:off x="8449056" y="2642616"/>
-            <a:ext cx="2697479" cy="274320"/>
-          </a:xfrm>
-          <a:prstGeom prst="rect">
-            <a:avLst/>
-          </a:prstGeom>
-          <a:noFill/>
-        </p:spPr>
-        <p:txBody>
-          <a:bodyPr wrap="square">
-            <a:noAutofit/>
-          </a:bodyPr>
-          <a:lstStyle/>
-          <a:p>
-            <a:pPr algn="l"/>
-            <a:r>
-              <a:rPr sz="1100" b="1" i="0">
-                <a:solidFill>
-                  <a:srgbClr val="1C1917"/>
-                </a:solidFill>
-                <a:latin typeface="Consolas"/>
-              </a:rPr>
-              <a:t>renderFX</a:t>
-            </a:r>
-          </a:p>
-        </p:txBody>
-      </p:sp>
-      <p:sp>
-        <p:nvSpPr>
-          <p:cNvPr id="36" name="TextBox 35"/>
-          <p:cNvSpPr txBox="1"/>
-          <p:nvPr/>
-        </p:nvSpPr>
-        <p:spPr>
-          <a:xfrm>
-            <a:off x="11119104" y="2642616"/>
-            <a:ext cx="777240" cy="237744"/>
-          </a:xfrm>
-          <a:prstGeom prst="rect">
-            <a:avLst/>
-          </a:prstGeom>
-          <a:noFill/>
-        </p:spPr>
-        <p:txBody>
-          <a:bodyPr wrap="square">
-            <a:noAutofit/>
-          </a:bodyPr>
-          <a:lstStyle/>
-          <a:p>
-            <a:pPr algn="r"/>
-            <a:r>
-              <a:rPr sz="850" b="1" i="0">
-                <a:solidFill>
-                  <a:srgbClr val="DA291C"/>
-                </a:solidFill>
-                <a:latin typeface="Calibri"/>
-              </a:rPr>
-              <a:t>~2018</a:t>
-            </a:r>
-          </a:p>
-        </p:txBody>
-      </p:sp>
-      <p:sp>
-        <p:nvSpPr>
-          <p:cNvPr id="37" name="TextBox 36"/>
-          <p:cNvSpPr txBox="1"/>
-          <p:nvPr/>
-        </p:nvSpPr>
-        <p:spPr>
-          <a:xfrm>
-            <a:off x="8449056" y="2990088"/>
-            <a:ext cx="3429000" cy="457200"/>
-          </a:xfrm>
-          <a:prstGeom prst="rect">
-            <a:avLst/>
-          </a:prstGeom>
-          <a:noFill/>
-        </p:spPr>
-        <p:txBody>
-          <a:bodyPr wrap="square">
-            <a:noAutofit/>
-          </a:bodyPr>
-          <a:lstStyle/>
-          <a:p>
-            <a:pPr algn="l"/>
-            <a:r>
-              <a:rPr sz="900" b="0" i="0">
-                <a:solidFill>
-                  <a:srgbClr val="78716C"/>
-                </a:solidFill>
-                <a:latin typeface="Calibri"/>
-              </a:rPr>
-              <a:t>Foreign exchange payments</a:t>
-            </a:r>
-          </a:p>
-        </p:txBody>
-      </p:sp>
-      <p:sp>
-        <p:nvSpPr>
-          <p:cNvPr id="38" name="Rectangle 37"/>
+          <p:cNvPr id="93" name="Rectangle 92"/>
           <p:cNvSpPr/>
           <p:nvPr/>
         </p:nvSpPr>
         <p:spPr>
           <a:xfrm>
-            <a:off x="457200" y="3694176"/>
-            <a:ext cx="3703320" cy="1024128"/>
-          </a:xfrm>
-          <a:prstGeom prst="rect">
-            <a:avLst/>
-          </a:prstGeom>
-          <a:solidFill>
-            <a:srgbClr val="FFFFFF"/>
-          </a:solidFill>
-          <a:ln w="9525">
-            <a:solidFill>
-              <a:srgbClr val="D6D3D1"/>
-            </a:solidFill>
+            <a:off x="3392424" y="2377440"/>
+            <a:ext cx="54864" cy="859536"/>
+          </a:xfrm>
+          <a:prstGeom prst="rect">
+            <a:avLst/>
+          </a:prstGeom>
+          <a:solidFill>
+            <a:srgbClr val="DA291C"/>
+          </a:solidFill>
+          <a:ln>
+            <a:noFill/>
           </a:ln>
+          <a:effectLst/>
         </p:spPr>
         <p:style>
           <a:lnRef idx="1">
@@ -21898,24 +21711,93 @@
       </p:sp>
       <p:sp>
         <p:nvSpPr>
-          <p:cNvPr id="39" name="Rectangle 38"/>
+          <p:cNvPr id="94" name="TextBox 93"/>
+          <p:cNvSpPr txBox="1"/>
+          <p:nvPr/>
+        </p:nvSpPr>
+        <p:spPr>
+          <a:xfrm>
+            <a:off x="3557016" y="2487168"/>
+            <a:ext cx="2423160" cy="256032"/>
+          </a:xfrm>
+          <a:prstGeom prst="rect">
+            <a:avLst/>
+          </a:prstGeom>
+          <a:noFill/>
+        </p:spPr>
+        <p:txBody>
+          <a:bodyPr wrap="square" lIns="12700" rIns="12700" tIns="0" bIns="0">
+            <a:spAutoFit/>
+          </a:bodyPr>
+          <a:lstStyle/>
+          <a:p>
+            <a:r>
+              <a:rPr sz="1050" b="1">
+                <a:solidFill>
+                  <a:srgbClr val="1C1917"/>
+                </a:solidFill>
+                <a:latin typeface="Consolas"/>
+              </a:rPr>
+              <a:t>renderFX</a:t>
+            </a:r>
+          </a:p>
+        </p:txBody>
+      </p:sp>
+      <p:sp>
+        <p:nvSpPr>
+          <p:cNvPr id="95" name="TextBox 94"/>
+          <p:cNvSpPr txBox="1"/>
+          <p:nvPr/>
+        </p:nvSpPr>
+        <p:spPr>
+          <a:xfrm>
+            <a:off x="3557016" y="2779776"/>
+            <a:ext cx="2423160" cy="402336"/>
+          </a:xfrm>
+          <a:prstGeom prst="rect">
+            <a:avLst/>
+          </a:prstGeom>
+          <a:noFill/>
+        </p:spPr>
+        <p:txBody>
+          <a:bodyPr wrap="square" lIns="12700" rIns="12700" tIns="0" bIns="0">
+            <a:spAutoFit/>
+          </a:bodyPr>
+          <a:lstStyle/>
+          <a:p>
+            <a:r>
+              <a:rPr sz="850" b="0">
+                <a:solidFill>
+                  <a:srgbClr val="78716C"/>
+                </a:solidFill>
+                <a:latin typeface="Calibri"/>
+              </a:rPr>
+              <a:t>Foreign exchange payments</a:t>
+            </a:r>
+          </a:p>
+        </p:txBody>
+      </p:sp>
+      <p:sp>
+        <p:nvSpPr>
+          <p:cNvPr id="96" name="Rectangle 95"/>
           <p:cNvSpPr/>
           <p:nvPr/>
         </p:nvSpPr>
         <p:spPr>
           <a:xfrm>
-            <a:off x="457200" y="3694176"/>
-            <a:ext cx="50292" cy="1024128"/>
-          </a:xfrm>
-          <a:prstGeom prst="rect">
-            <a:avLst/>
-          </a:prstGeom>
-          <a:solidFill>
-            <a:srgbClr val="DA291C"/>
+            <a:off x="6327648" y="2377440"/>
+            <a:ext cx="2697480" cy="859536"/>
+          </a:xfrm>
+          <a:prstGeom prst="rect">
+            <a:avLst/>
+          </a:prstGeom>
+          <a:solidFill>
+            <a:srgbClr val="FFFFFF"/>
           </a:solidFill>
           <a:ln>
             <a:noFill/>
           </a:ln>
+          <a:effectLst/>
         </p:spPr>
         <p:style>
           <a:lnRef idx="1">
@@ -21941,131 +21823,25 @@
       </p:sp>
       <p:sp>
         <p:nvSpPr>
-          <p:cNvPr id="40" name="TextBox 39"/>
-          <p:cNvSpPr txBox="1"/>
-          <p:nvPr/>
-        </p:nvSpPr>
-        <p:spPr>
-          <a:xfrm>
-            <a:off x="621792" y="3803904"/>
-            <a:ext cx="2697479" cy="274320"/>
-          </a:xfrm>
-          <a:prstGeom prst="rect">
-            <a:avLst/>
-          </a:prstGeom>
-          <a:noFill/>
-        </p:spPr>
-        <p:txBody>
-          <a:bodyPr wrap="square">
-            <a:noAutofit/>
-          </a:bodyPr>
-          <a:lstStyle/>
-          <a:p>
-            <a:pPr algn="l"/>
-            <a:r>
-              <a:rPr sz="1100" b="1" i="0">
-                <a:solidFill>
-                  <a:srgbClr val="1C1917"/>
-                </a:solidFill>
-                <a:latin typeface="Consolas"/>
-              </a:rPr>
-              <a:t>renderDormancy</a:t>
-            </a:r>
-          </a:p>
-        </p:txBody>
-      </p:sp>
-      <p:sp>
-        <p:nvSpPr>
-          <p:cNvPr id="41" name="TextBox 40"/>
-          <p:cNvSpPr txBox="1"/>
-          <p:nvPr/>
-        </p:nvSpPr>
-        <p:spPr>
-          <a:xfrm>
-            <a:off x="3291839" y="3803904"/>
-            <a:ext cx="777240" cy="237744"/>
-          </a:xfrm>
-          <a:prstGeom prst="rect">
-            <a:avLst/>
-          </a:prstGeom>
-          <a:noFill/>
-        </p:spPr>
-        <p:txBody>
-          <a:bodyPr wrap="square">
-            <a:noAutofit/>
-          </a:bodyPr>
-          <a:lstStyle/>
-          <a:p>
-            <a:pPr algn="r"/>
-            <a:r>
-              <a:rPr sz="850" b="1" i="0">
-                <a:solidFill>
-                  <a:srgbClr val="DA291C"/>
-                </a:solidFill>
-                <a:latin typeface="Calibri"/>
-              </a:rPr>
-              <a:t>~2149</a:t>
-            </a:r>
-          </a:p>
-        </p:txBody>
-      </p:sp>
-      <p:sp>
-        <p:nvSpPr>
-          <p:cNvPr id="42" name="TextBox 41"/>
-          <p:cNvSpPr txBox="1"/>
-          <p:nvPr/>
-        </p:nvSpPr>
-        <p:spPr>
-          <a:xfrm>
-            <a:off x="621792" y="4151376"/>
-            <a:ext cx="3429000" cy="457200"/>
-          </a:xfrm>
-          <a:prstGeom prst="rect">
-            <a:avLst/>
-          </a:prstGeom>
-          <a:noFill/>
-        </p:spPr>
-        <p:txBody>
-          <a:bodyPr wrap="square">
-            <a:noAutofit/>
-          </a:bodyPr>
-          <a:lstStyle/>
-          <a:p>
-            <a:pPr algn="l"/>
-            <a:r>
-              <a:rPr sz="900" b="0" i="0">
-                <a:solidFill>
-                  <a:srgbClr val="78716C"/>
-                </a:solidFill>
-                <a:latin typeface="Calibri"/>
-              </a:rPr>
-              <a:t>Dormant account reactivation</a:t>
-            </a:r>
-          </a:p>
-        </p:txBody>
-      </p:sp>
-      <p:sp>
-        <p:nvSpPr>
-          <p:cNvPr id="43" name="Rectangle 42"/>
+          <p:cNvPr id="97" name="Rectangle 96"/>
           <p:cNvSpPr/>
           <p:nvPr/>
         </p:nvSpPr>
         <p:spPr>
           <a:xfrm>
-            <a:off x="4370832" y="3694176"/>
-            <a:ext cx="3703320" cy="1024128"/>
-          </a:xfrm>
-          <a:prstGeom prst="rect">
-            <a:avLst/>
-          </a:prstGeom>
-          <a:solidFill>
-            <a:srgbClr val="FFFFFF"/>
-          </a:solidFill>
-          <a:ln w="9525">
-            <a:solidFill>
-              <a:srgbClr val="D6D3D1"/>
-            </a:solidFill>
+            <a:off x="6327648" y="2377440"/>
+            <a:ext cx="54864" cy="859536"/>
+          </a:xfrm>
+          <a:prstGeom prst="rect">
+            <a:avLst/>
+          </a:prstGeom>
+          <a:solidFill>
+            <a:srgbClr val="DA291C"/>
+          </a:solidFill>
+          <a:ln>
+            <a:noFill/>
           </a:ln>
+          <a:effectLst/>
         </p:spPr>
         <p:style>
           <a:lnRef idx="1">
@@ -22091,24 +21867,93 @@
       </p:sp>
       <p:sp>
         <p:nvSpPr>
-          <p:cNvPr id="44" name="Rectangle 43"/>
+          <p:cNvPr id="98" name="TextBox 97"/>
+          <p:cNvSpPr txBox="1"/>
+          <p:nvPr/>
+        </p:nvSpPr>
+        <p:spPr>
+          <a:xfrm>
+            <a:off x="6492240" y="2487168"/>
+            <a:ext cx="2423160" cy="256032"/>
+          </a:xfrm>
+          <a:prstGeom prst="rect">
+            <a:avLst/>
+          </a:prstGeom>
+          <a:noFill/>
+        </p:spPr>
+        <p:txBody>
+          <a:bodyPr wrap="square" lIns="12700" rIns="12700" tIns="0" bIns="0">
+            <a:spAutoFit/>
+          </a:bodyPr>
+          <a:lstStyle/>
+          <a:p>
+            <a:r>
+              <a:rPr sz="1050" b="1">
+                <a:solidFill>
+                  <a:srgbClr val="1C1917"/>
+                </a:solidFill>
+                <a:latin typeface="Consolas"/>
+              </a:rPr>
+              <a:t>renderDormancy</a:t>
+            </a:r>
+          </a:p>
+        </p:txBody>
+      </p:sp>
+      <p:sp>
+        <p:nvSpPr>
+          <p:cNvPr id="99" name="TextBox 98"/>
+          <p:cNvSpPr txBox="1"/>
+          <p:nvPr/>
+        </p:nvSpPr>
+        <p:spPr>
+          <a:xfrm>
+            <a:off x="6492240" y="2779776"/>
+            <a:ext cx="2423160" cy="402336"/>
+          </a:xfrm>
+          <a:prstGeom prst="rect">
+            <a:avLst/>
+          </a:prstGeom>
+          <a:noFill/>
+        </p:spPr>
+        <p:txBody>
+          <a:bodyPr wrap="square" lIns="12700" rIns="12700" tIns="0" bIns="0">
+            <a:spAutoFit/>
+          </a:bodyPr>
+          <a:lstStyle/>
+          <a:p>
+            <a:r>
+              <a:rPr sz="850" b="0">
+                <a:solidFill>
+                  <a:srgbClr val="78716C"/>
+                </a:solidFill>
+                <a:latin typeface="Calibri"/>
+              </a:rPr>
+              <a:t>Dormant account reactivation</a:t>
+            </a:r>
+          </a:p>
+        </p:txBody>
+      </p:sp>
+      <p:sp>
+        <p:nvSpPr>
+          <p:cNvPr id="100" name="Rectangle 99"/>
           <p:cNvSpPr/>
           <p:nvPr/>
         </p:nvSpPr>
         <p:spPr>
           <a:xfrm>
-            <a:off x="4370832" y="3694176"/>
-            <a:ext cx="50292" cy="1024128"/>
-          </a:xfrm>
-          <a:prstGeom prst="rect">
-            <a:avLst/>
-          </a:prstGeom>
-          <a:solidFill>
-            <a:srgbClr val="DA291C"/>
+            <a:off x="9262872" y="2377440"/>
+            <a:ext cx="2697480" cy="859536"/>
+          </a:xfrm>
+          <a:prstGeom prst="rect">
+            <a:avLst/>
+          </a:prstGeom>
+          <a:solidFill>
+            <a:srgbClr val="FFFFFF"/>
           </a:solidFill>
           <a:ln>
             <a:noFill/>
           </a:ln>
+          <a:effectLst/>
         </p:spPr>
         <p:style>
           <a:lnRef idx="1">
@@ -22134,131 +21979,25 @@
       </p:sp>
       <p:sp>
         <p:nvSpPr>
-          <p:cNvPr id="45" name="TextBox 44"/>
-          <p:cNvSpPr txBox="1"/>
-          <p:nvPr/>
-        </p:nvSpPr>
-        <p:spPr>
-          <a:xfrm>
-            <a:off x="4535424" y="3803904"/>
-            <a:ext cx="2697479" cy="274320"/>
-          </a:xfrm>
-          <a:prstGeom prst="rect">
-            <a:avLst/>
-          </a:prstGeom>
-          <a:noFill/>
-        </p:spPr>
-        <p:txBody>
-          <a:bodyPr wrap="square">
-            <a:noAutofit/>
-          </a:bodyPr>
-          <a:lstStyle/>
-          <a:p>
-            <a:pPr algn="l"/>
-            <a:r>
-              <a:rPr sz="1100" b="1" i="0">
-                <a:solidFill>
-                  <a:srgbClr val="1C1917"/>
-                </a:solidFill>
-                <a:latin typeface="Consolas"/>
-              </a:rPr>
-              <a:t>renderUnlink</a:t>
-            </a:r>
-          </a:p>
-        </p:txBody>
-      </p:sp>
-      <p:sp>
-        <p:nvSpPr>
-          <p:cNvPr id="46" name="TextBox 45"/>
-          <p:cNvSpPr txBox="1"/>
-          <p:nvPr/>
-        </p:nvSpPr>
-        <p:spPr>
-          <a:xfrm>
-            <a:off x="7205472" y="3803904"/>
-            <a:ext cx="777240" cy="237744"/>
-          </a:xfrm>
-          <a:prstGeom prst="rect">
-            <a:avLst/>
-          </a:prstGeom>
-          <a:noFill/>
-        </p:spPr>
-        <p:txBody>
-          <a:bodyPr wrap="square">
-            <a:noAutofit/>
-          </a:bodyPr>
-          <a:lstStyle/>
-          <a:p>
-            <a:pPr algn="r"/>
-            <a:r>
-              <a:rPr sz="850" b="1" i="0">
-                <a:solidFill>
-                  <a:srgbClr val="DA291C"/>
-                </a:solidFill>
-                <a:latin typeface="Calibri"/>
-              </a:rPr>
-              <a:t>~2177</a:t>
-            </a:r>
-          </a:p>
-        </p:txBody>
-      </p:sp>
-      <p:sp>
-        <p:nvSpPr>
-          <p:cNvPr id="47" name="TextBox 46"/>
-          <p:cNvSpPr txBox="1"/>
-          <p:nvPr/>
-        </p:nvSpPr>
-        <p:spPr>
-          <a:xfrm>
-            <a:off x="4535424" y="4151376"/>
-            <a:ext cx="3429000" cy="457200"/>
-          </a:xfrm>
-          <a:prstGeom prst="rect">
-            <a:avLst/>
-          </a:prstGeom>
-          <a:noFill/>
-        </p:spPr>
-        <p:txBody>
-          <a:bodyPr wrap="square">
-            <a:noAutofit/>
-          </a:bodyPr>
-          <a:lstStyle/>
-          <a:p>
-            <a:pPr algn="l"/>
-            <a:r>
-              <a:rPr sz="900" b="0" i="0">
-                <a:solidFill>
-                  <a:srgbClr val="78716C"/>
-                </a:solidFill>
-                <a:latin typeface="Calibri"/>
-              </a:rPr>
-              <a:t>Personal/business unlinking</a:t>
-            </a:r>
-          </a:p>
-        </p:txBody>
-      </p:sp>
-      <p:sp>
-        <p:nvSpPr>
-          <p:cNvPr id="48" name="Rectangle 47"/>
+          <p:cNvPr id="101" name="Rectangle 100"/>
           <p:cNvSpPr/>
           <p:nvPr/>
         </p:nvSpPr>
         <p:spPr>
           <a:xfrm>
-            <a:off x="8284464" y="3694176"/>
-            <a:ext cx="3703320" cy="1024128"/>
-          </a:xfrm>
-          <a:prstGeom prst="rect">
-            <a:avLst/>
-          </a:prstGeom>
-          <a:solidFill>
-            <a:srgbClr val="FFFFFF"/>
-          </a:solidFill>
-          <a:ln w="9525">
-            <a:solidFill>
-              <a:srgbClr val="D6D3D1"/>
-            </a:solidFill>
+            <a:off x="9262872" y="2377440"/>
+            <a:ext cx="54864" cy="859536"/>
+          </a:xfrm>
+          <a:prstGeom prst="rect">
+            <a:avLst/>
+          </a:prstGeom>
+          <a:solidFill>
+            <a:srgbClr val="DA291C"/>
+          </a:solidFill>
+          <a:ln>
+            <a:noFill/>
           </a:ln>
+          <a:effectLst/>
         </p:spPr>
         <p:style>
           <a:lnRef idx="1">
@@ -22284,24 +22023,93 @@
       </p:sp>
       <p:sp>
         <p:nvSpPr>
-          <p:cNvPr id="49" name="Rectangle 48"/>
+          <p:cNvPr id="102" name="TextBox 101"/>
+          <p:cNvSpPr txBox="1"/>
+          <p:nvPr/>
+        </p:nvSpPr>
+        <p:spPr>
+          <a:xfrm>
+            <a:off x="9427464" y="2487168"/>
+            <a:ext cx="2423160" cy="256032"/>
+          </a:xfrm>
+          <a:prstGeom prst="rect">
+            <a:avLst/>
+          </a:prstGeom>
+          <a:noFill/>
+        </p:spPr>
+        <p:txBody>
+          <a:bodyPr wrap="square" lIns="12700" rIns="12700" tIns="0" bIns="0">
+            <a:spAutoFit/>
+          </a:bodyPr>
+          <a:lstStyle/>
+          <a:p>
+            <a:r>
+              <a:rPr sz="1050" b="1">
+                <a:solidFill>
+                  <a:srgbClr val="1C1917"/>
+                </a:solidFill>
+                <a:latin typeface="Consolas"/>
+              </a:rPr>
+              <a:t>renderUnlink</a:t>
+            </a:r>
+          </a:p>
+        </p:txBody>
+      </p:sp>
+      <p:sp>
+        <p:nvSpPr>
+          <p:cNvPr id="103" name="TextBox 102"/>
+          <p:cNvSpPr txBox="1"/>
+          <p:nvPr/>
+        </p:nvSpPr>
+        <p:spPr>
+          <a:xfrm>
+            <a:off x="9427464" y="2779776"/>
+            <a:ext cx="2423160" cy="402336"/>
+          </a:xfrm>
+          <a:prstGeom prst="rect">
+            <a:avLst/>
+          </a:prstGeom>
+          <a:noFill/>
+        </p:spPr>
+        <p:txBody>
+          <a:bodyPr wrap="square" lIns="12700" rIns="12700" tIns="0" bIns="0">
+            <a:spAutoFit/>
+          </a:bodyPr>
+          <a:lstStyle/>
+          <a:p>
+            <a:r>
+              <a:rPr sz="850" b="0">
+                <a:solidFill>
+                  <a:srgbClr val="78716C"/>
+                </a:solidFill>
+                <a:latin typeface="Calibri"/>
+              </a:rPr>
+              <a:t>Personal/business unlinking</a:t>
+            </a:r>
+          </a:p>
+        </p:txBody>
+      </p:sp>
+      <p:sp>
+        <p:nvSpPr>
+          <p:cNvPr id="104" name="Rectangle 103"/>
           <p:cNvSpPr/>
           <p:nvPr/>
         </p:nvSpPr>
         <p:spPr>
           <a:xfrm>
-            <a:off x="8284464" y="3694176"/>
-            <a:ext cx="50292" cy="1024128"/>
-          </a:xfrm>
-          <a:prstGeom prst="rect">
-            <a:avLst/>
-          </a:prstGeom>
-          <a:solidFill>
-            <a:srgbClr val="DA291C"/>
+            <a:off x="457200" y="3383280"/>
+            <a:ext cx="2697480" cy="859536"/>
+          </a:xfrm>
+          <a:prstGeom prst="rect">
+            <a:avLst/>
+          </a:prstGeom>
+          <a:solidFill>
+            <a:srgbClr val="FFFFFF"/>
           </a:solidFill>
           <a:ln>
             <a:noFill/>
           </a:ln>
+          <a:effectLst/>
         </p:spPr>
         <p:style>
           <a:lnRef idx="1">
@@ -22327,131 +22135,25 @@
       </p:sp>
       <p:sp>
         <p:nvSpPr>
-          <p:cNvPr id="50" name="TextBox 49"/>
-          <p:cNvSpPr txBox="1"/>
-          <p:nvPr/>
-        </p:nvSpPr>
-        <p:spPr>
-          <a:xfrm>
-            <a:off x="8449056" y="3803904"/>
-            <a:ext cx="2697479" cy="274320"/>
-          </a:xfrm>
-          <a:prstGeom prst="rect">
-            <a:avLst/>
-          </a:prstGeom>
-          <a:noFill/>
-        </p:spPr>
-        <p:txBody>
-          <a:bodyPr wrap="square">
-            <a:noAutofit/>
-          </a:bodyPr>
-          <a:lstStyle/>
-          <a:p>
-            <a:pPr algn="l"/>
-            <a:r>
-              <a:rPr sz="1100" b="1" i="0">
-                <a:solidFill>
-                  <a:srgbClr val="1C1917"/>
-                </a:solidFill>
-                <a:latin typeface="Consolas"/>
-              </a:rPr>
-              <a:t>renderRingfence</a:t>
-            </a:r>
-          </a:p>
-        </p:txBody>
-      </p:sp>
-      <p:sp>
-        <p:nvSpPr>
-          <p:cNvPr id="51" name="TextBox 50"/>
-          <p:cNvSpPr txBox="1"/>
-          <p:nvPr/>
-        </p:nvSpPr>
-        <p:spPr>
-          <a:xfrm>
-            <a:off x="11119104" y="3803904"/>
-            <a:ext cx="777240" cy="237744"/>
-          </a:xfrm>
-          <a:prstGeom prst="rect">
-            <a:avLst/>
-          </a:prstGeom>
-          <a:noFill/>
-        </p:spPr>
-        <p:txBody>
-          <a:bodyPr wrap="square">
-            <a:noAutofit/>
-          </a:bodyPr>
-          <a:lstStyle/>
-          <a:p>
-            <a:pPr algn="r"/>
-            <a:r>
-              <a:rPr sz="850" b="1" i="0">
-                <a:solidFill>
-                  <a:srgbClr val="DA291C"/>
-                </a:solidFill>
-                <a:latin typeface="Calibri"/>
-              </a:rPr>
-              <a:t>~2310</a:t>
-            </a:r>
-          </a:p>
-        </p:txBody>
-      </p:sp>
-      <p:sp>
-        <p:nvSpPr>
-          <p:cNvPr id="52" name="TextBox 51"/>
-          <p:cNvSpPr txBox="1"/>
-          <p:nvPr/>
-        </p:nvSpPr>
-        <p:spPr>
-          <a:xfrm>
-            <a:off x="8449056" y="4151376"/>
-            <a:ext cx="3429000" cy="457200"/>
-          </a:xfrm>
-          <a:prstGeom prst="rect">
-            <a:avLst/>
-          </a:prstGeom>
-          <a:noFill/>
-        </p:spPr>
-        <p:txBody>
-          <a:bodyPr wrap="square">
-            <a:noAutofit/>
-          </a:bodyPr>
-          <a:lstStyle/>
-          <a:p>
-            <a:pPr algn="l"/>
-            <a:r>
-              <a:rPr sz="900" b="0" i="0">
-                <a:solidFill>
-                  <a:srgbClr val="78716C"/>
-                </a:solidFill>
-                <a:latin typeface="Calibri"/>
-              </a:rPr>
-              <a:t>Credit ring-fencing</a:t>
-            </a:r>
-          </a:p>
-        </p:txBody>
-      </p:sp>
-      <p:sp>
-        <p:nvSpPr>
-          <p:cNvPr id="53" name="Rectangle 52"/>
+          <p:cNvPr id="105" name="Rectangle 104"/>
           <p:cNvSpPr/>
           <p:nvPr/>
         </p:nvSpPr>
         <p:spPr>
           <a:xfrm>
-            <a:off x="457200" y="4855464"/>
-            <a:ext cx="3703320" cy="1024128"/>
-          </a:xfrm>
-          <a:prstGeom prst="rect">
-            <a:avLst/>
-          </a:prstGeom>
-          <a:solidFill>
-            <a:srgbClr val="FFFFFF"/>
-          </a:solidFill>
-          <a:ln w="9525">
-            <a:solidFill>
-              <a:srgbClr val="D6D3D1"/>
-            </a:solidFill>
+            <a:off x="457200" y="3383280"/>
+            <a:ext cx="54864" cy="859536"/>
+          </a:xfrm>
+          <a:prstGeom prst="rect">
+            <a:avLst/>
+          </a:prstGeom>
+          <a:solidFill>
+            <a:srgbClr val="DA291C"/>
+          </a:solidFill>
+          <a:ln>
+            <a:noFill/>
           </a:ln>
+          <a:effectLst/>
         </p:spPr>
         <p:style>
           <a:lnRef idx="1">
@@ -22477,24 +22179,93 @@
       </p:sp>
       <p:sp>
         <p:nvSpPr>
-          <p:cNvPr id="54" name="Rectangle 53"/>
+          <p:cNvPr id="106" name="TextBox 105"/>
+          <p:cNvSpPr txBox="1"/>
+          <p:nvPr/>
+        </p:nvSpPr>
+        <p:spPr>
+          <a:xfrm>
+            <a:off x="621792" y="3493008"/>
+            <a:ext cx="2423160" cy="256032"/>
+          </a:xfrm>
+          <a:prstGeom prst="rect">
+            <a:avLst/>
+          </a:prstGeom>
+          <a:noFill/>
+        </p:spPr>
+        <p:txBody>
+          <a:bodyPr wrap="square" lIns="12700" rIns="12700" tIns="0" bIns="0">
+            <a:spAutoFit/>
+          </a:bodyPr>
+          <a:lstStyle/>
+          <a:p>
+            <a:r>
+              <a:rPr sz="1050" b="1">
+                <a:solidFill>
+                  <a:srgbClr val="1C1917"/>
+                </a:solidFill>
+                <a:latin typeface="Consolas"/>
+              </a:rPr>
+              <a:t>renderRingfence</a:t>
+            </a:r>
+          </a:p>
+        </p:txBody>
+      </p:sp>
+      <p:sp>
+        <p:nvSpPr>
+          <p:cNvPr id="107" name="TextBox 106"/>
+          <p:cNvSpPr txBox="1"/>
+          <p:nvPr/>
+        </p:nvSpPr>
+        <p:spPr>
+          <a:xfrm>
+            <a:off x="621792" y="3785616"/>
+            <a:ext cx="2423160" cy="402336"/>
+          </a:xfrm>
+          <a:prstGeom prst="rect">
+            <a:avLst/>
+          </a:prstGeom>
+          <a:noFill/>
+        </p:spPr>
+        <p:txBody>
+          <a:bodyPr wrap="square" lIns="12700" rIns="12700" tIns="0" bIns="0">
+            <a:spAutoFit/>
+          </a:bodyPr>
+          <a:lstStyle/>
+          <a:p>
+            <a:r>
+              <a:rPr sz="850" b="0">
+                <a:solidFill>
+                  <a:srgbClr val="78716C"/>
+                </a:solidFill>
+                <a:latin typeface="Calibri"/>
+              </a:rPr>
+              <a:t>Credit ring-fencing</a:t>
+            </a:r>
+          </a:p>
+        </p:txBody>
+      </p:sp>
+      <p:sp>
+        <p:nvSpPr>
+          <p:cNvPr id="108" name="Rectangle 107"/>
           <p:cNvSpPr/>
           <p:nvPr/>
         </p:nvSpPr>
         <p:spPr>
           <a:xfrm>
-            <a:off x="457200" y="4855464"/>
-            <a:ext cx="50292" cy="1024128"/>
-          </a:xfrm>
-          <a:prstGeom prst="rect">
-            <a:avLst/>
-          </a:prstGeom>
-          <a:solidFill>
-            <a:srgbClr val="DA291C"/>
+            <a:off x="3392424" y="3383280"/>
+            <a:ext cx="2697480" cy="859536"/>
+          </a:xfrm>
+          <a:prstGeom prst="rect">
+            <a:avLst/>
+          </a:prstGeom>
+          <a:solidFill>
+            <a:srgbClr val="FFFFFF"/>
           </a:solidFill>
           <a:ln>
             <a:noFill/>
           </a:ln>
+          <a:effectLst/>
         </p:spPr>
         <p:style>
           <a:lnRef idx="1">
@@ -22520,131 +22291,25 @@
       </p:sp>
       <p:sp>
         <p:nvSpPr>
-          <p:cNvPr id="55" name="TextBox 54"/>
-          <p:cNvSpPr txBox="1"/>
-          <p:nvPr/>
-        </p:nvSpPr>
-        <p:spPr>
-          <a:xfrm>
-            <a:off x="621792" y="4965192"/>
-            <a:ext cx="2697479" cy="274320"/>
-          </a:xfrm>
-          <a:prstGeom prst="rect">
-            <a:avLst/>
-          </a:prstGeom>
-          <a:noFill/>
-        </p:spPr>
-        <p:txBody>
-          <a:bodyPr wrap="square">
-            <a:noAutofit/>
-          </a:bodyPr>
-          <a:lstStyle/>
-          <a:p>
-            <a:pPr algn="l"/>
-            <a:r>
-              <a:rPr sz="1100" b="1" i="0">
-                <a:solidFill>
-                  <a:srgbClr val="1C1917"/>
-                </a:solidFill>
-                <a:latin typeface="Consolas"/>
-              </a:rPr>
-              <a:t>renderIdCheck</a:t>
-            </a:r>
-          </a:p>
-        </p:txBody>
-      </p:sp>
-      <p:sp>
-        <p:nvSpPr>
-          <p:cNvPr id="56" name="TextBox 55"/>
-          <p:cNvSpPr txBox="1"/>
-          <p:nvPr/>
-        </p:nvSpPr>
-        <p:spPr>
-          <a:xfrm>
-            <a:off x="3291839" y="4965192"/>
-            <a:ext cx="777240" cy="237744"/>
-          </a:xfrm>
-          <a:prstGeom prst="rect">
-            <a:avLst/>
-          </a:prstGeom>
-          <a:noFill/>
-        </p:spPr>
-        <p:txBody>
-          <a:bodyPr wrap="square">
-            <a:noAutofit/>
-          </a:bodyPr>
-          <a:lstStyle/>
-          <a:p>
-            <a:pPr algn="r"/>
-            <a:r>
-              <a:rPr sz="850" b="1" i="0">
-                <a:solidFill>
-                  <a:srgbClr val="DA291C"/>
-                </a:solidFill>
-                <a:latin typeface="Calibri"/>
-              </a:rPr>
-              <a:t>~2390</a:t>
-            </a:r>
-          </a:p>
-        </p:txBody>
-      </p:sp>
-      <p:sp>
-        <p:nvSpPr>
-          <p:cNvPr id="57" name="TextBox 56"/>
-          <p:cNvSpPr txBox="1"/>
-          <p:nvPr/>
-        </p:nvSpPr>
-        <p:spPr>
-          <a:xfrm>
-            <a:off x="621792" y="5312664"/>
-            <a:ext cx="3429000" cy="457200"/>
-          </a:xfrm>
-          <a:prstGeom prst="rect">
-            <a:avLst/>
-          </a:prstGeom>
-          <a:noFill/>
-        </p:spPr>
-        <p:txBody>
-          <a:bodyPr wrap="square">
-            <a:noAutofit/>
-          </a:bodyPr>
-          <a:lstStyle/>
-          <a:p>
-            <a:pPr algn="l"/>
-            <a:r>
-              <a:rPr sz="900" b="0" i="0">
-                <a:solidFill>
-                  <a:srgbClr val="78716C"/>
-                </a:solidFill>
-                <a:latin typeface="Calibri"/>
-              </a:rPr>
-              <a:t>Identity / Voice ID checks</a:t>
-            </a:r>
-          </a:p>
-        </p:txBody>
-      </p:sp>
-      <p:sp>
-        <p:nvSpPr>
-          <p:cNvPr id="58" name="Rectangle 57"/>
+          <p:cNvPr id="109" name="Rectangle 108"/>
           <p:cNvSpPr/>
           <p:nvPr/>
         </p:nvSpPr>
         <p:spPr>
           <a:xfrm>
-            <a:off x="4370832" y="4855464"/>
-            <a:ext cx="3703320" cy="1024128"/>
-          </a:xfrm>
-          <a:prstGeom prst="rect">
-            <a:avLst/>
-          </a:prstGeom>
-          <a:solidFill>
-            <a:srgbClr val="FFFFFF"/>
-          </a:solidFill>
-          <a:ln w="9525">
-            <a:solidFill>
-              <a:srgbClr val="D6D3D1"/>
-            </a:solidFill>
+            <a:off x="3392424" y="3383280"/>
+            <a:ext cx="54864" cy="859536"/>
+          </a:xfrm>
+          <a:prstGeom prst="rect">
+            <a:avLst/>
+          </a:prstGeom>
+          <a:solidFill>
+            <a:srgbClr val="DA291C"/>
+          </a:solidFill>
+          <a:ln>
+            <a:noFill/>
           </a:ln>
+          <a:effectLst/>
         </p:spPr>
         <p:style>
           <a:lnRef idx="1">
@@ -22670,24 +22335,93 @@
       </p:sp>
       <p:sp>
         <p:nvSpPr>
-          <p:cNvPr id="59" name="Rectangle 58"/>
+          <p:cNvPr id="110" name="TextBox 109"/>
+          <p:cNvSpPr txBox="1"/>
+          <p:nvPr/>
+        </p:nvSpPr>
+        <p:spPr>
+          <a:xfrm>
+            <a:off x="3557016" y="3493008"/>
+            <a:ext cx="2423160" cy="256032"/>
+          </a:xfrm>
+          <a:prstGeom prst="rect">
+            <a:avLst/>
+          </a:prstGeom>
+          <a:noFill/>
+        </p:spPr>
+        <p:txBody>
+          <a:bodyPr wrap="square" lIns="12700" rIns="12700" tIns="0" bIns="0">
+            <a:spAutoFit/>
+          </a:bodyPr>
+          <a:lstStyle/>
+          <a:p>
+            <a:r>
+              <a:rPr sz="1050" b="1">
+                <a:solidFill>
+                  <a:srgbClr val="1C1917"/>
+                </a:solidFill>
+                <a:latin typeface="Consolas"/>
+              </a:rPr>
+              <a:t>renderIdCheck</a:t>
+            </a:r>
+          </a:p>
+        </p:txBody>
+      </p:sp>
+      <p:sp>
+        <p:nvSpPr>
+          <p:cNvPr id="111" name="TextBox 110"/>
+          <p:cNvSpPr txBox="1"/>
+          <p:nvPr/>
+        </p:nvSpPr>
+        <p:spPr>
+          <a:xfrm>
+            <a:off x="3557016" y="3785616"/>
+            <a:ext cx="2423160" cy="402336"/>
+          </a:xfrm>
+          <a:prstGeom prst="rect">
+            <a:avLst/>
+          </a:prstGeom>
+          <a:noFill/>
+        </p:spPr>
+        <p:txBody>
+          <a:bodyPr wrap="square" lIns="12700" rIns="12700" tIns="0" bIns="0">
+            <a:spAutoFit/>
+          </a:bodyPr>
+          <a:lstStyle/>
+          <a:p>
+            <a:r>
+              <a:rPr sz="850" b="0">
+                <a:solidFill>
+                  <a:srgbClr val="78716C"/>
+                </a:solidFill>
+                <a:latin typeface="Calibri"/>
+              </a:rPr>
+              <a:t>Identity / Voice ID checks</a:t>
+            </a:r>
+          </a:p>
+        </p:txBody>
+      </p:sp>
+      <p:sp>
+        <p:nvSpPr>
+          <p:cNvPr id="112" name="Rectangle 111"/>
           <p:cNvSpPr/>
           <p:nvPr/>
         </p:nvSpPr>
         <p:spPr>
           <a:xfrm>
-            <a:off x="4370832" y="4855464"/>
-            <a:ext cx="50292" cy="1024128"/>
-          </a:xfrm>
-          <a:prstGeom prst="rect">
-            <a:avLst/>
-          </a:prstGeom>
-          <a:solidFill>
-            <a:srgbClr val="DA291C"/>
+            <a:off x="6327648" y="3383280"/>
+            <a:ext cx="2697480" cy="859536"/>
+          </a:xfrm>
+          <a:prstGeom prst="rect">
+            <a:avLst/>
+          </a:prstGeom>
+          <a:solidFill>
+            <a:srgbClr val="FFFFFF"/>
           </a:solidFill>
           <a:ln>
             <a:noFill/>
           </a:ln>
+          <a:effectLst/>
         </p:spPr>
         <p:style>
           <a:lnRef idx="1">
@@ -22713,131 +22447,25 @@
       </p:sp>
       <p:sp>
         <p:nvSpPr>
-          <p:cNvPr id="60" name="TextBox 59"/>
-          <p:cNvSpPr txBox="1"/>
-          <p:nvPr/>
-        </p:nvSpPr>
-        <p:spPr>
-          <a:xfrm>
-            <a:off x="4535424" y="4965192"/>
-            <a:ext cx="2697479" cy="274320"/>
-          </a:xfrm>
-          <a:prstGeom prst="rect">
-            <a:avLst/>
-          </a:prstGeom>
-          <a:noFill/>
-        </p:spPr>
-        <p:txBody>
-          <a:bodyPr wrap="square">
-            <a:noAutofit/>
-          </a:bodyPr>
-          <a:lstStyle/>
-          <a:p>
-            <a:pPr algn="l"/>
-            <a:r>
-              <a:rPr sz="1100" b="1" i="0">
-                <a:solidFill>
-                  <a:srgbClr val="1C1917"/>
-                </a:solidFill>
-                <a:latin typeface="Consolas"/>
-              </a:rPr>
-              <a:t>renderMtdSubmit</a:t>
-            </a:r>
-          </a:p>
-        </p:txBody>
-      </p:sp>
-      <p:sp>
-        <p:nvSpPr>
-          <p:cNvPr id="61" name="TextBox 60"/>
-          <p:cNvSpPr txBox="1"/>
-          <p:nvPr/>
-        </p:nvSpPr>
-        <p:spPr>
-          <a:xfrm>
-            <a:off x="7205472" y="4965192"/>
-            <a:ext cx="777240" cy="237744"/>
-          </a:xfrm>
-          <a:prstGeom prst="rect">
-            <a:avLst/>
-          </a:prstGeom>
-          <a:noFill/>
-        </p:spPr>
-        <p:txBody>
-          <a:bodyPr wrap="square">
-            <a:noAutofit/>
-          </a:bodyPr>
-          <a:lstStyle/>
-          <a:p>
-            <a:pPr algn="r"/>
-            <a:r>
-              <a:rPr sz="850" b="1" i="0">
-                <a:solidFill>
-                  <a:srgbClr val="DA291C"/>
-                </a:solidFill>
-                <a:latin typeface="Calibri"/>
-              </a:rPr>
-              <a:t>~4998</a:t>
-            </a:r>
-          </a:p>
-        </p:txBody>
-      </p:sp>
-      <p:sp>
-        <p:nvSpPr>
-          <p:cNvPr id="62" name="TextBox 61"/>
-          <p:cNvSpPr txBox="1"/>
-          <p:nvPr/>
-        </p:nvSpPr>
-        <p:spPr>
-          <a:xfrm>
-            <a:off x="4535424" y="5312664"/>
-            <a:ext cx="3429000" cy="457200"/>
-          </a:xfrm>
-          <a:prstGeom prst="rect">
-            <a:avLst/>
-          </a:prstGeom>
-          <a:noFill/>
-        </p:spPr>
-        <p:txBody>
-          <a:bodyPr wrap="square">
-            <a:noAutofit/>
-          </a:bodyPr>
-          <a:lstStyle/>
-          <a:p>
-            <a:pPr algn="l"/>
-            <a:r>
-              <a:rPr sz="900" b="0" i="0">
-                <a:solidFill>
-                  <a:srgbClr val="78716C"/>
-                </a:solidFill>
-                <a:latin typeface="Calibri"/>
-              </a:rPr>
-              <a:t>Making Tax Digital submission</a:t>
-            </a:r>
-          </a:p>
-        </p:txBody>
-      </p:sp>
-      <p:sp>
-        <p:nvSpPr>
-          <p:cNvPr id="63" name="Rectangle 62"/>
+          <p:cNvPr id="113" name="Rectangle 112"/>
           <p:cNvSpPr/>
           <p:nvPr/>
         </p:nvSpPr>
         <p:spPr>
           <a:xfrm>
-            <a:off x="8284464" y="4855464"/>
-            <a:ext cx="3703320" cy="1024128"/>
-          </a:xfrm>
-          <a:prstGeom prst="rect">
-            <a:avLst/>
-          </a:prstGeom>
-          <a:solidFill>
-            <a:srgbClr val="FFFFFF"/>
-          </a:solidFill>
-          <a:ln w="9525">
-            <a:solidFill>
-              <a:srgbClr val="D6D3D1"/>
-            </a:solidFill>
+            <a:off x="6327648" y="3383280"/>
+            <a:ext cx="54864" cy="859536"/>
+          </a:xfrm>
+          <a:prstGeom prst="rect">
+            <a:avLst/>
+          </a:prstGeom>
+          <a:solidFill>
+            <a:srgbClr val="DA291C"/>
+          </a:solidFill>
+          <a:ln>
+            <a:noFill/>
           </a:ln>
+          <a:effectLst/>
         </p:spPr>
         <p:style>
           <a:lnRef idx="1">
@@ -22863,24 +22491,93 @@
       </p:sp>
       <p:sp>
         <p:nvSpPr>
-          <p:cNvPr id="64" name="Rectangle 63"/>
+          <p:cNvPr id="114" name="TextBox 113"/>
+          <p:cNvSpPr txBox="1"/>
+          <p:nvPr/>
+        </p:nvSpPr>
+        <p:spPr>
+          <a:xfrm>
+            <a:off x="6492240" y="3493008"/>
+            <a:ext cx="2423160" cy="256032"/>
+          </a:xfrm>
+          <a:prstGeom prst="rect">
+            <a:avLst/>
+          </a:prstGeom>
+          <a:noFill/>
+        </p:spPr>
+        <p:txBody>
+          <a:bodyPr wrap="square" lIns="12700" rIns="12700" tIns="0" bIns="0">
+            <a:spAutoFit/>
+          </a:bodyPr>
+          <a:lstStyle/>
+          <a:p>
+            <a:r>
+              <a:rPr sz="1050" b="1">
+                <a:solidFill>
+                  <a:srgbClr val="1C1917"/>
+                </a:solidFill>
+                <a:latin typeface="Consolas"/>
+              </a:rPr>
+              <a:t>renderMtdSubmit</a:t>
+            </a:r>
+          </a:p>
+        </p:txBody>
+      </p:sp>
+      <p:sp>
+        <p:nvSpPr>
+          <p:cNvPr id="115" name="TextBox 114"/>
+          <p:cNvSpPr txBox="1"/>
+          <p:nvPr/>
+        </p:nvSpPr>
+        <p:spPr>
+          <a:xfrm>
+            <a:off x="6492240" y="3785616"/>
+            <a:ext cx="2423160" cy="402336"/>
+          </a:xfrm>
+          <a:prstGeom prst="rect">
+            <a:avLst/>
+          </a:prstGeom>
+          <a:noFill/>
+        </p:spPr>
+        <p:txBody>
+          <a:bodyPr wrap="square" lIns="12700" rIns="12700" tIns="0" bIns="0">
+            <a:spAutoFit/>
+          </a:bodyPr>
+          <a:lstStyle/>
+          <a:p>
+            <a:r>
+              <a:rPr sz="850" b="0">
+                <a:solidFill>
+                  <a:srgbClr val="78716C"/>
+                </a:solidFill>
+                <a:latin typeface="Calibri"/>
+              </a:rPr>
+              <a:t>Making Tax Digital submission</a:t>
+            </a:r>
+          </a:p>
+        </p:txBody>
+      </p:sp>
+      <p:sp>
+        <p:nvSpPr>
+          <p:cNvPr id="116" name="Rectangle 115"/>
           <p:cNvSpPr/>
           <p:nvPr/>
         </p:nvSpPr>
         <p:spPr>
           <a:xfrm>
-            <a:off x="8284464" y="4855464"/>
-            <a:ext cx="50292" cy="1024128"/>
-          </a:xfrm>
-          <a:prstGeom prst="rect">
-            <a:avLst/>
-          </a:prstGeom>
-          <a:solidFill>
-            <a:srgbClr val="DA291C"/>
+            <a:off x="9262872" y="3383280"/>
+            <a:ext cx="2697480" cy="859536"/>
+          </a:xfrm>
+          <a:prstGeom prst="rect">
+            <a:avLst/>
+          </a:prstGeom>
+          <a:solidFill>
+            <a:srgbClr val="FFFFFF"/>
           </a:solidFill>
           <a:ln>
             <a:noFill/>
           </a:ln>
+          <a:effectLst/>
         </p:spPr>
         <p:style>
           <a:lnRef idx="1">
@@ -22906,129 +22603,25 @@
       </p:sp>
       <p:sp>
         <p:nvSpPr>
-          <p:cNvPr id="65" name="TextBox 64"/>
-          <p:cNvSpPr txBox="1"/>
-          <p:nvPr/>
-        </p:nvSpPr>
-        <p:spPr>
-          <a:xfrm>
-            <a:off x="8449056" y="4965192"/>
-            <a:ext cx="2697479" cy="274320"/>
-          </a:xfrm>
-          <a:prstGeom prst="rect">
-            <a:avLst/>
-          </a:prstGeom>
-          <a:noFill/>
-        </p:spPr>
-        <p:txBody>
-          <a:bodyPr wrap="square">
-            <a:noAutofit/>
-          </a:bodyPr>
-          <a:lstStyle/>
-          <a:p>
-            <a:pPr algn="l"/>
-            <a:r>
-              <a:rPr sz="1100" b="1" i="0">
-                <a:solidFill>
-                  <a:srgbClr val="1C1917"/>
-                </a:solidFill>
-                <a:latin typeface="Consolas"/>
-              </a:rPr>
-              <a:t>renderComplaint</a:t>
-            </a:r>
-          </a:p>
-        </p:txBody>
-      </p:sp>
-      <p:sp>
-        <p:nvSpPr>
-          <p:cNvPr id="66" name="TextBox 65"/>
-          <p:cNvSpPr txBox="1"/>
-          <p:nvPr/>
-        </p:nvSpPr>
-        <p:spPr>
-          <a:xfrm>
-            <a:off x="11119104" y="4965192"/>
-            <a:ext cx="777240" cy="237744"/>
-          </a:xfrm>
-          <a:prstGeom prst="rect">
-            <a:avLst/>
-          </a:prstGeom>
-          <a:noFill/>
-        </p:spPr>
-        <p:txBody>
-          <a:bodyPr wrap="square">
-            <a:noAutofit/>
-          </a:bodyPr>
-          <a:lstStyle/>
-          <a:p>
-            <a:pPr algn="r"/>
-            <a:r>
-              <a:rPr sz="850" b="1" i="0">
-                <a:solidFill>
-                  <a:srgbClr val="DA291C"/>
-                </a:solidFill>
-                <a:latin typeface="Calibri"/>
-              </a:rPr>
-              <a:t>new</a:t>
-            </a:r>
-          </a:p>
-        </p:txBody>
-      </p:sp>
-      <p:sp>
-        <p:nvSpPr>
-          <p:cNvPr id="67" name="TextBox 66"/>
-          <p:cNvSpPr txBox="1"/>
-          <p:nvPr/>
-        </p:nvSpPr>
-        <p:spPr>
-          <a:xfrm>
-            <a:off x="8449056" y="5312664"/>
-            <a:ext cx="3429000" cy="457200"/>
-          </a:xfrm>
-          <a:prstGeom prst="rect">
-            <a:avLst/>
-          </a:prstGeom>
-          <a:noFill/>
-        </p:spPr>
-        <p:txBody>
-          <a:bodyPr wrap="square">
-            <a:noAutofit/>
-          </a:bodyPr>
-          <a:lstStyle/>
-          <a:p>
-            <a:pPr algn="l"/>
-            <a:r>
-              <a:rPr sz="900" b="0" i="0">
-                <a:solidFill>
-                  <a:srgbClr val="78716C"/>
-                </a:solidFill>
-                <a:latin typeface="Calibri"/>
-              </a:rPr>
-              <a:t>FCA DISP complaint handling</a:t>
-            </a:r>
-          </a:p>
-        </p:txBody>
-      </p:sp>
-      <p:sp>
-        <p:nvSpPr>
-          <p:cNvPr id="68" name="Rectangle 67"/>
+          <p:cNvPr id="117" name="Rectangle 116"/>
           <p:cNvSpPr/>
           <p:nvPr/>
         </p:nvSpPr>
         <p:spPr>
           <a:xfrm>
-            <a:off x="0" y="6601968"/>
-            <a:ext cx="12188952" cy="256032"/>
-          </a:xfrm>
-          <a:prstGeom prst="rect">
-            <a:avLst/>
-          </a:prstGeom>
-          <a:solidFill>
-            <a:srgbClr val="1C1917"/>
+            <a:off x="9262872" y="3383280"/>
+            <a:ext cx="54864" cy="859536"/>
+          </a:xfrm>
+          <a:prstGeom prst="rect">
+            <a:avLst/>
+          </a:prstGeom>
+          <a:solidFill>
+            <a:srgbClr val="DA291C"/>
           </a:solidFill>
           <a:ln>
             <a:noFill/>
           </a:ln>
+          <a:effectLst/>
         </p:spPr>
         <p:style>
           <a:lnRef idx="1">
@@ -23054,105 +22647,848 @@
       </p:sp>
       <p:sp>
         <p:nvSpPr>
-          <p:cNvPr id="69" name="TextBox 68"/>
-          <p:cNvSpPr txBox="1"/>
-          <p:nvPr/>
-        </p:nvSpPr>
-        <p:spPr>
-          <a:xfrm>
-            <a:off x="457200" y="6620256"/>
-            <a:ext cx="2743200" cy="201168"/>
-          </a:xfrm>
-          <a:prstGeom prst="rect">
-            <a:avLst/>
-          </a:prstGeom>
-          <a:noFill/>
-        </p:spPr>
-        <p:txBody>
-          <a:bodyPr wrap="square">
-            <a:noAutofit/>
-          </a:bodyPr>
-          <a:lstStyle/>
-          <a:p>
-            <a:pPr algn="l"/>
-            <a:r>
-              <a:rPr sz="800" b="1" i="0">
-                <a:solidFill>
-                  <a:srgbClr val="FECACA"/>
-                </a:solidFill>
-                <a:latin typeface="Calibri"/>
-              </a:rPr>
-              <a:t>INTERNAL · CONFIDENTIAL</a:t>
-            </a:r>
-          </a:p>
-        </p:txBody>
-      </p:sp>
-      <p:sp>
-        <p:nvSpPr>
-          <p:cNvPr id="70" name="TextBox 69"/>
-          <p:cNvSpPr txBox="1"/>
-          <p:nvPr/>
-        </p:nvSpPr>
-        <p:spPr>
-          <a:xfrm>
-            <a:off x="3200400" y="6620256"/>
-            <a:ext cx="7863840" cy="201168"/>
-          </a:xfrm>
-          <a:prstGeom prst="rect">
-            <a:avLst/>
-          </a:prstGeom>
-          <a:noFill/>
-        </p:spPr>
-        <p:txBody>
-          <a:bodyPr wrap="square">
-            <a:noAutofit/>
-          </a:bodyPr>
-          <a:lstStyle/>
-          <a:p>
-            <a:pPr algn="r"/>
-            <a:r>
-              <a:rPr sz="800" b="0" i="1">
-                <a:solidFill>
-                  <a:srgbClr val="D6D3D1"/>
-                </a:solidFill>
-                <a:latin typeface="Calibri"/>
-              </a:rPr>
-              <a:t>Alan Davidson · Business Banking Advisor · Self-initiated · Own time · June 2026</a:t>
-            </a:r>
-          </a:p>
-        </p:txBody>
-      </p:sp>
-      <p:sp>
-        <p:nvSpPr>
-          <p:cNvPr id="71" name="TextBox 70"/>
-          <p:cNvSpPr txBox="1"/>
-          <p:nvPr/>
-        </p:nvSpPr>
-        <p:spPr>
-          <a:xfrm>
-            <a:off x="11750040" y="6620256"/>
-            <a:ext cx="365760" cy="201168"/>
-          </a:xfrm>
-          <a:prstGeom prst="rect">
-            <a:avLst/>
-          </a:prstGeom>
-          <a:noFill/>
-        </p:spPr>
-        <p:txBody>
-          <a:bodyPr wrap="square">
-            <a:noAutofit/>
-          </a:bodyPr>
-          <a:lstStyle/>
-          <a:p>
-            <a:pPr algn="r"/>
-            <a:r>
-              <a:rPr sz="800" b="0" i="0">
-                <a:solidFill>
-                  <a:srgbClr val="D6D3D1"/>
-                </a:solidFill>
-                <a:latin typeface="Calibri"/>
-              </a:rPr>
-              <a:t>9</a:t>
+          <p:cNvPr id="118" name="TextBox 117"/>
+          <p:cNvSpPr txBox="1"/>
+          <p:nvPr/>
+        </p:nvSpPr>
+        <p:spPr>
+          <a:xfrm>
+            <a:off x="9427464" y="3493008"/>
+            <a:ext cx="2423160" cy="256032"/>
+          </a:xfrm>
+          <a:prstGeom prst="rect">
+            <a:avLst/>
+          </a:prstGeom>
+          <a:noFill/>
+        </p:spPr>
+        <p:txBody>
+          <a:bodyPr wrap="square" lIns="12700" rIns="12700" tIns="0" bIns="0">
+            <a:spAutoFit/>
+          </a:bodyPr>
+          <a:lstStyle/>
+          <a:p>
+            <a:r>
+              <a:rPr sz="1050" b="1">
+                <a:solidFill>
+                  <a:srgbClr val="1C1917"/>
+                </a:solidFill>
+                <a:latin typeface="Consolas"/>
+              </a:rPr>
+              <a:t>renderComplaint</a:t>
+            </a:r>
+          </a:p>
+        </p:txBody>
+      </p:sp>
+      <p:sp>
+        <p:nvSpPr>
+          <p:cNvPr id="119" name="TextBox 118"/>
+          <p:cNvSpPr txBox="1"/>
+          <p:nvPr/>
+        </p:nvSpPr>
+        <p:spPr>
+          <a:xfrm>
+            <a:off x="9427464" y="3785616"/>
+            <a:ext cx="2423160" cy="402336"/>
+          </a:xfrm>
+          <a:prstGeom prst="rect">
+            <a:avLst/>
+          </a:prstGeom>
+          <a:noFill/>
+        </p:spPr>
+        <p:txBody>
+          <a:bodyPr wrap="square" lIns="12700" rIns="12700" tIns="0" bIns="0">
+            <a:spAutoFit/>
+          </a:bodyPr>
+          <a:lstStyle/>
+          <a:p>
+            <a:r>
+              <a:rPr sz="850" b="0">
+                <a:solidFill>
+                  <a:srgbClr val="78716C"/>
+                </a:solidFill>
+                <a:latin typeface="Calibri"/>
+              </a:rPr>
+              <a:t>FCA DISP complaint handling</a:t>
+            </a:r>
+          </a:p>
+        </p:txBody>
+      </p:sp>
+      <p:sp>
+        <p:nvSpPr>
+          <p:cNvPr id="120" name="Rectangle 119"/>
+          <p:cNvSpPr/>
+          <p:nvPr/>
+        </p:nvSpPr>
+        <p:spPr>
+          <a:xfrm>
+            <a:off x="457200" y="4389120"/>
+            <a:ext cx="2697480" cy="859536"/>
+          </a:xfrm>
+          <a:prstGeom prst="rect">
+            <a:avLst/>
+          </a:prstGeom>
+          <a:solidFill>
+            <a:srgbClr val="FFFFFF"/>
+          </a:solidFill>
+          <a:ln>
+            <a:noFill/>
+          </a:ln>
+          <a:effectLst/>
+        </p:spPr>
+        <p:style>
+          <a:lnRef idx="1">
+            <a:schemeClr val="accent1"/>
+          </a:lnRef>
+          <a:fillRef idx="3">
+            <a:schemeClr val="accent1"/>
+          </a:fillRef>
+          <a:effectRef idx="2">
+            <a:schemeClr val="accent1"/>
+          </a:effectRef>
+          <a:fontRef idx="minor">
+            <a:schemeClr val="lt1"/>
+          </a:fontRef>
+        </p:style>
+        <p:txBody>
+          <a:bodyPr rtlCol="0" anchor="ctr"/>
+          <a:lstStyle/>
+          <a:p>
+            <a:pPr algn="ctr"/>
+          </a:p>
+        </p:txBody>
+      </p:sp>
+      <p:sp>
+        <p:nvSpPr>
+          <p:cNvPr id="121" name="Rectangle 120"/>
+          <p:cNvSpPr/>
+          <p:nvPr/>
+        </p:nvSpPr>
+        <p:spPr>
+          <a:xfrm>
+            <a:off x="457200" y="4389120"/>
+            <a:ext cx="54864" cy="859536"/>
+          </a:xfrm>
+          <a:prstGeom prst="rect">
+            <a:avLst/>
+          </a:prstGeom>
+          <a:solidFill>
+            <a:srgbClr val="DA291C"/>
+          </a:solidFill>
+          <a:ln>
+            <a:noFill/>
+          </a:ln>
+          <a:effectLst/>
+        </p:spPr>
+        <p:style>
+          <a:lnRef idx="1">
+            <a:schemeClr val="accent1"/>
+          </a:lnRef>
+          <a:fillRef idx="3">
+            <a:schemeClr val="accent1"/>
+          </a:fillRef>
+          <a:effectRef idx="2">
+            <a:schemeClr val="accent1"/>
+          </a:effectRef>
+          <a:fontRef idx="minor">
+            <a:schemeClr val="lt1"/>
+          </a:fontRef>
+        </p:style>
+        <p:txBody>
+          <a:bodyPr rtlCol="0" anchor="ctr"/>
+          <a:lstStyle/>
+          <a:p>
+            <a:pPr algn="ctr"/>
+          </a:p>
+        </p:txBody>
+      </p:sp>
+      <p:sp>
+        <p:nvSpPr>
+          <p:cNvPr id="122" name="TextBox 121"/>
+          <p:cNvSpPr txBox="1"/>
+          <p:nvPr/>
+        </p:nvSpPr>
+        <p:spPr>
+          <a:xfrm>
+            <a:off x="621792" y="4498848"/>
+            <a:ext cx="2423160" cy="256032"/>
+          </a:xfrm>
+          <a:prstGeom prst="rect">
+            <a:avLst/>
+          </a:prstGeom>
+          <a:noFill/>
+        </p:spPr>
+        <p:txBody>
+          <a:bodyPr wrap="square" lIns="12700" rIns="12700" tIns="0" bIns="0">
+            <a:spAutoFit/>
+          </a:bodyPr>
+          <a:lstStyle/>
+          <a:p>
+            <a:r>
+              <a:rPr sz="1050" b="1">
+                <a:solidFill>
+                  <a:srgbClr val="1C1917"/>
+                </a:solidFill>
+                <a:latin typeface="Consolas"/>
+              </a:rPr>
+              <a:t>renderRecurring</a:t>
+            </a:r>
+          </a:p>
+        </p:txBody>
+      </p:sp>
+      <p:sp>
+        <p:nvSpPr>
+          <p:cNvPr id="123" name="TextBox 122"/>
+          <p:cNvSpPr txBox="1"/>
+          <p:nvPr/>
+        </p:nvSpPr>
+        <p:spPr>
+          <a:xfrm>
+            <a:off x="621792" y="4791456"/>
+            <a:ext cx="2423160" cy="402336"/>
+          </a:xfrm>
+          <a:prstGeom prst="rect">
+            <a:avLst/>
+          </a:prstGeom>
+          <a:noFill/>
+        </p:spPr>
+        <p:txBody>
+          <a:bodyPr wrap="square" lIns="12700" rIns="12700" tIns="0" bIns="0">
+            <a:spAutoFit/>
+          </a:bodyPr>
+          <a:lstStyle/>
+          <a:p>
+            <a:r>
+              <a:rPr sz="850" b="0">
+                <a:solidFill>
+                  <a:srgbClr val="78716C"/>
+                </a:solidFill>
+                <a:latin typeface="Calibri"/>
+              </a:rPr>
+              <a:t>Standing orders &amp; Direct Debits</a:t>
+            </a:r>
+          </a:p>
+        </p:txBody>
+      </p:sp>
+      <p:sp>
+        <p:nvSpPr>
+          <p:cNvPr id="124" name="Rectangle 123"/>
+          <p:cNvSpPr/>
+          <p:nvPr/>
+        </p:nvSpPr>
+        <p:spPr>
+          <a:xfrm>
+            <a:off x="3392424" y="4389120"/>
+            <a:ext cx="2697480" cy="859536"/>
+          </a:xfrm>
+          <a:prstGeom prst="rect">
+            <a:avLst/>
+          </a:prstGeom>
+          <a:solidFill>
+            <a:srgbClr val="FFFFFF"/>
+          </a:solidFill>
+          <a:ln>
+            <a:noFill/>
+          </a:ln>
+          <a:effectLst/>
+        </p:spPr>
+        <p:style>
+          <a:lnRef idx="1">
+            <a:schemeClr val="accent1"/>
+          </a:lnRef>
+          <a:fillRef idx="3">
+            <a:schemeClr val="accent1"/>
+          </a:fillRef>
+          <a:effectRef idx="2">
+            <a:schemeClr val="accent1"/>
+          </a:effectRef>
+          <a:fontRef idx="minor">
+            <a:schemeClr val="lt1"/>
+          </a:fontRef>
+        </p:style>
+        <p:txBody>
+          <a:bodyPr rtlCol="0" anchor="ctr"/>
+          <a:lstStyle/>
+          <a:p>
+            <a:pPr algn="ctr"/>
+          </a:p>
+        </p:txBody>
+      </p:sp>
+      <p:sp>
+        <p:nvSpPr>
+          <p:cNvPr id="125" name="Rectangle 124"/>
+          <p:cNvSpPr/>
+          <p:nvPr/>
+        </p:nvSpPr>
+        <p:spPr>
+          <a:xfrm>
+            <a:off x="3392424" y="4389120"/>
+            <a:ext cx="54864" cy="859536"/>
+          </a:xfrm>
+          <a:prstGeom prst="rect">
+            <a:avLst/>
+          </a:prstGeom>
+          <a:solidFill>
+            <a:srgbClr val="DA291C"/>
+          </a:solidFill>
+          <a:ln>
+            <a:noFill/>
+          </a:ln>
+          <a:effectLst/>
+        </p:spPr>
+        <p:style>
+          <a:lnRef idx="1">
+            <a:schemeClr val="accent1"/>
+          </a:lnRef>
+          <a:fillRef idx="3">
+            <a:schemeClr val="accent1"/>
+          </a:fillRef>
+          <a:effectRef idx="2">
+            <a:schemeClr val="accent1"/>
+          </a:effectRef>
+          <a:fontRef idx="minor">
+            <a:schemeClr val="lt1"/>
+          </a:fontRef>
+        </p:style>
+        <p:txBody>
+          <a:bodyPr rtlCol="0" anchor="ctr"/>
+          <a:lstStyle/>
+          <a:p>
+            <a:pPr algn="ctr"/>
+          </a:p>
+        </p:txBody>
+      </p:sp>
+      <p:sp>
+        <p:nvSpPr>
+          <p:cNvPr id="126" name="TextBox 125"/>
+          <p:cNvSpPr txBox="1"/>
+          <p:nvPr/>
+        </p:nvSpPr>
+        <p:spPr>
+          <a:xfrm>
+            <a:off x="3557016" y="4498848"/>
+            <a:ext cx="2423160" cy="256032"/>
+          </a:xfrm>
+          <a:prstGeom prst="rect">
+            <a:avLst/>
+          </a:prstGeom>
+          <a:noFill/>
+        </p:spPr>
+        <p:txBody>
+          <a:bodyPr wrap="square" lIns="12700" rIns="12700" tIns="0" bIns="0">
+            <a:spAutoFit/>
+          </a:bodyPr>
+          <a:lstStyle/>
+          <a:p>
+            <a:r>
+              <a:rPr sz="1050" b="1">
+                <a:solidFill>
+                  <a:srgbClr val="1C1917"/>
+                </a:solidFill>
+                <a:latin typeface="Consolas"/>
+              </a:rPr>
+              <a:t>renderDispute</a:t>
+            </a:r>
+          </a:p>
+        </p:txBody>
+      </p:sp>
+      <p:sp>
+        <p:nvSpPr>
+          <p:cNvPr id="127" name="TextBox 126"/>
+          <p:cNvSpPr txBox="1"/>
+          <p:nvPr/>
+        </p:nvSpPr>
+        <p:spPr>
+          <a:xfrm>
+            <a:off x="3557016" y="4791456"/>
+            <a:ext cx="2423160" cy="402336"/>
+          </a:xfrm>
+          <a:prstGeom prst="rect">
+            <a:avLst/>
+          </a:prstGeom>
+          <a:noFill/>
+        </p:spPr>
+        <p:txBody>
+          <a:bodyPr wrap="square" lIns="12700" rIns="12700" tIns="0" bIns="0">
+            <a:spAutoFit/>
+          </a:bodyPr>
+          <a:lstStyle/>
+          <a:p>
+            <a:r>
+              <a:rPr sz="850" b="0">
+                <a:solidFill>
+                  <a:srgbClr val="78716C"/>
+                </a:solidFill>
+                <a:latin typeface="Calibri"/>
+              </a:rPr>
+              <a:t>Payment dispute &amp; chargeback</a:t>
+            </a:r>
+          </a:p>
+        </p:txBody>
+      </p:sp>
+      <p:sp>
+        <p:nvSpPr>
+          <p:cNvPr id="128" name="Rectangle 127"/>
+          <p:cNvSpPr/>
+          <p:nvPr/>
+        </p:nvSpPr>
+        <p:spPr>
+          <a:xfrm>
+            <a:off x="6327648" y="4389120"/>
+            <a:ext cx="2697480" cy="859536"/>
+          </a:xfrm>
+          <a:prstGeom prst="rect">
+            <a:avLst/>
+          </a:prstGeom>
+          <a:solidFill>
+            <a:srgbClr val="FFFFFF"/>
+          </a:solidFill>
+          <a:ln>
+            <a:noFill/>
+          </a:ln>
+          <a:effectLst/>
+        </p:spPr>
+        <p:style>
+          <a:lnRef idx="1">
+            <a:schemeClr val="accent1"/>
+          </a:lnRef>
+          <a:fillRef idx="3">
+            <a:schemeClr val="accent1"/>
+          </a:fillRef>
+          <a:effectRef idx="2">
+            <a:schemeClr val="accent1"/>
+          </a:effectRef>
+          <a:fontRef idx="minor">
+            <a:schemeClr val="lt1"/>
+          </a:fontRef>
+        </p:style>
+        <p:txBody>
+          <a:bodyPr rtlCol="0" anchor="ctr"/>
+          <a:lstStyle/>
+          <a:p>
+            <a:pPr algn="ctr"/>
+          </a:p>
+        </p:txBody>
+      </p:sp>
+      <p:sp>
+        <p:nvSpPr>
+          <p:cNvPr id="129" name="Rectangle 128"/>
+          <p:cNvSpPr/>
+          <p:nvPr/>
+        </p:nvSpPr>
+        <p:spPr>
+          <a:xfrm>
+            <a:off x="6327648" y="4389120"/>
+            <a:ext cx="54864" cy="859536"/>
+          </a:xfrm>
+          <a:prstGeom prst="rect">
+            <a:avLst/>
+          </a:prstGeom>
+          <a:solidFill>
+            <a:srgbClr val="DA291C"/>
+          </a:solidFill>
+          <a:ln>
+            <a:noFill/>
+          </a:ln>
+          <a:effectLst/>
+        </p:spPr>
+        <p:style>
+          <a:lnRef idx="1">
+            <a:schemeClr val="accent1"/>
+          </a:lnRef>
+          <a:fillRef idx="3">
+            <a:schemeClr val="accent1"/>
+          </a:fillRef>
+          <a:effectRef idx="2">
+            <a:schemeClr val="accent1"/>
+          </a:effectRef>
+          <a:fontRef idx="minor">
+            <a:schemeClr val="lt1"/>
+          </a:fontRef>
+        </p:style>
+        <p:txBody>
+          <a:bodyPr rtlCol="0" anchor="ctr"/>
+          <a:lstStyle/>
+          <a:p>
+            <a:pPr algn="ctr"/>
+          </a:p>
+        </p:txBody>
+      </p:sp>
+      <p:sp>
+        <p:nvSpPr>
+          <p:cNvPr id="130" name="TextBox 129"/>
+          <p:cNvSpPr txBox="1"/>
+          <p:nvPr/>
+        </p:nvSpPr>
+        <p:spPr>
+          <a:xfrm>
+            <a:off x="6492240" y="4498848"/>
+            <a:ext cx="2423160" cy="256032"/>
+          </a:xfrm>
+          <a:prstGeom prst="rect">
+            <a:avLst/>
+          </a:prstGeom>
+          <a:noFill/>
+        </p:spPr>
+        <p:txBody>
+          <a:bodyPr wrap="square" lIns="12700" rIns="12700" tIns="0" bIns="0">
+            <a:spAutoFit/>
+          </a:bodyPr>
+          <a:lstStyle/>
+          <a:p>
+            <a:r>
+              <a:rPr sz="1050" b="1">
+                <a:solidFill>
+                  <a:srgbClr val="1C1917"/>
+                </a:solidFill>
+                <a:latin typeface="Consolas"/>
+              </a:rPr>
+              <a:t>renderBeneficiary</a:t>
+            </a:r>
+          </a:p>
+        </p:txBody>
+      </p:sp>
+      <p:sp>
+        <p:nvSpPr>
+          <p:cNvPr id="131" name="TextBox 130"/>
+          <p:cNvSpPr txBox="1"/>
+          <p:nvPr/>
+        </p:nvSpPr>
+        <p:spPr>
+          <a:xfrm>
+            <a:off x="6492240" y="4791456"/>
+            <a:ext cx="2423160" cy="402336"/>
+          </a:xfrm>
+          <a:prstGeom prst="rect">
+            <a:avLst/>
+          </a:prstGeom>
+          <a:noFill/>
+        </p:spPr>
+        <p:txBody>
+          <a:bodyPr wrap="square" lIns="12700" rIns="12700" tIns="0" bIns="0">
+            <a:spAutoFit/>
+          </a:bodyPr>
+          <a:lstStyle/>
+          <a:p>
+            <a:r>
+              <a:rPr sz="850" b="0">
+                <a:solidFill>
+                  <a:srgbClr val="78716C"/>
+                </a:solidFill>
+                <a:latin typeface="Calibri"/>
+              </a:rPr>
+              <a:t>International beneficiary onboarding</a:t>
+            </a:r>
+          </a:p>
+        </p:txBody>
+      </p:sp>
+      <p:sp>
+        <p:nvSpPr>
+          <p:cNvPr id="132" name="Rectangle 131"/>
+          <p:cNvSpPr/>
+          <p:nvPr/>
+        </p:nvSpPr>
+        <p:spPr>
+          <a:xfrm>
+            <a:off x="9262872" y="4389120"/>
+            <a:ext cx="2697480" cy="859536"/>
+          </a:xfrm>
+          <a:prstGeom prst="rect">
+            <a:avLst/>
+          </a:prstGeom>
+          <a:solidFill>
+            <a:srgbClr val="FFFFFF"/>
+          </a:solidFill>
+          <a:ln>
+            <a:noFill/>
+          </a:ln>
+          <a:effectLst/>
+        </p:spPr>
+        <p:style>
+          <a:lnRef idx="1">
+            <a:schemeClr val="accent1"/>
+          </a:lnRef>
+          <a:fillRef idx="3">
+            <a:schemeClr val="accent1"/>
+          </a:fillRef>
+          <a:effectRef idx="2">
+            <a:schemeClr val="accent1"/>
+          </a:effectRef>
+          <a:fontRef idx="minor">
+            <a:schemeClr val="lt1"/>
+          </a:fontRef>
+        </p:style>
+        <p:txBody>
+          <a:bodyPr rtlCol="0" anchor="ctr"/>
+          <a:lstStyle/>
+          <a:p>
+            <a:pPr algn="ctr"/>
+          </a:p>
+        </p:txBody>
+      </p:sp>
+      <p:sp>
+        <p:nvSpPr>
+          <p:cNvPr id="133" name="Rectangle 132"/>
+          <p:cNvSpPr/>
+          <p:nvPr/>
+        </p:nvSpPr>
+        <p:spPr>
+          <a:xfrm>
+            <a:off x="9262872" y="4389120"/>
+            <a:ext cx="54864" cy="859536"/>
+          </a:xfrm>
+          <a:prstGeom prst="rect">
+            <a:avLst/>
+          </a:prstGeom>
+          <a:solidFill>
+            <a:srgbClr val="DA291C"/>
+          </a:solidFill>
+          <a:ln>
+            <a:noFill/>
+          </a:ln>
+          <a:effectLst/>
+        </p:spPr>
+        <p:style>
+          <a:lnRef idx="1">
+            <a:schemeClr val="accent1"/>
+          </a:lnRef>
+          <a:fillRef idx="3">
+            <a:schemeClr val="accent1"/>
+          </a:fillRef>
+          <a:effectRef idx="2">
+            <a:schemeClr val="accent1"/>
+          </a:effectRef>
+          <a:fontRef idx="minor">
+            <a:schemeClr val="lt1"/>
+          </a:fontRef>
+        </p:style>
+        <p:txBody>
+          <a:bodyPr rtlCol="0" anchor="ctr"/>
+          <a:lstStyle/>
+          <a:p>
+            <a:pPr algn="ctr"/>
+          </a:p>
+        </p:txBody>
+      </p:sp>
+      <p:sp>
+        <p:nvSpPr>
+          <p:cNvPr id="134" name="TextBox 133"/>
+          <p:cNvSpPr txBox="1"/>
+          <p:nvPr/>
+        </p:nvSpPr>
+        <p:spPr>
+          <a:xfrm>
+            <a:off x="9427464" y="4498848"/>
+            <a:ext cx="2423160" cy="256032"/>
+          </a:xfrm>
+          <a:prstGeom prst="rect">
+            <a:avLst/>
+          </a:prstGeom>
+          <a:noFill/>
+        </p:spPr>
+        <p:txBody>
+          <a:bodyPr wrap="square" lIns="12700" rIns="12700" tIns="0" bIns="0">
+            <a:spAutoFit/>
+          </a:bodyPr>
+          <a:lstStyle/>
+          <a:p>
+            <a:r>
+              <a:rPr sz="1050" b="1">
+                <a:solidFill>
+                  <a:srgbClr val="1C1917"/>
+                </a:solidFill>
+                <a:latin typeface="Consolas"/>
+              </a:rPr>
+              <a:t>renderCertificate</a:t>
+            </a:r>
+          </a:p>
+        </p:txBody>
+      </p:sp>
+      <p:sp>
+        <p:nvSpPr>
+          <p:cNvPr id="135" name="TextBox 134"/>
+          <p:cNvSpPr txBox="1"/>
+          <p:nvPr/>
+        </p:nvSpPr>
+        <p:spPr>
+          <a:xfrm>
+            <a:off x="9427464" y="4791456"/>
+            <a:ext cx="2423160" cy="402336"/>
+          </a:xfrm>
+          <a:prstGeom prst="rect">
+            <a:avLst/>
+          </a:prstGeom>
+          <a:noFill/>
+        </p:spPr>
+        <p:txBody>
+          <a:bodyPr wrap="square" lIns="12700" rIns="12700" tIns="0" bIns="0">
+            <a:spAutoFit/>
+          </a:bodyPr>
+          <a:lstStyle/>
+          <a:p>
+            <a:r>
+              <a:rPr sz="850" b="0">
+                <a:solidFill>
+                  <a:srgbClr val="78716C"/>
+                </a:solidFill>
+                <a:latin typeface="Calibri"/>
+              </a:rPr>
+              <a:t>Balance certificate issuance</a:t>
+            </a:r>
+          </a:p>
+        </p:txBody>
+      </p:sp>
+      <p:sp>
+        <p:nvSpPr>
+          <p:cNvPr id="136" name="Rectangle 135"/>
+          <p:cNvSpPr/>
+          <p:nvPr/>
+        </p:nvSpPr>
+        <p:spPr>
+          <a:xfrm>
+            <a:off x="457200" y="5394960"/>
+            <a:ext cx="2697480" cy="859536"/>
+          </a:xfrm>
+          <a:prstGeom prst="rect">
+            <a:avLst/>
+          </a:prstGeom>
+          <a:solidFill>
+            <a:srgbClr val="FFFFFF"/>
+          </a:solidFill>
+          <a:ln>
+            <a:noFill/>
+          </a:ln>
+          <a:effectLst/>
+        </p:spPr>
+        <p:style>
+          <a:lnRef idx="1">
+            <a:schemeClr val="accent1"/>
+          </a:lnRef>
+          <a:fillRef idx="3">
+            <a:schemeClr val="accent1"/>
+          </a:fillRef>
+          <a:effectRef idx="2">
+            <a:schemeClr val="accent1"/>
+          </a:effectRef>
+          <a:fontRef idx="minor">
+            <a:schemeClr val="lt1"/>
+          </a:fontRef>
+        </p:style>
+        <p:txBody>
+          <a:bodyPr rtlCol="0" anchor="ctr"/>
+          <a:lstStyle/>
+          <a:p>
+            <a:pPr algn="ctr"/>
+          </a:p>
+        </p:txBody>
+      </p:sp>
+      <p:sp>
+        <p:nvSpPr>
+          <p:cNvPr id="137" name="Rectangle 136"/>
+          <p:cNvSpPr/>
+          <p:nvPr/>
+        </p:nvSpPr>
+        <p:spPr>
+          <a:xfrm>
+            <a:off x="457200" y="5394960"/>
+            <a:ext cx="54864" cy="859536"/>
+          </a:xfrm>
+          <a:prstGeom prst="rect">
+            <a:avLst/>
+          </a:prstGeom>
+          <a:solidFill>
+            <a:srgbClr val="DA291C"/>
+          </a:solidFill>
+          <a:ln>
+            <a:noFill/>
+          </a:ln>
+          <a:effectLst/>
+        </p:spPr>
+        <p:style>
+          <a:lnRef idx="1">
+            <a:schemeClr val="accent1"/>
+          </a:lnRef>
+          <a:fillRef idx="3">
+            <a:schemeClr val="accent1"/>
+          </a:fillRef>
+          <a:effectRef idx="2">
+            <a:schemeClr val="accent1"/>
+          </a:effectRef>
+          <a:fontRef idx="minor">
+            <a:schemeClr val="lt1"/>
+          </a:fontRef>
+        </p:style>
+        <p:txBody>
+          <a:bodyPr rtlCol="0" anchor="ctr"/>
+          <a:lstStyle/>
+          <a:p>
+            <a:pPr algn="ctr"/>
+          </a:p>
+        </p:txBody>
+      </p:sp>
+      <p:sp>
+        <p:nvSpPr>
+          <p:cNvPr id="138" name="TextBox 137"/>
+          <p:cNvSpPr txBox="1"/>
+          <p:nvPr/>
+        </p:nvSpPr>
+        <p:spPr>
+          <a:xfrm>
+            <a:off x="621792" y="5504688"/>
+            <a:ext cx="2423160" cy="256032"/>
+          </a:xfrm>
+          <a:prstGeom prst="rect">
+            <a:avLst/>
+          </a:prstGeom>
+          <a:noFill/>
+        </p:spPr>
+        <p:txBody>
+          <a:bodyPr wrap="square" lIns="12700" rIns="12700" tIns="0" bIns="0">
+            <a:spAutoFit/>
+          </a:bodyPr>
+          <a:lstStyle/>
+          <a:p>
+            <a:r>
+              <a:rPr sz="1050" b="1">
+                <a:solidFill>
+                  <a:srgbClr val="1C1917"/>
+                </a:solidFill>
+                <a:latin typeface="Consolas"/>
+              </a:rPr>
+              <a:t>renderTrusted</a:t>
+            </a:r>
+          </a:p>
+        </p:txBody>
+      </p:sp>
+      <p:sp>
+        <p:nvSpPr>
+          <p:cNvPr id="139" name="TextBox 138"/>
+          <p:cNvSpPr txBox="1"/>
+          <p:nvPr/>
+        </p:nvSpPr>
+        <p:spPr>
+          <a:xfrm>
+            <a:off x="621792" y="5797296"/>
+            <a:ext cx="2423160" cy="402336"/>
+          </a:xfrm>
+          <a:prstGeom prst="rect">
+            <a:avLst/>
+          </a:prstGeom>
+          <a:noFill/>
+        </p:spPr>
+        <p:txBody>
+          <a:bodyPr wrap="square" lIns="12700" rIns="12700" tIns="0" bIns="0">
+            <a:spAutoFit/>
+          </a:bodyPr>
+          <a:lstStyle/>
+          <a:p>
+            <a:r>
+              <a:rPr sz="850" b="0">
+                <a:solidFill>
+                  <a:srgbClr val="78716C"/>
+                </a:solidFill>
+                <a:latin typeface="Calibri"/>
+              </a:rPr>
+              <a:t>Trusted devices &amp; sessions</a:t>
             </a:r>
           </a:p>
         </p:txBody>

--- a/Santander_Architecture.pptx
+++ b/Santander_Architecture.pptx
@@ -3157,7 +3157,7 @@
             <a:avLst/>
           </a:prstGeom>
           <a:solidFill>
-            <a:srgbClr val="DA291C"/>
+            <a:srgbClr val="EC0000"/>
           </a:solidFill>
           <a:ln>
             <a:noFill/>
@@ -3313,7 +3313,7 @@
             <a:avLst/>
           </a:prstGeom>
           <a:solidFill>
-            <a:srgbClr val="DA291C"/>
+            <a:srgbClr val="EC0000"/>
           </a:solidFill>
           <a:ln>
             <a:noFill/>
@@ -3399,7 +3399,7 @@
             <a:avLst/>
           </a:prstGeom>
           <a:solidFill>
-            <a:srgbClr val="DA291C"/>
+            <a:srgbClr val="EC0000"/>
           </a:solidFill>
           <a:ln>
             <a:noFill/>
@@ -3555,7 +3555,7 @@
             <a:avLst/>
           </a:prstGeom>
           <a:solidFill>
-            <a:srgbClr val="DA291C"/>
+            <a:srgbClr val="EC0000"/>
           </a:solidFill>
           <a:ln>
             <a:noFill/>
@@ -3613,7 +3613,7 @@
                 </a:solidFill>
                 <a:latin typeface="Calibri"/>
               </a:rPr>
-              <a:t>12</a:t>
+              <a:t>17</a:t>
             </a:r>
           </a:p>
         </p:txBody>
@@ -3711,7 +3711,7 @@
             <a:avLst/>
           </a:prstGeom>
           <a:solidFill>
-            <a:srgbClr val="DA291C"/>
+            <a:srgbClr val="EC0000"/>
           </a:solidFill>
           <a:ln>
             <a:noFill/>
@@ -3867,7 +3867,7 @@
             <a:avLst/>
           </a:prstGeom>
           <a:solidFill>
-            <a:srgbClr val="DA291C"/>
+            <a:srgbClr val="EC0000"/>
           </a:solidFill>
           <a:ln>
             <a:noFill/>
@@ -4050,7 +4050,7 @@
             <a:avLst/>
           </a:prstGeom>
           <a:solidFill>
-            <a:srgbClr val="DA291C"/>
+            <a:srgbClr val="EC0000"/>
           </a:solidFill>
           <a:ln>
             <a:noFill/>
@@ -4170,7 +4170,7 @@
             <a:avLst/>
           </a:prstGeom>
           <a:solidFill>
-            <a:srgbClr val="FAF6EF"/>
+            <a:srgbClr val="FBF1EA"/>
           </a:solidFill>
           <a:ln>
             <a:noFill/>
@@ -4213,7 +4213,7 @@
             <a:avLst/>
           </a:prstGeom>
           <a:solidFill>
-            <a:srgbClr val="DA291C"/>
+            <a:srgbClr val="EC0000"/>
           </a:solidFill>
           <a:ln>
             <a:noFill/>
@@ -4267,7 +4267,7 @@
             <a:r>
               <a:rPr sz="950" b="1" i="0">
                 <a:solidFill>
-                  <a:srgbClr val="DA291C"/>
+                  <a:srgbClr val="EC0000"/>
                 </a:solidFill>
                 <a:latin typeface="Calibri"/>
               </a:rPr>
@@ -4404,7 +4404,7 @@
             <a:avLst/>
           </a:prstGeom>
           <a:solidFill>
-            <a:srgbClr val="DA291C"/>
+            <a:srgbClr val="EC0000"/>
           </a:solidFill>
           <a:ln w="9525">
             <a:solidFill>
@@ -4464,7 +4464,7 @@
                 </a:solidFill>
                 <a:latin typeface="Calibri"/>
               </a:rPr>
-              <a:t>#DA291C</a:t>
+              <a:t>#EC0000</a:t>
             </a:r>
           </a:p>
         </p:txBody>
@@ -4499,7 +4499,7 @@
                 </a:solidFill>
                 <a:latin typeface="Calibri"/>
               </a:rPr>
-              <a:t>Brand red</a:t>
+              <a:t>Santander Red</a:t>
             </a:r>
           </a:p>
         </p:txBody>
@@ -4519,7 +4519,7 @@
             <a:avLst/>
           </a:prstGeom>
           <a:solidFill>
-            <a:srgbClr val="FAF6EF"/>
+            <a:srgbClr val="FBF1EA"/>
           </a:solidFill>
           <a:ln w="9525">
             <a:solidFill>
@@ -4579,7 +4579,7 @@
                 </a:solidFill>
                 <a:latin typeface="Calibri"/>
               </a:rPr>
-              <a:t>#faf6ef</a:t>
+              <a:t>#FBF1EA</a:t>
             </a:r>
           </a:p>
         </p:txBody>
@@ -4614,7 +4614,7 @@
                 </a:solidFill>
                 <a:latin typeface="Calibri"/>
               </a:rPr>
-              <a:t>Warm bg</a:t>
+              <a:t>Lisbon</a:t>
             </a:r>
           </a:p>
         </p:txBody>
@@ -4920,7 +4920,7 @@
             <a:r>
               <a:rPr sz="1100" b="1" i="0">
                 <a:solidFill>
-                  <a:srgbClr val="DA291C"/>
+                  <a:srgbClr val="EC0000"/>
                 </a:solidFill>
                 <a:latin typeface="Calibri"/>
               </a:rPr>
@@ -5024,7 +5024,7 @@
             <a:avLst/>
           </a:prstGeom>
           <a:solidFill>
-            <a:srgbClr val="DA291C"/>
+            <a:srgbClr val="EC0000"/>
           </a:solidFill>
           <a:ln>
             <a:noFill/>
@@ -5186,7 +5186,7 @@
             <a:avLst/>
           </a:prstGeom>
           <a:solidFill>
-            <a:srgbClr val="DA291C"/>
+            <a:srgbClr val="EC0000"/>
           </a:solidFill>
           <a:ln>
             <a:noFill/>
@@ -5348,7 +5348,7 @@
             <a:avLst/>
           </a:prstGeom>
           <a:solidFill>
-            <a:srgbClr val="DA291C"/>
+            <a:srgbClr val="EC0000"/>
           </a:solidFill>
           <a:ln>
             <a:noFill/>
@@ -5445,7 +5445,7 @@
                 </a:solidFill>
                 <a:latin typeface="Calibri"/>
               </a:rPr>
-              <a:t>Exactly one bg-[#DA291C] or bg-stone-900 primary button per view — hierarchy stays clear.</a:t>
+              <a:t>Exactly one bg-[#EC0000] or bg-stone-900 primary button per view — hierarchy stays clear.</a:t>
             </a:r>
           </a:p>
         </p:txBody>
@@ -5510,7 +5510,7 @@
             <a:avLst/>
           </a:prstGeom>
           <a:solidFill>
-            <a:srgbClr val="DA291C"/>
+            <a:srgbClr val="EC0000"/>
           </a:solidFill>
           <a:ln>
             <a:noFill/>
@@ -5672,7 +5672,7 @@
             <a:avLst/>
           </a:prstGeom>
           <a:solidFill>
-            <a:srgbClr val="DA291C"/>
+            <a:srgbClr val="EC0000"/>
           </a:solidFill>
           <a:ln>
             <a:noFill/>
@@ -5834,7 +5834,7 @@
             <a:avLst/>
           </a:prstGeom>
           <a:solidFill>
-            <a:srgbClr val="DA291C"/>
+            <a:srgbClr val="EC0000"/>
           </a:solidFill>
           <a:ln>
             <a:noFill/>
@@ -6117,7 +6117,7 @@
             <a:avLst/>
           </a:prstGeom>
           <a:solidFill>
-            <a:srgbClr val="FAF6EF"/>
+            <a:srgbClr val="FBF1EA"/>
           </a:solidFill>
           <a:ln>
             <a:noFill/>
@@ -6160,7 +6160,7 @@
             <a:avLst/>
           </a:prstGeom>
           <a:solidFill>
-            <a:srgbClr val="DA291C"/>
+            <a:srgbClr val="EC0000"/>
           </a:solidFill>
           <a:ln>
             <a:noFill/>
@@ -6214,7 +6214,7 @@
             <a:r>
               <a:rPr sz="950" b="1" i="0">
                 <a:solidFill>
-                  <a:srgbClr val="DA291C"/>
+                  <a:srgbClr val="EC0000"/>
                 </a:solidFill>
                 <a:latin typeface="Calibri"/>
               </a:rPr>
@@ -6362,7 +6362,7 @@
             <a:r>
               <a:rPr sz="1000" b="1" i="0">
                 <a:solidFill>
-                  <a:srgbClr val="DA291C"/>
+                  <a:srgbClr val="EC0000"/>
                 </a:solidFill>
                 <a:latin typeface="Calibri"/>
               </a:rPr>
@@ -6431,7 +6431,7 @@
             <a:avLst/>
           </a:prstGeom>
           <a:solidFill>
-            <a:srgbClr val="DA291C"/>
+            <a:srgbClr val="EC0000"/>
           </a:solidFill>
           <a:ln>
             <a:noFill/>
@@ -6593,7 +6593,7 @@
             <a:avLst/>
           </a:prstGeom>
           <a:solidFill>
-            <a:srgbClr val="DA291C"/>
+            <a:srgbClr val="EC0000"/>
           </a:solidFill>
           <a:ln>
             <a:noFill/>
@@ -6755,7 +6755,7 @@
             <a:avLst/>
           </a:prstGeom>
           <a:solidFill>
-            <a:srgbClr val="DA291C"/>
+            <a:srgbClr val="EC0000"/>
           </a:solidFill>
           <a:ln>
             <a:noFill/>
@@ -6883,7 +6883,7 @@
             <a:r>
               <a:rPr sz="1000" b="1" i="0">
                 <a:solidFill>
-                  <a:srgbClr val="DA291C"/>
+                  <a:srgbClr val="EC0000"/>
                 </a:solidFill>
                 <a:latin typeface="Calibri"/>
               </a:rPr>
@@ -7637,7 +7637,7 @@
             <a:avLst/>
           </a:prstGeom>
           <a:solidFill>
-            <a:srgbClr val="FAF6EF"/>
+            <a:srgbClr val="FBF1EA"/>
           </a:solidFill>
           <a:ln>
             <a:noFill/>
@@ -7680,7 +7680,7 @@
             <a:avLst/>
           </a:prstGeom>
           <a:solidFill>
-            <a:srgbClr val="DA291C"/>
+            <a:srgbClr val="EC0000"/>
           </a:solidFill>
           <a:ln>
             <a:noFill/>
@@ -7734,7 +7734,7 @@
             <a:r>
               <a:rPr sz="950" b="1" i="0">
                 <a:solidFill>
-                  <a:srgbClr val="DA291C"/>
+                  <a:srgbClr val="EC0000"/>
                 </a:solidFill>
                 <a:latin typeface="Calibri"/>
               </a:rPr>
@@ -7916,7 +7916,7 @@
             <a:avLst/>
           </a:prstGeom>
           <a:solidFill>
-            <a:srgbClr val="DA291C"/>
+            <a:srgbClr val="EC0000"/>
           </a:solidFill>
           <a:ln>
             <a:noFill/>
@@ -8078,7 +8078,7 @@
             <a:avLst/>
           </a:prstGeom>
           <a:solidFill>
-            <a:srgbClr val="DA291C"/>
+            <a:srgbClr val="EC0000"/>
           </a:solidFill>
           <a:ln>
             <a:noFill/>
@@ -8240,7 +8240,7 @@
             <a:avLst/>
           </a:prstGeom>
           <a:solidFill>
-            <a:srgbClr val="DA291C"/>
+            <a:srgbClr val="EC0000"/>
           </a:solidFill>
           <a:ln>
             <a:noFill/>
@@ -8402,7 +8402,7 @@
             <a:avLst/>
           </a:prstGeom>
           <a:solidFill>
-            <a:srgbClr val="DA291C"/>
+            <a:srgbClr val="EC0000"/>
           </a:solidFill>
           <a:ln>
             <a:noFill/>
@@ -8564,7 +8564,7 @@
             <a:avLst/>
           </a:prstGeom>
           <a:solidFill>
-            <a:srgbClr val="DA291C"/>
+            <a:srgbClr val="EC0000"/>
           </a:solidFill>
           <a:ln>
             <a:noFill/>
@@ -8726,7 +8726,7 @@
             <a:avLst/>
           </a:prstGeom>
           <a:solidFill>
-            <a:srgbClr val="DA291C"/>
+            <a:srgbClr val="EC0000"/>
           </a:solidFill>
           <a:ln>
             <a:noFill/>
@@ -8888,7 +8888,7 @@
             <a:avLst/>
           </a:prstGeom>
           <a:solidFill>
-            <a:srgbClr val="DA291C"/>
+            <a:srgbClr val="EC0000"/>
           </a:solidFill>
           <a:ln>
             <a:noFill/>
@@ -9050,7 +9050,7 @@
             <a:avLst/>
           </a:prstGeom>
           <a:solidFill>
-            <a:srgbClr val="DA291C"/>
+            <a:srgbClr val="EC0000"/>
           </a:solidFill>
           <a:ln>
             <a:noFill/>
@@ -9333,7 +9333,7 @@
             <a:avLst/>
           </a:prstGeom>
           <a:solidFill>
-            <a:srgbClr val="FAF6EF"/>
+            <a:srgbClr val="FBF1EA"/>
           </a:solidFill>
           <a:ln>
             <a:noFill/>
@@ -9376,7 +9376,7 @@
             <a:avLst/>
           </a:prstGeom>
           <a:solidFill>
-            <a:srgbClr val="DA291C"/>
+            <a:srgbClr val="EC0000"/>
           </a:solidFill>
           <a:ln>
             <a:noFill/>
@@ -9430,7 +9430,7 @@
             <a:r>
               <a:rPr sz="950" b="1" i="0">
                 <a:solidFill>
-                  <a:srgbClr val="DA291C"/>
+                  <a:srgbClr val="EC0000"/>
                 </a:solidFill>
                 <a:latin typeface="Calibri"/>
               </a:rPr>
@@ -9610,7 +9610,7 @@
             <a:avLst/>
           </a:prstGeom>
           <a:solidFill>
-            <a:srgbClr val="DA291C"/>
+            <a:srgbClr val="EC0000"/>
           </a:solidFill>
           <a:ln>
             <a:noFill/>
@@ -9766,7 +9766,7 @@
             <a:avLst/>
           </a:prstGeom>
           <a:solidFill>
-            <a:srgbClr val="DA291C"/>
+            <a:srgbClr val="EC0000"/>
           </a:solidFill>
           <a:ln>
             <a:noFill/>
@@ -9922,7 +9922,7 @@
             <a:avLst/>
           </a:prstGeom>
           <a:solidFill>
-            <a:srgbClr val="DA291C"/>
+            <a:srgbClr val="EC0000"/>
           </a:solidFill>
           <a:ln>
             <a:noFill/>
@@ -10080,7 +10080,7 @@
             <a:avLst/>
           </a:prstGeom>
           <a:solidFill>
-            <a:srgbClr val="DA291C"/>
+            <a:srgbClr val="EC0000"/>
           </a:solidFill>
           <a:ln>
             <a:noFill/>
@@ -10242,7 +10242,7 @@
             <a:avLst/>
           </a:prstGeom>
           <a:solidFill>
-            <a:srgbClr val="DA291C"/>
+            <a:srgbClr val="EC0000"/>
           </a:solidFill>
           <a:ln>
             <a:noFill/>
@@ -10404,7 +10404,7 @@
             <a:avLst/>
           </a:prstGeom>
           <a:solidFill>
-            <a:srgbClr val="DA291C"/>
+            <a:srgbClr val="EC0000"/>
           </a:solidFill>
           <a:ln>
             <a:noFill/>
@@ -10566,7 +10566,7 @@
             <a:avLst/>
           </a:prstGeom>
           <a:solidFill>
-            <a:srgbClr val="DA291C"/>
+            <a:srgbClr val="EC0000"/>
           </a:solidFill>
           <a:ln>
             <a:noFill/>
@@ -10728,7 +10728,7 @@
             <a:avLst/>
           </a:prstGeom>
           <a:solidFill>
-            <a:srgbClr val="DA291C"/>
+            <a:srgbClr val="EC0000"/>
           </a:solidFill>
           <a:ln>
             <a:noFill/>
@@ -10890,7 +10890,7 @@
             <a:avLst/>
           </a:prstGeom>
           <a:solidFill>
-            <a:srgbClr val="DA291C"/>
+            <a:srgbClr val="EC0000"/>
           </a:solidFill>
           <a:ln>
             <a:noFill/>
@@ -11216,7 +11216,7 @@
             <a:avLst/>
           </a:prstGeom>
           <a:solidFill>
-            <a:srgbClr val="DA291C"/>
+            <a:srgbClr val="EC0000"/>
           </a:solidFill>
           <a:ln>
             <a:noFill/>
@@ -11270,7 +11270,7 @@
             <a:r>
               <a:rPr sz="950" b="1" i="0">
                 <a:solidFill>
-                  <a:srgbClr val="DA291C"/>
+                  <a:srgbClr val="EC0000"/>
                 </a:solidFill>
                 <a:latin typeface="Calibri"/>
               </a:rPr>
@@ -11364,7 +11364,7 @@
             <a:avLst/>
           </a:prstGeom>
           <a:solidFill>
-            <a:srgbClr val="DA291C"/>
+            <a:srgbClr val="EC0000"/>
           </a:solidFill>
           <a:ln>
             <a:noFill/>
@@ -11450,7 +11450,7 @@
             <a:avLst/>
           </a:prstGeom>
           <a:solidFill>
-            <a:srgbClr val="DA291C"/>
+            <a:srgbClr val="EC0000"/>
           </a:solidFill>
           <a:ln>
             <a:noFill/>
@@ -11641,7 +11641,7 @@
             <a:avLst/>
           </a:prstGeom>
           <a:solidFill>
-            <a:srgbClr val="DA291C"/>
+            <a:srgbClr val="EC0000"/>
           </a:solidFill>
           <a:ln>
             <a:noFill/>
@@ -11832,7 +11832,7 @@
             <a:avLst/>
           </a:prstGeom>
           <a:solidFill>
-            <a:srgbClr val="DA291C"/>
+            <a:srgbClr val="EC0000"/>
           </a:solidFill>
           <a:ln>
             <a:noFill/>
@@ -12023,7 +12023,7 @@
             <a:avLst/>
           </a:prstGeom>
           <a:solidFill>
-            <a:srgbClr val="DA291C"/>
+            <a:srgbClr val="EC0000"/>
           </a:solidFill>
           <a:ln>
             <a:noFill/>
@@ -12214,7 +12214,7 @@
             <a:avLst/>
           </a:prstGeom>
           <a:solidFill>
-            <a:srgbClr val="DA291C"/>
+            <a:srgbClr val="EC0000"/>
           </a:solidFill>
           <a:ln>
             <a:noFill/>
@@ -12405,7 +12405,7 @@
             <a:avLst/>
           </a:prstGeom>
           <a:solidFill>
-            <a:srgbClr val="DA291C"/>
+            <a:srgbClr val="EC0000"/>
           </a:solidFill>
           <a:ln>
             <a:noFill/>
@@ -12596,7 +12596,7 @@
             <a:avLst/>
           </a:prstGeom>
           <a:solidFill>
-            <a:srgbClr val="DA291C"/>
+            <a:srgbClr val="EC0000"/>
           </a:solidFill>
           <a:ln>
             <a:noFill/>
@@ -12787,7 +12787,7 @@
             <a:avLst/>
           </a:prstGeom>
           <a:solidFill>
-            <a:srgbClr val="DA291C"/>
+            <a:srgbClr val="EC0000"/>
           </a:solidFill>
           <a:ln>
             <a:noFill/>
@@ -13101,7 +13101,7 @@
             <a:avLst/>
           </a:prstGeom>
           <a:solidFill>
-            <a:srgbClr val="FAF6EF"/>
+            <a:srgbClr val="FBF1EA"/>
           </a:solidFill>
           <a:ln>
             <a:noFill/>
@@ -13144,7 +13144,7 @@
             <a:avLst/>
           </a:prstGeom>
           <a:solidFill>
-            <a:srgbClr val="DA291C"/>
+            <a:srgbClr val="EC0000"/>
           </a:solidFill>
           <a:ln>
             <a:noFill/>
@@ -13198,7 +13198,7 @@
             <a:r>
               <a:rPr sz="950" b="1" i="0">
                 <a:solidFill>
-                  <a:srgbClr val="DA291C"/>
+                  <a:srgbClr val="EC0000"/>
                 </a:solidFill>
                 <a:latin typeface="Calibri"/>
               </a:rPr>
@@ -13335,7 +13335,7 @@
             <a:avLst/>
           </a:prstGeom>
           <a:solidFill>
-            <a:srgbClr val="DA291C"/>
+            <a:srgbClr val="EC0000"/>
           </a:solidFill>
           <a:ln>
             <a:noFill/>
@@ -13493,7 +13493,7 @@
             <a:avLst/>
           </a:prstGeom>
           <a:solidFill>
-            <a:srgbClr val="DA291C"/>
+            <a:srgbClr val="EC0000"/>
           </a:solidFill>
           <a:ln>
             <a:noFill/>
@@ -13655,7 +13655,7 @@
             <a:avLst/>
           </a:prstGeom>
           <a:solidFill>
-            <a:srgbClr val="DA291C"/>
+            <a:srgbClr val="EC0000"/>
           </a:solidFill>
           <a:ln>
             <a:noFill/>
@@ -13817,7 +13817,7 @@
             <a:avLst/>
           </a:prstGeom>
           <a:solidFill>
-            <a:srgbClr val="DA291C"/>
+            <a:srgbClr val="EC0000"/>
           </a:solidFill>
           <a:ln>
             <a:noFill/>
@@ -13979,7 +13979,7 @@
             <a:avLst/>
           </a:prstGeom>
           <a:solidFill>
-            <a:srgbClr val="DA291C"/>
+            <a:srgbClr val="EC0000"/>
           </a:solidFill>
           <a:ln>
             <a:noFill/>
@@ -14141,7 +14141,7 @@
             <a:avLst/>
           </a:prstGeom>
           <a:solidFill>
-            <a:srgbClr val="DA291C"/>
+            <a:srgbClr val="EC0000"/>
           </a:solidFill>
           <a:ln>
             <a:noFill/>
@@ -14303,7 +14303,7 @@
             <a:avLst/>
           </a:prstGeom>
           <a:solidFill>
-            <a:srgbClr val="DA291C"/>
+            <a:srgbClr val="EC0000"/>
           </a:solidFill>
           <a:ln>
             <a:noFill/>
@@ -14586,7 +14586,7 @@
             <a:avLst/>
           </a:prstGeom>
           <a:solidFill>
-            <a:srgbClr val="FAF6EF"/>
+            <a:srgbClr val="FBF1EA"/>
           </a:solidFill>
           <a:ln>
             <a:noFill/>
@@ -14629,7 +14629,7 @@
             <a:avLst/>
           </a:prstGeom>
           <a:solidFill>
-            <a:srgbClr val="DA291C"/>
+            <a:srgbClr val="EC0000"/>
           </a:solidFill>
           <a:ln>
             <a:noFill/>
@@ -14683,7 +14683,7 @@
             <a:r>
               <a:rPr sz="950" b="1" i="0">
                 <a:solidFill>
-                  <a:srgbClr val="DA291C"/>
+                  <a:srgbClr val="EC0000"/>
                 </a:solidFill>
                 <a:latin typeface="Calibri"/>
               </a:rPr>
@@ -14865,7 +14865,7 @@
             <a:avLst/>
           </a:prstGeom>
           <a:solidFill>
-            <a:srgbClr val="DA291C"/>
+            <a:srgbClr val="EC0000"/>
           </a:solidFill>
           <a:ln>
             <a:noFill/>
@@ -14974,7 +14974,7 @@
             <a:r>
               <a:rPr sz="1600" b="1" i="0">
                 <a:solidFill>
-                  <a:srgbClr val="DA291C"/>
+                  <a:srgbClr val="EC0000"/>
                 </a:solidFill>
                 <a:latin typeface="Calibri"/>
               </a:rPr>
@@ -15184,7 +15184,7 @@
             <a:r>
               <a:rPr sz="1600" b="1" i="0">
                 <a:solidFill>
-                  <a:srgbClr val="DA291C"/>
+                  <a:srgbClr val="EC0000"/>
                 </a:solidFill>
                 <a:latin typeface="Calibri"/>
               </a:rPr>
@@ -15380,7 +15380,7 @@
             <a:avLst/>
           </a:prstGeom>
           <a:solidFill>
-            <a:srgbClr val="DA291C"/>
+            <a:srgbClr val="EC0000"/>
           </a:solidFill>
           <a:ln>
             <a:noFill/>
@@ -15953,7 +15953,7 @@
             <a:avLst/>
           </a:prstGeom>
           <a:solidFill>
-            <a:srgbClr val="FAF6EF"/>
+            <a:srgbClr val="FBF1EA"/>
           </a:solidFill>
           <a:ln>
             <a:noFill/>
@@ -15996,7 +15996,7 @@
             <a:avLst/>
           </a:prstGeom>
           <a:solidFill>
-            <a:srgbClr val="DA291C"/>
+            <a:srgbClr val="EC0000"/>
           </a:solidFill>
           <a:ln>
             <a:noFill/>
@@ -16050,7 +16050,7 @@
             <a:r>
               <a:rPr sz="950" b="1" i="0">
                 <a:solidFill>
-                  <a:srgbClr val="DA291C"/>
+                  <a:srgbClr val="EC0000"/>
                 </a:solidFill>
                 <a:latin typeface="Calibri"/>
               </a:rPr>
@@ -16230,7 +16230,7 @@
             <a:avLst/>
           </a:prstGeom>
           <a:solidFill>
-            <a:srgbClr val="DA291C"/>
+            <a:srgbClr val="EC0000"/>
           </a:solidFill>
           <a:ln>
             <a:noFill/>
@@ -16351,7 +16351,7 @@
             <a:avLst/>
           </a:prstGeom>
           <a:solidFill>
-            <a:srgbClr val="DA291C"/>
+            <a:srgbClr val="EC0000"/>
           </a:solidFill>
           <a:ln>
             <a:noFill/>
@@ -16472,7 +16472,7 @@
             <a:avLst/>
           </a:prstGeom>
           <a:solidFill>
-            <a:srgbClr val="DA291C"/>
+            <a:srgbClr val="EC0000"/>
           </a:solidFill>
           <a:ln>
             <a:noFill/>
@@ -16593,7 +16593,7 @@
             <a:avLst/>
           </a:prstGeom>
           <a:solidFill>
-            <a:srgbClr val="DA291C"/>
+            <a:srgbClr val="EC0000"/>
           </a:solidFill>
           <a:ln>
             <a:noFill/>
@@ -16714,7 +16714,7 @@
             <a:avLst/>
           </a:prstGeom>
           <a:solidFill>
-            <a:srgbClr val="DA291C"/>
+            <a:srgbClr val="EC0000"/>
           </a:solidFill>
           <a:ln>
             <a:noFill/>
@@ -16835,7 +16835,7 @@
             <a:avLst/>
           </a:prstGeom>
           <a:solidFill>
-            <a:srgbClr val="DA291C"/>
+            <a:srgbClr val="EC0000"/>
           </a:solidFill>
           <a:ln>
             <a:noFill/>
@@ -16956,7 +16956,7 @@
             <a:avLst/>
           </a:prstGeom>
           <a:solidFill>
-            <a:srgbClr val="DA291C"/>
+            <a:srgbClr val="EC0000"/>
           </a:solidFill>
           <a:ln>
             <a:noFill/>
@@ -17114,7 +17114,7 @@
             <a:avLst/>
           </a:prstGeom>
           <a:solidFill>
-            <a:srgbClr val="DA291C"/>
+            <a:srgbClr val="EC0000"/>
           </a:solidFill>
           <a:ln>
             <a:noFill/>
@@ -17276,7 +17276,7 @@
             <a:avLst/>
           </a:prstGeom>
           <a:solidFill>
-            <a:srgbClr val="DA291C"/>
+            <a:srgbClr val="EC0000"/>
           </a:solidFill>
           <a:ln>
             <a:noFill/>
@@ -17438,7 +17438,7 @@
             <a:avLst/>
           </a:prstGeom>
           <a:solidFill>
-            <a:srgbClr val="DA291C"/>
+            <a:srgbClr val="EC0000"/>
           </a:solidFill>
           <a:ln>
             <a:noFill/>
@@ -17600,7 +17600,7 @@
             <a:avLst/>
           </a:prstGeom>
           <a:solidFill>
-            <a:srgbClr val="DA291C"/>
+            <a:srgbClr val="EC0000"/>
           </a:solidFill>
           <a:ln>
             <a:noFill/>
@@ -17762,7 +17762,7 @@
             <a:avLst/>
           </a:prstGeom>
           <a:solidFill>
-            <a:srgbClr val="DA291C"/>
+            <a:srgbClr val="EC0000"/>
           </a:solidFill>
           <a:ln>
             <a:noFill/>
@@ -17924,7 +17924,7 @@
             <a:avLst/>
           </a:prstGeom>
           <a:solidFill>
-            <a:srgbClr val="DA291C"/>
+            <a:srgbClr val="EC0000"/>
           </a:solidFill>
           <a:ln>
             <a:noFill/>
@@ -18207,7 +18207,7 @@
             <a:avLst/>
           </a:prstGeom>
           <a:solidFill>
-            <a:srgbClr val="FAF6EF"/>
+            <a:srgbClr val="FBF1EA"/>
           </a:solidFill>
           <a:ln>
             <a:noFill/>
@@ -18250,7 +18250,7 @@
             <a:avLst/>
           </a:prstGeom>
           <a:solidFill>
-            <a:srgbClr val="DA291C"/>
+            <a:srgbClr val="EC0000"/>
           </a:solidFill>
           <a:ln>
             <a:noFill/>
@@ -18304,7 +18304,7 @@
             <a:r>
               <a:rPr sz="950" b="1" i="0">
                 <a:solidFill>
-                  <a:srgbClr val="DA291C"/>
+                  <a:srgbClr val="EC0000"/>
                 </a:solidFill>
                 <a:latin typeface="Calibri"/>
               </a:rPr>
@@ -18872,7 +18872,7 @@
             <a:avLst/>
           </a:prstGeom>
           <a:solidFill>
-            <a:srgbClr val="DA291C"/>
+            <a:srgbClr val="EC0000"/>
           </a:solidFill>
           <a:ln>
             <a:noFill/>
@@ -19135,7 +19135,7 @@
             <a:avLst/>
           </a:prstGeom>
           <a:solidFill>
-            <a:srgbClr val="DA291C"/>
+            <a:srgbClr val="EC0000"/>
           </a:solidFill>
           <a:ln>
             <a:noFill/>
@@ -19414,7 +19414,7 @@
             <a:avLst/>
           </a:prstGeom>
           <a:solidFill>
-            <a:srgbClr val="FAF6EF"/>
+            <a:srgbClr val="FBF1EA"/>
           </a:solidFill>
           <a:ln>
             <a:noFill/>
@@ -19457,7 +19457,7 @@
             <a:avLst/>
           </a:prstGeom>
           <a:solidFill>
-            <a:srgbClr val="DA291C"/>
+            <a:srgbClr val="EC0000"/>
           </a:solidFill>
           <a:ln>
             <a:noFill/>
@@ -19511,7 +19511,7 @@
             <a:r>
               <a:rPr sz="950" b="1" i="0">
                 <a:solidFill>
-                  <a:srgbClr val="DA291C"/>
+                  <a:srgbClr val="EC0000"/>
                 </a:solidFill>
                 <a:latin typeface="Calibri"/>
               </a:rPr>
@@ -19693,7 +19693,7 @@
             <a:avLst/>
           </a:prstGeom>
           <a:solidFill>
-            <a:srgbClr val="DA291C"/>
+            <a:srgbClr val="EC0000"/>
           </a:solidFill>
           <a:ln>
             <a:noFill/>
@@ -20474,7 +20474,7 @@
             <a:avLst/>
           </a:prstGeom>
           <a:solidFill>
-            <a:srgbClr val="FAF6EF"/>
+            <a:srgbClr val="FBF1EA"/>
           </a:solidFill>
           <a:ln>
             <a:noFill/>
@@ -20517,7 +20517,7 @@
             <a:avLst/>
           </a:prstGeom>
           <a:solidFill>
-            <a:srgbClr val="DA291C"/>
+            <a:srgbClr val="EC0000"/>
           </a:solidFill>
           <a:ln>
             <a:noFill/>
@@ -20571,7 +20571,7 @@
             <a:r>
               <a:rPr sz="950" b="1" i="0">
                 <a:solidFill>
-                  <a:srgbClr val="DA291C"/>
+                  <a:srgbClr val="EC0000"/>
                 </a:solidFill>
                 <a:latin typeface="Calibri"/>
               </a:rPr>
@@ -20900,7 +20900,7 @@
             <a:avLst/>
           </a:prstGeom>
           <a:solidFill>
-            <a:srgbClr val="DA291C"/>
+            <a:srgbClr val="EC0000"/>
           </a:solidFill>
           <a:ln>
             <a:noFill/>
@@ -21056,7 +21056,7 @@
             <a:avLst/>
           </a:prstGeom>
           <a:solidFill>
-            <a:srgbClr val="DA291C"/>
+            <a:srgbClr val="EC0000"/>
           </a:solidFill>
           <a:ln>
             <a:noFill/>
@@ -21212,7 +21212,7 @@
             <a:avLst/>
           </a:prstGeom>
           <a:solidFill>
-            <a:srgbClr val="DA291C"/>
+            <a:srgbClr val="EC0000"/>
           </a:solidFill>
           <a:ln>
             <a:noFill/>
@@ -21368,7 +21368,7 @@
             <a:avLst/>
           </a:prstGeom>
           <a:solidFill>
-            <a:srgbClr val="DA291C"/>
+            <a:srgbClr val="EC0000"/>
           </a:solidFill>
           <a:ln>
             <a:noFill/>
@@ -21524,7 +21524,7 @@
             <a:avLst/>
           </a:prstGeom>
           <a:solidFill>
-            <a:srgbClr val="DA291C"/>
+            <a:srgbClr val="EC0000"/>
           </a:solidFill>
           <a:ln>
             <a:noFill/>
@@ -21680,7 +21680,7 @@
             <a:avLst/>
           </a:prstGeom>
           <a:solidFill>
-            <a:srgbClr val="DA291C"/>
+            <a:srgbClr val="EC0000"/>
           </a:solidFill>
           <a:ln>
             <a:noFill/>
@@ -21836,7 +21836,7 @@
             <a:avLst/>
           </a:prstGeom>
           <a:solidFill>
-            <a:srgbClr val="DA291C"/>
+            <a:srgbClr val="EC0000"/>
           </a:solidFill>
           <a:ln>
             <a:noFill/>
@@ -21992,7 +21992,7 @@
             <a:avLst/>
           </a:prstGeom>
           <a:solidFill>
-            <a:srgbClr val="DA291C"/>
+            <a:srgbClr val="EC0000"/>
           </a:solidFill>
           <a:ln>
             <a:noFill/>
@@ -22148,7 +22148,7 @@
             <a:avLst/>
           </a:prstGeom>
           <a:solidFill>
-            <a:srgbClr val="DA291C"/>
+            <a:srgbClr val="EC0000"/>
           </a:solidFill>
           <a:ln>
             <a:noFill/>
@@ -22304,7 +22304,7 @@
             <a:avLst/>
           </a:prstGeom>
           <a:solidFill>
-            <a:srgbClr val="DA291C"/>
+            <a:srgbClr val="EC0000"/>
           </a:solidFill>
           <a:ln>
             <a:noFill/>
@@ -22460,7 +22460,7 @@
             <a:avLst/>
           </a:prstGeom>
           <a:solidFill>
-            <a:srgbClr val="DA291C"/>
+            <a:srgbClr val="EC0000"/>
           </a:solidFill>
           <a:ln>
             <a:noFill/>
@@ -22616,7 +22616,7 @@
             <a:avLst/>
           </a:prstGeom>
           <a:solidFill>
-            <a:srgbClr val="DA291C"/>
+            <a:srgbClr val="EC0000"/>
           </a:solidFill>
           <a:ln>
             <a:noFill/>
@@ -22772,7 +22772,7 @@
             <a:avLst/>
           </a:prstGeom>
           <a:solidFill>
-            <a:srgbClr val="DA291C"/>
+            <a:srgbClr val="EC0000"/>
           </a:solidFill>
           <a:ln>
             <a:noFill/>
@@ -22928,7 +22928,7 @@
             <a:avLst/>
           </a:prstGeom>
           <a:solidFill>
-            <a:srgbClr val="DA291C"/>
+            <a:srgbClr val="EC0000"/>
           </a:solidFill>
           <a:ln>
             <a:noFill/>
@@ -23084,7 +23084,7 @@
             <a:avLst/>
           </a:prstGeom>
           <a:solidFill>
-            <a:srgbClr val="DA291C"/>
+            <a:srgbClr val="EC0000"/>
           </a:solidFill>
           <a:ln>
             <a:noFill/>
@@ -23240,7 +23240,7 @@
             <a:avLst/>
           </a:prstGeom>
           <a:solidFill>
-            <a:srgbClr val="DA291C"/>
+            <a:srgbClr val="EC0000"/>
           </a:solidFill>
           <a:ln>
             <a:noFill/>
@@ -23396,7 +23396,7 @@
             <a:avLst/>
           </a:prstGeom>
           <a:solidFill>
-            <a:srgbClr val="DA291C"/>
+            <a:srgbClr val="EC0000"/>
           </a:solidFill>
           <a:ln>
             <a:noFill/>

--- a/Santander_Architecture.pptx
+++ b/Santander_Architecture.pptx
@@ -4030,7 +4030,7 @@
                 </a:solidFill>
                 <a:latin typeface="Calibri"/>
               </a:rPr>
-              <a:t>Alan Davidson  ·  Business Banking Advisor  ·  Self-initiated  ·  June 2026</a:t>
+              <a:t>Alan Davidson  ·  Business Banking Advisor  ·  Self-initiated  ·  July 2026</a:t>
             </a:r>
           </a:p>
         </p:txBody>
@@ -6044,7 +6044,7 @@
                 </a:solidFill>
                 <a:latin typeface="Calibri"/>
               </a:rPr>
-              <a:t>Alan Davidson · Business Banking Advisor · Self-initiated · Own time · June 2026</a:t>
+              <a:t>Alan Davidson · Business Banking Advisor · Self-initiated · Own time · July 2026</a:t>
             </a:r>
           </a:p>
         </p:txBody>
@@ -7564,7 +7564,7 @@
                 </a:solidFill>
                 <a:latin typeface="Calibri"/>
               </a:rPr>
-              <a:t>Alan Davidson · Business Banking Advisor · Self-initiated · Own time · June 2026</a:t>
+              <a:t>Alan Davidson · Business Banking Advisor · Self-initiated · Own time · July 2026</a:t>
             </a:r>
           </a:p>
         </p:txBody>
@@ -9260,7 +9260,7 @@
                 </a:solidFill>
                 <a:latin typeface="Calibri"/>
               </a:rPr>
-              <a:t>Alan Davidson · Business Banking Advisor · Self-initiated · Own time · June 2026</a:t>
+              <a:t>Alan Davidson · Business Banking Advisor · Self-initiated · Own time · July 2026</a:t>
             </a:r>
           </a:p>
         </p:txBody>
@@ -11100,7 +11100,7 @@
                 </a:solidFill>
                 <a:latin typeface="Calibri"/>
               </a:rPr>
-              <a:t>Alan Davidson · Business Banking Advisor · Self-initiated · Own time · June 2026</a:t>
+              <a:t>Alan Davidson · Business Banking Advisor · Self-initiated · Own time · July 2026</a:t>
             </a:r>
           </a:p>
         </p:txBody>
@@ -13028,7 +13028,7 @@
                 </a:solidFill>
                 <a:latin typeface="Calibri"/>
               </a:rPr>
-              <a:t>Alan Davidson · Business Banking Advisor · Self-initiated · Own time · June 2026</a:t>
+              <a:t>Alan Davidson · Business Banking Advisor · Self-initiated · Own time · July 2026</a:t>
             </a:r>
           </a:p>
         </p:txBody>
@@ -14513,7 +14513,7 @@
                 </a:solidFill>
                 <a:latin typeface="Calibri"/>
               </a:rPr>
-              <a:t>Alan Davidson · Business Banking Advisor · Self-initiated · Own time · June 2026</a:t>
+              <a:t>Alan Davidson · Business Banking Advisor · Self-initiated · Own time · July 2026</a:t>
             </a:r>
           </a:p>
         </p:txBody>
@@ -15880,7 +15880,7 @@
                 </a:solidFill>
                 <a:latin typeface="Calibri"/>
               </a:rPr>
-              <a:t>Alan Davidson · Business Banking Advisor · Self-initiated · Own time · June 2026</a:t>
+              <a:t>Alan Davidson · Business Banking Advisor · Self-initiated · Own time · July 2026</a:t>
             </a:r>
           </a:p>
         </p:txBody>
@@ -18134,7 +18134,7 @@
                 </a:solidFill>
                 <a:latin typeface="Calibri"/>
               </a:rPr>
-              <a:t>Alan Davidson · Business Banking Advisor · Self-initiated · Own time · June 2026</a:t>
+              <a:t>Alan Davidson · Business Banking Advisor · Self-initiated · Own time · July 2026</a:t>
             </a:r>
           </a:p>
         </p:txBody>
@@ -19341,7 +19341,7 @@
                 </a:solidFill>
                 <a:latin typeface="Calibri"/>
               </a:rPr>
-              <a:t>Alan Davidson · Business Banking Advisor · Self-initiated · Own time · June 2026</a:t>
+              <a:t>Alan Davidson · Business Banking Advisor · Self-initiated · Own time · July 2026</a:t>
             </a:r>
           </a:p>
         </p:txBody>
@@ -20401,7 +20401,7 @@
                 </a:solidFill>
                 <a:latin typeface="Calibri"/>
               </a:rPr>
-              <a:t>Alan Davidson · Business Banking Advisor · Self-initiated · Own time · June 2026</a:t>
+              <a:t>Alan Davidson · Business Banking Advisor · Self-initiated · Own time · July 2026</a:t>
             </a:r>
           </a:p>
         </p:txBody>
@@ -20801,7 +20801,7 @@
                 </a:solidFill>
                 <a:latin typeface="Calibri"/>
               </a:rPr>
-              <a:t>Alan Davidson · Business Banking Advisor · Self-initiated · Own time · June 2026</a:t>
+              <a:t>Alan Davidson · Business Banking Advisor · Self-initiated · Own time · July 2026</a:t>
             </a:r>
           </a:p>
         </p:txBody>
